--- a/Presentazione_07_09 (1).pptx
+++ b/Presentazione_07_09 (1).pptx
@@ -7,7 +7,7 @@
     <p:sldMasterId id="2147483682" r:id="rId6"/>
   </p:sldMasterIdLst>
   <p:notesMasterIdLst>
-    <p:notesMasterId r:id="rId22"/>
+    <p:notesMasterId r:id="rId29"/>
   </p:notesMasterIdLst>
   <p:sldIdLst>
     <p:sldId id="257" r:id="rId7"/>
@@ -20,11 +20,18 @@
     <p:sldId id="331" r:id="rId14"/>
     <p:sldId id="333" r:id="rId15"/>
     <p:sldId id="332" r:id="rId16"/>
-    <p:sldId id="334" r:id="rId17"/>
-    <p:sldId id="335" r:id="rId18"/>
-    <p:sldId id="336" r:id="rId19"/>
-    <p:sldId id="337" r:id="rId20"/>
-    <p:sldId id="298" r:id="rId21"/>
+    <p:sldId id="345" r:id="rId17"/>
+    <p:sldId id="344" r:id="rId18"/>
+    <p:sldId id="334" r:id="rId19"/>
+    <p:sldId id="346" r:id="rId20"/>
+    <p:sldId id="335" r:id="rId21"/>
+    <p:sldId id="336" r:id="rId22"/>
+    <p:sldId id="342" r:id="rId23"/>
+    <p:sldId id="347" r:id="rId24"/>
+    <p:sldId id="343" r:id="rId25"/>
+    <p:sldId id="341" r:id="rId26"/>
+    <p:sldId id="337" r:id="rId27"/>
+    <p:sldId id="298" r:id="rId28"/>
   </p:sldIdLst>
   <p:sldSz cx="12192000" cy="6858000"/>
   <p:notesSz cx="6858000" cy="9144000"/>
@@ -1260,7 +1267,7 @@
           <a:p>
             <a:fld id="{71531CDF-70D6-4AEF-91E2-1A078360BAF5}" type="datetimeFigureOut">
               <a:rPr lang="it-IT" smtClean="0"/>
-              <a:t>02/09/2026</a:t>
+              <a:t>03/09/2026</a:t>
             </a:fld>
             <a:endParaRPr lang="it-IT"/>
           </a:p>
@@ -4542,7 +4549,7 @@
           <a:p>
             <a:fld id="{0AAAF750-697A-42EE-BA8B-A382A30B9D4A}" type="datetimeFigureOut">
               <a:rPr lang="en-GB" smtClean="0"/>
-              <a:t>02/09/2026</a:t>
+              <a:t>03/09/2026</a:t>
             </a:fld>
             <a:endParaRPr lang="en-GB"/>
           </a:p>
@@ -4742,7 +4749,7 @@
           <a:p>
             <a:fld id="{0AAAF750-697A-42EE-BA8B-A382A30B9D4A}" type="datetimeFigureOut">
               <a:rPr lang="en-GB" smtClean="0"/>
-              <a:t>02/09/2026</a:t>
+              <a:t>03/09/2026</a:t>
             </a:fld>
             <a:endParaRPr lang="en-GB"/>
           </a:p>
@@ -5018,7 +5025,7 @@
           <a:p>
             <a:fld id="{0AAAF750-697A-42EE-BA8B-A382A30B9D4A}" type="datetimeFigureOut">
               <a:rPr lang="en-GB" smtClean="0"/>
-              <a:t>02/09/2026</a:t>
+              <a:t>03/09/2026</a:t>
             </a:fld>
             <a:endParaRPr lang="en-GB"/>
           </a:p>
@@ -5286,7 +5293,7 @@
           <a:p>
             <a:fld id="{0AAAF750-697A-42EE-BA8B-A382A30B9D4A}" type="datetimeFigureOut">
               <a:rPr lang="en-GB" smtClean="0"/>
-              <a:t>02/09/2026</a:t>
+              <a:t>03/09/2026</a:t>
             </a:fld>
             <a:endParaRPr lang="en-GB"/>
           </a:p>
@@ -5701,7 +5708,7 @@
           <a:p>
             <a:fld id="{0AAAF750-697A-42EE-BA8B-A382A30B9D4A}" type="datetimeFigureOut">
               <a:rPr lang="en-GB" smtClean="0"/>
-              <a:t>02/09/2026</a:t>
+              <a:t>03/09/2026</a:t>
             </a:fld>
             <a:endParaRPr lang="en-GB"/>
           </a:p>
@@ -5843,7 +5850,7 @@
           <a:p>
             <a:fld id="{0AAAF750-697A-42EE-BA8B-A382A30B9D4A}" type="datetimeFigureOut">
               <a:rPr lang="en-GB" smtClean="0"/>
-              <a:t>02/09/2026</a:t>
+              <a:t>03/09/2026</a:t>
             </a:fld>
             <a:endParaRPr lang="en-GB"/>
           </a:p>
@@ -5956,7 +5963,7 @@
           <a:p>
             <a:fld id="{0AAAF750-697A-42EE-BA8B-A382A30B9D4A}" type="datetimeFigureOut">
               <a:rPr lang="en-GB" smtClean="0"/>
-              <a:t>02/09/2026</a:t>
+              <a:t>03/09/2026</a:t>
             </a:fld>
             <a:endParaRPr lang="en-GB"/>
           </a:p>
@@ -6269,7 +6276,7 @@
           <a:p>
             <a:fld id="{0AAAF750-697A-42EE-BA8B-A382A30B9D4A}" type="datetimeFigureOut">
               <a:rPr lang="en-GB" smtClean="0"/>
-              <a:t>02/09/2026</a:t>
+              <a:t>03/09/2026</a:t>
             </a:fld>
             <a:endParaRPr lang="en-GB"/>
           </a:p>
@@ -6558,7 +6565,7 @@
           <a:p>
             <a:fld id="{0AAAF750-697A-42EE-BA8B-A382A30B9D4A}" type="datetimeFigureOut">
               <a:rPr lang="en-GB" smtClean="0"/>
-              <a:t>02/09/2026</a:t>
+              <a:t>03/09/2026</a:t>
             </a:fld>
             <a:endParaRPr lang="en-GB"/>
           </a:p>
@@ -6758,7 +6765,7 @@
           <a:p>
             <a:fld id="{0AAAF750-697A-42EE-BA8B-A382A30B9D4A}" type="datetimeFigureOut">
               <a:rPr lang="en-GB" smtClean="0"/>
-              <a:t>02/09/2026</a:t>
+              <a:t>03/09/2026</a:t>
             </a:fld>
             <a:endParaRPr lang="en-GB"/>
           </a:p>
@@ -7297,7 +7304,7 @@
           <a:p>
             <a:fld id="{0AAAF750-697A-42EE-BA8B-A382A30B9D4A}" type="datetimeFigureOut">
               <a:rPr lang="en-GB" smtClean="0"/>
-              <a:t>02/09/2026</a:t>
+              <a:t>03/09/2026</a:t>
             </a:fld>
             <a:endParaRPr lang="en-GB"/>
           </a:p>
@@ -9340,7 +9347,7 @@
           <a:p>
             <a:fld id="{0AAAF750-697A-42EE-BA8B-A382A30B9D4A}" type="datetimeFigureOut">
               <a:rPr lang="en-GB" smtClean="0"/>
-              <a:t>02/09/2026</a:t>
+              <a:t>03/09/2026</a:t>
             </a:fld>
             <a:endParaRPr lang="en-GB"/>
           </a:p>
@@ -10696,7 +10703,12 @@
             <p:ph type="title"/>
           </p:nvPr>
         </p:nvSpPr>
-        <p:spPr/>
+        <p:spPr>
+          <a:xfrm>
+            <a:off x="263524" y="170475"/>
+            <a:ext cx="11664950" cy="1080000"/>
+          </a:xfrm>
+        </p:spPr>
         <p:txBody>
           <a:bodyPr/>
           <a:lstStyle/>
@@ -10724,48 +10736,53 @@
           </a:p>
         </p:txBody>
       </p:sp>
-      <p:sp>
-        <p:nvSpPr>
-          <p:cNvPr id="3" name="Segnaposto contenuto 2">
+      <p:pic>
+        <p:nvPicPr>
+          <p:cNvPr id="13" name="Immagine 12">
             <a:extLst>
               <a:ext uri="{FF2B5EF4-FFF2-40B4-BE49-F238E27FC236}">
-                <a16:creationId xmlns:a16="http://schemas.microsoft.com/office/drawing/2014/main" id="{EC9CA506-91AB-EA7F-5507-C15F52F9F8DC}"/>
+                <a16:creationId xmlns:a16="http://schemas.microsoft.com/office/drawing/2014/main" id="{FA947D95-C7DB-DE67-54F0-253F5BE85953}"/>
               </a:ext>
             </a:extLst>
           </p:cNvPr>
-          <p:cNvSpPr>
-            <a:spLocks noGrp="1"/>
-          </p:cNvSpPr>
-          <p:nvPr>
-            <p:ph idx="1"/>
-          </p:nvPr>
-        </p:nvSpPr>
-        <p:spPr/>
-        <p:txBody>
-          <a:bodyPr/>
-          <a:lstStyle/>
-          <a:p>
-            <a:r>
-              <a:rPr lang="en-GB" noProof="0" dirty="0"/>
-              <a:t>Sfera </a:t>
-            </a:r>
-            <a:r>
-              <a:rPr lang="en-GB" noProof="0" dirty="0" err="1"/>
-              <a:t>poincare</a:t>
-            </a:r>
-            <a:endParaRPr lang="en-GB" noProof="0" dirty="0"/>
-          </a:p>
-          <a:p>
-            <a:endParaRPr lang="en-GB" noProof="0" dirty="0"/>
-          </a:p>
-          <a:p>
-            <a:r>
-              <a:rPr lang="en-GB" noProof="0" dirty="0"/>
-              <a:t> </a:t>
-            </a:r>
-          </a:p>
-        </p:txBody>
-      </p:sp>
+          <p:cNvPicPr>
+            <a:picLocks noChangeAspect="1"/>
+          </p:cNvPicPr>
+          <p:nvPr/>
+        </p:nvPicPr>
+        <p:blipFill>
+          <a:blip r:embed="rId2">
+            <a:clrChange>
+              <a:clrFrom>
+                <a:srgbClr val="FFFFFF"/>
+              </a:clrFrom>
+              <a:clrTo>
+                <a:srgbClr val="FFFFFF">
+                  <a:alpha val="0"/>
+                </a:srgbClr>
+              </a:clrTo>
+            </a:clrChange>
+            <a:extLst>
+              <a:ext uri="{28A0092B-C50C-407E-A947-70E740481C1C}">
+                <a14:useLocalDpi xmlns:a14="http://schemas.microsoft.com/office/drawing/2010/main" val="0"/>
+              </a:ext>
+            </a:extLst>
+          </a:blip>
+          <a:srcRect t="7768"/>
+          <a:stretch>
+            <a:fillRect/>
+          </a:stretch>
+        </p:blipFill>
+        <p:spPr>
+          <a:xfrm>
+            <a:off x="0" y="881925"/>
+            <a:ext cx="12192000" cy="5616575"/>
+          </a:xfrm>
+          <a:prstGeom prst="rect">
+            <a:avLst/>
+          </a:prstGeom>
+        </p:spPr>
+      </p:pic>
     </p:spTree>
     <p:extLst>
       <p:ext uri="{BB962C8B-B14F-4D97-AF65-F5344CB8AC3E}">
@@ -10780,6 +10797,3323 @@
 </file>
 
 <file path=ppt/slides/slide11.xml><?xml version="1.0" encoding="utf-8"?>
+<p:sld xmlns:a="http://schemas.openxmlformats.org/drawingml/2006/main" xmlns:r="http://schemas.openxmlformats.org/officeDocument/2006/relationships" xmlns:p="http://schemas.openxmlformats.org/presentationml/2006/main">
+  <p:cSld>
+    <p:spTree>
+      <p:nvGrpSpPr>
+        <p:cNvPr id="1" name=""/>
+        <p:cNvGrpSpPr/>
+        <p:nvPr/>
+      </p:nvGrpSpPr>
+      <p:grpSpPr>
+        <a:xfrm>
+          <a:off x="0" y="0"/>
+          <a:ext cx="0" cy="0"/>
+          <a:chOff x="0" y="0"/>
+          <a:chExt cx="0" cy="0"/>
+        </a:xfrm>
+      </p:grpSpPr>
+      <p:sp>
+        <p:nvSpPr>
+          <p:cNvPr id="2" name="Titolo 1">
+            <a:extLst>
+              <a:ext uri="{FF2B5EF4-FFF2-40B4-BE49-F238E27FC236}">
+                <a16:creationId xmlns:a16="http://schemas.microsoft.com/office/drawing/2014/main" id="{B3B7B20A-A3FD-9793-E27F-A6D83C5D88A4}"/>
+              </a:ext>
+            </a:extLst>
+          </p:cNvPr>
+          <p:cNvSpPr>
+            <a:spLocks noGrp="1"/>
+          </p:cNvSpPr>
+          <p:nvPr>
+            <p:ph type="title"/>
+          </p:nvPr>
+        </p:nvSpPr>
+        <p:spPr>
+          <a:xfrm>
+            <a:off x="263525" y="198268"/>
+            <a:ext cx="11664950" cy="1080000"/>
+          </a:xfrm>
+        </p:spPr>
+        <p:txBody>
+          <a:bodyPr/>
+          <a:lstStyle/>
+          <a:p>
+            <a:r>
+              <a:rPr lang="it-IT" dirty="0"/>
+              <a:t>Errore ADC</a:t>
+            </a:r>
+          </a:p>
+        </p:txBody>
+      </p:sp>
+      <mc:AlternateContent xmlns:mc="http://schemas.openxmlformats.org/markup-compatibility/2006">
+        <mc:Choice xmlns:a14="http://schemas.microsoft.com/office/drawing/2010/main" Requires="a14">
+          <p:sp>
+            <p:nvSpPr>
+              <p:cNvPr id="5" name="CasellaDiTesto 4">
+                <a:extLst>
+                  <a:ext uri="{FF2B5EF4-FFF2-40B4-BE49-F238E27FC236}">
+                    <a16:creationId xmlns:a16="http://schemas.microsoft.com/office/drawing/2014/main" id="{5F646556-893C-3751-0EFD-1642ED667C85}"/>
+                  </a:ext>
+                </a:extLst>
+              </p:cNvPr>
+              <p:cNvSpPr txBox="1"/>
+              <p:nvPr/>
+            </p:nvSpPr>
+            <p:spPr>
+              <a:xfrm>
+                <a:off x="5135181" y="1190193"/>
+                <a:ext cx="4001288" cy="710066"/>
+              </a:xfrm>
+              <a:prstGeom prst="rect">
+                <a:avLst/>
+              </a:prstGeom>
+              <a:noFill/>
+            </p:spPr>
+            <p:txBody>
+              <a:bodyPr wrap="none" lIns="0" tIns="0" rIns="0" bIns="0" rtlCol="0">
+                <a:spAutoFit/>
+              </a:bodyPr>
+              <a:lstStyle/>
+              <a:p>
+                <a14:m>
+                  <m:oMathPara xmlns:m="http://schemas.openxmlformats.org/officeDocument/2006/math">
+                    <m:oMath>
+                      <m:sSub>
+                        <m:sSubPr>
+                          <m:ctrlPr>
+                            <a:rPr lang="it-IT" b="0" i="1" smtClean="0">
+                              <a:latin typeface="Cambria Math" panose="02040503050406030204" pitchFamily="18" charset="0"/>
+                            </a:rPr>
+                          </m:ctrlPr>
+                        </m:sSubPr>
+                        <m:e>
+                          <m:r>
+                            <a:rPr lang="it-IT" b="0" i="1" smtClean="0">
+                              <a:latin typeface="Cambria Math" panose="02040503050406030204" pitchFamily="18" charset="0"/>
+                            </a:rPr>
+                            <m:t>𝑆</m:t>
+                          </m:r>
+                        </m:e>
+                        <m:sub>
+                          <m:r>
+                            <a:rPr lang="it-IT" b="0" i="1" smtClean="0">
+                              <a:latin typeface="Cambria Math" panose="02040503050406030204" pitchFamily="18" charset="0"/>
+                            </a:rPr>
+                            <m:t>1</m:t>
+                          </m:r>
+                        </m:sub>
+                      </m:sSub>
+                      <m:r>
+                        <a:rPr lang="it-IT" i="1" smtClean="0">
+                          <a:latin typeface="Cambria Math" panose="02040503050406030204" pitchFamily="18" charset="0"/>
+                        </a:rPr>
+                        <m:t>=</m:t>
+                      </m:r>
+                      <m:f>
+                        <m:fPr>
+                          <m:ctrlPr>
+                            <a:rPr lang="it-IT" b="0" i="1" smtClean="0">
+                              <a:latin typeface="Cambria Math" panose="02040503050406030204" pitchFamily="18" charset="0"/>
+                            </a:rPr>
+                          </m:ctrlPr>
+                        </m:fPr>
+                        <m:num>
+                          <m:sSup>
+                            <m:sSupPr>
+                              <m:ctrlPr>
+                                <a:rPr lang="it-IT" b="0" i="1" smtClean="0">
+                                  <a:latin typeface="Cambria Math" panose="02040503050406030204" pitchFamily="18" charset="0"/>
+                                </a:rPr>
+                              </m:ctrlPr>
+                            </m:sSupPr>
+                            <m:e>
+                              <m:d>
+                                <m:dPr>
+                                  <m:begChr m:val="|"/>
+                                  <m:endChr m:val="|"/>
+                                  <m:ctrlPr>
+                                    <a:rPr lang="it-IT" b="0" i="1" smtClean="0">
+                                      <a:latin typeface="Cambria Math" panose="02040503050406030204" pitchFamily="18" charset="0"/>
+                                    </a:rPr>
+                                  </m:ctrlPr>
+                                </m:dPr>
+                                <m:e>
+                                  <m:sSub>
+                                    <m:sSubPr>
+                                      <m:ctrlPr>
+                                        <a:rPr lang="it-IT" b="0" i="1" smtClean="0">
+                                          <a:latin typeface="Cambria Math" panose="02040503050406030204" pitchFamily="18" charset="0"/>
+                                        </a:rPr>
+                                      </m:ctrlPr>
+                                    </m:sSubPr>
+                                    <m:e>
+                                      <m:r>
+                                        <a:rPr lang="it-IT" b="0" i="1" smtClean="0">
+                                          <a:latin typeface="Cambria Math" panose="02040503050406030204" pitchFamily="18" charset="0"/>
+                                        </a:rPr>
+                                        <m:t>𝐸</m:t>
+                                      </m:r>
+                                    </m:e>
+                                    <m:sub>
+                                      <m:r>
+                                        <a:rPr lang="it-IT" b="0" i="1" smtClean="0">
+                                          <a:latin typeface="Cambria Math" panose="02040503050406030204" pitchFamily="18" charset="0"/>
+                                        </a:rPr>
+                                        <m:t>𝑥</m:t>
+                                      </m:r>
+                                    </m:sub>
+                                  </m:sSub>
+                                </m:e>
+                              </m:d>
+                            </m:e>
+                            <m:sup>
+                              <m:r>
+                                <a:rPr lang="it-IT" b="0" i="1" smtClean="0">
+                                  <a:latin typeface="Cambria Math" panose="02040503050406030204" pitchFamily="18" charset="0"/>
+                                </a:rPr>
+                                <m:t>2</m:t>
+                              </m:r>
+                            </m:sup>
+                          </m:sSup>
+                          <m:r>
+                            <a:rPr lang="it-IT" b="0" i="1" smtClean="0">
+                              <a:latin typeface="Cambria Math" panose="02040503050406030204" pitchFamily="18" charset="0"/>
+                            </a:rPr>
+                            <m:t>−</m:t>
+                          </m:r>
+                          <m:sSup>
+                            <m:sSupPr>
+                              <m:ctrlPr>
+                                <a:rPr lang="it-IT" i="1">
+                                  <a:latin typeface="Cambria Math" panose="02040503050406030204" pitchFamily="18" charset="0"/>
+                                </a:rPr>
+                              </m:ctrlPr>
+                            </m:sSupPr>
+                            <m:e>
+                              <m:d>
+                                <m:dPr>
+                                  <m:begChr m:val="|"/>
+                                  <m:endChr m:val="|"/>
+                                  <m:ctrlPr>
+                                    <a:rPr lang="it-IT" i="1">
+                                      <a:latin typeface="Cambria Math" panose="02040503050406030204" pitchFamily="18" charset="0"/>
+                                    </a:rPr>
+                                  </m:ctrlPr>
+                                </m:dPr>
+                                <m:e>
+                                  <m:sSub>
+                                    <m:sSubPr>
+                                      <m:ctrlPr>
+                                        <a:rPr lang="it-IT" i="1">
+                                          <a:latin typeface="Cambria Math" panose="02040503050406030204" pitchFamily="18" charset="0"/>
+                                        </a:rPr>
+                                      </m:ctrlPr>
+                                    </m:sSubPr>
+                                    <m:e>
+                                      <m:r>
+                                        <a:rPr lang="it-IT" i="1">
+                                          <a:latin typeface="Cambria Math" panose="02040503050406030204" pitchFamily="18" charset="0"/>
+                                        </a:rPr>
+                                        <m:t>𝐸</m:t>
+                                      </m:r>
+                                    </m:e>
+                                    <m:sub>
+                                      <m:r>
+                                        <a:rPr lang="it-IT" b="0" i="1" smtClean="0">
+                                          <a:latin typeface="Cambria Math" panose="02040503050406030204" pitchFamily="18" charset="0"/>
+                                        </a:rPr>
+                                        <m:t>𝑦</m:t>
+                                      </m:r>
+                                    </m:sub>
+                                  </m:sSub>
+                                </m:e>
+                              </m:d>
+                            </m:e>
+                            <m:sup>
+                              <m:r>
+                                <a:rPr lang="it-IT" i="1">
+                                  <a:latin typeface="Cambria Math" panose="02040503050406030204" pitchFamily="18" charset="0"/>
+                                </a:rPr>
+                                <m:t>2</m:t>
+                              </m:r>
+                            </m:sup>
+                          </m:sSup>
+                        </m:num>
+                        <m:den>
+                          <m:sSub>
+                            <m:sSubPr>
+                              <m:ctrlPr>
+                                <a:rPr lang="it-IT" b="0" i="1" smtClean="0">
+                                  <a:latin typeface="Cambria Math" panose="02040503050406030204" pitchFamily="18" charset="0"/>
+                                </a:rPr>
+                              </m:ctrlPr>
+                            </m:sSubPr>
+                            <m:e>
+                              <m:r>
+                                <a:rPr lang="it-IT" b="0" i="1" smtClean="0">
+                                  <a:latin typeface="Cambria Math" panose="02040503050406030204" pitchFamily="18" charset="0"/>
+                                </a:rPr>
+                                <m:t>𝑆</m:t>
+                              </m:r>
+                            </m:e>
+                            <m:sub>
+                              <m:r>
+                                <a:rPr lang="it-IT" b="0" i="1" smtClean="0">
+                                  <a:latin typeface="Cambria Math" panose="02040503050406030204" pitchFamily="18" charset="0"/>
+                                </a:rPr>
+                                <m:t>0</m:t>
+                              </m:r>
+                            </m:sub>
+                          </m:sSub>
+                        </m:den>
+                      </m:f>
+                      <m:r>
+                        <a:rPr lang="it-IT" b="0" i="0" smtClean="0">
+                          <a:latin typeface="Cambria Math" panose="02040503050406030204" pitchFamily="18" charset="0"/>
+                        </a:rPr>
+                        <m:t>= </m:t>
+                      </m:r>
+                      <m:f>
+                        <m:fPr>
+                          <m:ctrlPr>
+                            <a:rPr lang="it-IT" b="0" i="1" smtClean="0">
+                              <a:latin typeface="Cambria Math" panose="02040503050406030204" pitchFamily="18" charset="0"/>
+                            </a:rPr>
+                          </m:ctrlPr>
+                        </m:fPr>
+                        <m:num>
+                          <m:sSub>
+                            <m:sSubPr>
+                              <m:ctrlPr>
+                                <a:rPr lang="it-IT" b="0" i="1" smtClean="0">
+                                  <a:latin typeface="Cambria Math" panose="02040503050406030204" pitchFamily="18" charset="0"/>
+                                </a:rPr>
+                              </m:ctrlPr>
+                            </m:sSubPr>
+                            <m:e>
+                              <m:r>
+                                <a:rPr lang="it-IT" b="0" i="1" smtClean="0">
+                                  <a:latin typeface="Cambria Math" panose="02040503050406030204" pitchFamily="18" charset="0"/>
+                                </a:rPr>
+                                <m:t>𝑃</m:t>
+                              </m:r>
+                            </m:e>
+                            <m:sub>
+                              <m:r>
+                                <a:rPr lang="it-IT" b="0" i="1" smtClean="0">
+                                  <a:latin typeface="Cambria Math" panose="02040503050406030204" pitchFamily="18" charset="0"/>
+                                </a:rPr>
+                                <m:t>𝑥</m:t>
+                              </m:r>
+                            </m:sub>
+                          </m:sSub>
+                          <m:r>
+                            <a:rPr lang="it-IT" b="0" i="1" smtClean="0">
+                              <a:latin typeface="Cambria Math" panose="02040503050406030204" pitchFamily="18" charset="0"/>
+                            </a:rPr>
+                            <m:t>−</m:t>
+                          </m:r>
+                          <m:sSub>
+                            <m:sSubPr>
+                              <m:ctrlPr>
+                                <a:rPr lang="it-IT" b="0" i="1" smtClean="0">
+                                  <a:latin typeface="Cambria Math" panose="02040503050406030204" pitchFamily="18" charset="0"/>
+                                </a:rPr>
+                              </m:ctrlPr>
+                            </m:sSubPr>
+                            <m:e>
+                              <m:r>
+                                <a:rPr lang="it-IT" b="0" i="1" smtClean="0">
+                                  <a:latin typeface="Cambria Math" panose="02040503050406030204" pitchFamily="18" charset="0"/>
+                                </a:rPr>
+                                <m:t>𝑃</m:t>
+                              </m:r>
+                            </m:e>
+                            <m:sub>
+                              <m:r>
+                                <a:rPr lang="it-IT" b="0" i="1" smtClean="0">
+                                  <a:latin typeface="Cambria Math" panose="02040503050406030204" pitchFamily="18" charset="0"/>
+                                </a:rPr>
+                                <m:t>𝑦</m:t>
+                              </m:r>
+                            </m:sub>
+                          </m:sSub>
+                        </m:num>
+                        <m:den>
+                          <m:sSub>
+                            <m:sSubPr>
+                              <m:ctrlPr>
+                                <a:rPr lang="it-IT" b="0" i="1" smtClean="0">
+                                  <a:latin typeface="Cambria Math" panose="02040503050406030204" pitchFamily="18" charset="0"/>
+                                </a:rPr>
+                              </m:ctrlPr>
+                            </m:sSubPr>
+                            <m:e>
+                              <m:r>
+                                <a:rPr lang="it-IT" b="0" i="1" smtClean="0">
+                                  <a:latin typeface="Cambria Math" panose="02040503050406030204" pitchFamily="18" charset="0"/>
+                                </a:rPr>
+                                <m:t>𝑃</m:t>
+                              </m:r>
+                            </m:e>
+                            <m:sub>
+                              <m:r>
+                                <a:rPr lang="it-IT" b="0" i="1" smtClean="0">
+                                  <a:latin typeface="Cambria Math" panose="02040503050406030204" pitchFamily="18" charset="0"/>
+                                </a:rPr>
+                                <m:t>𝑖𝑛</m:t>
+                              </m:r>
+                            </m:sub>
+                          </m:sSub>
+                        </m:den>
+                      </m:f>
+                      <m:r>
+                        <a:rPr lang="it-IT" b="0" i="1" smtClean="0">
+                          <a:latin typeface="Cambria Math" panose="02040503050406030204" pitchFamily="18" charset="0"/>
+                        </a:rPr>
+                        <m:t> </m:t>
+                      </m:r>
+                      <m:r>
+                        <a:rPr lang="it-IT" b="0" i="1" smtClean="0">
+                          <a:latin typeface="Cambria Math" panose="02040503050406030204" pitchFamily="18" charset="0"/>
+                          <a:ea typeface="Cambria Math" panose="02040503050406030204" pitchFamily="18" charset="0"/>
+                        </a:rPr>
+                        <m:t>∝ </m:t>
+                      </m:r>
+                      <m:f>
+                        <m:fPr>
+                          <m:ctrlPr>
+                            <a:rPr lang="it-IT" i="1">
+                              <a:latin typeface="Cambria Math" panose="02040503050406030204" pitchFamily="18" charset="0"/>
+                            </a:rPr>
+                          </m:ctrlPr>
+                        </m:fPr>
+                        <m:num>
+                          <m:sSub>
+                            <m:sSubPr>
+                              <m:ctrlPr>
+                                <a:rPr lang="it-IT" b="0" i="1" smtClean="0">
+                                  <a:latin typeface="Cambria Math" panose="02040503050406030204" pitchFamily="18" charset="0"/>
+                                </a:rPr>
+                              </m:ctrlPr>
+                            </m:sSubPr>
+                            <m:e>
+                              <m:r>
+                                <a:rPr lang="it-IT" b="0" i="1" smtClean="0">
+                                  <a:latin typeface="Cambria Math" panose="02040503050406030204" pitchFamily="18" charset="0"/>
+                                </a:rPr>
+                                <m:t>𝑉</m:t>
+                              </m:r>
+                            </m:e>
+                            <m:sub>
+                              <m:r>
+                                <a:rPr lang="it-IT" i="1">
+                                  <a:latin typeface="Cambria Math" panose="02040503050406030204" pitchFamily="18" charset="0"/>
+                                </a:rPr>
+                                <m:t>𝑥</m:t>
+                              </m:r>
+                            </m:sub>
+                          </m:sSub>
+                          <m:r>
+                            <a:rPr lang="it-IT" i="1">
+                              <a:latin typeface="Cambria Math" panose="02040503050406030204" pitchFamily="18" charset="0"/>
+                            </a:rPr>
+                            <m:t>−</m:t>
+                          </m:r>
+                          <m:sSub>
+                            <m:sSubPr>
+                              <m:ctrlPr>
+                                <a:rPr lang="it-IT" b="0" i="1" smtClean="0">
+                                  <a:latin typeface="Cambria Math" panose="02040503050406030204" pitchFamily="18" charset="0"/>
+                                </a:rPr>
+                              </m:ctrlPr>
+                            </m:sSubPr>
+                            <m:e>
+                              <m:r>
+                                <a:rPr lang="it-IT" b="0" i="1" smtClean="0">
+                                  <a:latin typeface="Cambria Math" panose="02040503050406030204" pitchFamily="18" charset="0"/>
+                                </a:rPr>
+                                <m:t>𝑉</m:t>
+                              </m:r>
+                            </m:e>
+                            <m:sub>
+                              <m:r>
+                                <a:rPr lang="it-IT" i="1">
+                                  <a:latin typeface="Cambria Math" panose="02040503050406030204" pitchFamily="18" charset="0"/>
+                                </a:rPr>
+                                <m:t>𝑦</m:t>
+                              </m:r>
+                            </m:sub>
+                          </m:sSub>
+                        </m:num>
+                        <m:den>
+                          <m:sSub>
+                            <m:sSubPr>
+                              <m:ctrlPr>
+                                <a:rPr lang="it-IT" i="1">
+                                  <a:latin typeface="Cambria Math" panose="02040503050406030204" pitchFamily="18" charset="0"/>
+                                </a:rPr>
+                              </m:ctrlPr>
+                            </m:sSubPr>
+                            <m:e>
+                              <m:r>
+                                <a:rPr lang="it-IT" i="1">
+                                  <a:latin typeface="Cambria Math" panose="02040503050406030204" pitchFamily="18" charset="0"/>
+                                </a:rPr>
+                                <m:t>𝑉</m:t>
+                              </m:r>
+                            </m:e>
+                            <m:sub>
+                              <m:r>
+                                <a:rPr lang="it-IT" i="1">
+                                  <a:latin typeface="Cambria Math" panose="02040503050406030204" pitchFamily="18" charset="0"/>
+                                </a:rPr>
+                                <m:t>𝑥</m:t>
+                              </m:r>
+                            </m:sub>
+                          </m:sSub>
+                          <m:r>
+                            <a:rPr lang="it-IT" b="0" i="1" smtClean="0">
+                              <a:latin typeface="Cambria Math" panose="02040503050406030204" pitchFamily="18" charset="0"/>
+                            </a:rPr>
+                            <m:t>+</m:t>
+                          </m:r>
+                          <m:sSub>
+                            <m:sSubPr>
+                              <m:ctrlPr>
+                                <a:rPr lang="it-IT" i="1">
+                                  <a:latin typeface="Cambria Math" panose="02040503050406030204" pitchFamily="18" charset="0"/>
+                                </a:rPr>
+                              </m:ctrlPr>
+                            </m:sSubPr>
+                            <m:e>
+                              <m:r>
+                                <a:rPr lang="it-IT" i="1">
+                                  <a:latin typeface="Cambria Math" panose="02040503050406030204" pitchFamily="18" charset="0"/>
+                                </a:rPr>
+                                <m:t>𝑉</m:t>
+                              </m:r>
+                            </m:e>
+                            <m:sub>
+                              <m:r>
+                                <a:rPr lang="it-IT" i="1">
+                                  <a:latin typeface="Cambria Math" panose="02040503050406030204" pitchFamily="18" charset="0"/>
+                                </a:rPr>
+                                <m:t>𝑦</m:t>
+                              </m:r>
+                            </m:sub>
+                          </m:sSub>
+                        </m:den>
+                      </m:f>
+                    </m:oMath>
+                  </m:oMathPara>
+                </a14:m>
+                <a:endParaRPr lang="it-IT" dirty="0"/>
+              </a:p>
+            </p:txBody>
+          </p:sp>
+        </mc:Choice>
+        <mc:Fallback>
+          <p:sp>
+            <p:nvSpPr>
+              <p:cNvPr id="5" name="CasellaDiTesto 4">
+                <a:extLst>
+                  <a:ext uri="{FF2B5EF4-FFF2-40B4-BE49-F238E27FC236}">
+                    <a16:creationId xmlns:a16="http://schemas.microsoft.com/office/drawing/2014/main" id="{5F646556-893C-3751-0EFD-1642ED667C85}"/>
+                  </a:ext>
+                </a:extLst>
+              </p:cNvPr>
+              <p:cNvSpPr txBox="1">
+                <a:spLocks noRot="1" noChangeAspect="1" noMove="1" noResize="1" noEditPoints="1" noAdjustHandles="1" noChangeArrowheads="1" noChangeShapeType="1" noTextEdit="1"/>
+              </p:cNvSpPr>
+              <p:nvPr/>
+            </p:nvSpPr>
+            <p:spPr>
+              <a:xfrm>
+                <a:off x="5135181" y="1190193"/>
+                <a:ext cx="4001288" cy="710066"/>
+              </a:xfrm>
+              <a:prstGeom prst="rect">
+                <a:avLst/>
+              </a:prstGeom>
+              <a:blipFill>
+                <a:blip r:embed="rId2"/>
+                <a:stretch>
+                  <a:fillRect/>
+                </a:stretch>
+              </a:blipFill>
+            </p:spPr>
+            <p:txBody>
+              <a:bodyPr/>
+              <a:lstStyle/>
+              <a:p>
+                <a:r>
+                  <a:rPr lang="it-IT">
+                    <a:noFill/>
+                  </a:rPr>
+                  <a:t> </a:t>
+                </a:r>
+              </a:p>
+            </p:txBody>
+          </p:sp>
+        </mc:Fallback>
+      </mc:AlternateContent>
+      <mc:AlternateContent xmlns:mc="http://schemas.openxmlformats.org/markup-compatibility/2006">
+        <mc:Choice xmlns:a14="http://schemas.microsoft.com/office/drawing/2010/main" Requires="a14">
+          <p:sp>
+            <p:nvSpPr>
+              <p:cNvPr id="7" name="CasellaDiTesto 6">
+                <a:extLst>
+                  <a:ext uri="{FF2B5EF4-FFF2-40B4-BE49-F238E27FC236}">
+                    <a16:creationId xmlns:a16="http://schemas.microsoft.com/office/drawing/2014/main" id="{CFDDC759-4560-E234-6CF0-912EB346746A}"/>
+                  </a:ext>
+                </a:extLst>
+              </p:cNvPr>
+              <p:cNvSpPr txBox="1"/>
+              <p:nvPr/>
+            </p:nvSpPr>
+            <p:spPr>
+              <a:xfrm>
+                <a:off x="980775" y="2628314"/>
+                <a:ext cx="7201200" cy="607474"/>
+              </a:xfrm>
+              <a:prstGeom prst="rect">
+                <a:avLst/>
+              </a:prstGeom>
+              <a:noFill/>
+            </p:spPr>
+            <p:txBody>
+              <a:bodyPr wrap="square">
+                <a:spAutoFit/>
+              </a:bodyPr>
+              <a:lstStyle/>
+              <a:p>
+                <a:pPr/>
+                <a14:m>
+                  <m:oMath xmlns:m="http://schemas.openxmlformats.org/officeDocument/2006/math">
+                    <m:sSubSup>
+                      <m:sSubSupPr>
+                        <m:ctrlPr>
+                          <a:rPr lang="it-IT" sz="1800" b="0" i="1" smtClean="0">
+                            <a:latin typeface="Cambria Math" panose="02040503050406030204" pitchFamily="18" charset="0"/>
+                          </a:rPr>
+                        </m:ctrlPr>
+                      </m:sSubSupPr>
+                      <m:e>
+                        <m:r>
+                          <a:rPr lang="it-IT" sz="1800" b="0" i="1" smtClean="0">
+                            <a:latin typeface="Cambria Math" panose="02040503050406030204" pitchFamily="18" charset="0"/>
+                          </a:rPr>
+                          <m:t>𝑆</m:t>
+                        </m:r>
+                      </m:e>
+                      <m:sub>
+                        <m:r>
+                          <a:rPr lang="it-IT" sz="1800" b="0" i="1" smtClean="0">
+                            <a:latin typeface="Cambria Math" panose="02040503050406030204" pitchFamily="18" charset="0"/>
+                          </a:rPr>
+                          <m:t>1</m:t>
+                        </m:r>
+                      </m:sub>
+                      <m:sup>
+                        <m:r>
+                          <a:rPr lang="it-IT" sz="1800" b="0" i="1" smtClean="0">
+                            <a:latin typeface="Cambria Math" panose="02040503050406030204" pitchFamily="18" charset="0"/>
+                          </a:rPr>
+                          <m:t>′</m:t>
+                        </m:r>
+                      </m:sup>
+                    </m:sSubSup>
+                    <m:r>
+                      <a:rPr lang="it-IT" sz="1800" i="1" smtClean="0">
+                        <a:latin typeface="Cambria Math" panose="02040503050406030204" pitchFamily="18" charset="0"/>
+                      </a:rPr>
+                      <m:t>=</m:t>
+                    </m:r>
+                    <m:f>
+                      <m:fPr>
+                        <m:ctrlPr>
+                          <a:rPr lang="it-IT" i="1" smtClean="0">
+                            <a:latin typeface="Cambria Math" panose="02040503050406030204" pitchFamily="18" charset="0"/>
+                          </a:rPr>
+                        </m:ctrlPr>
+                      </m:fPr>
+                      <m:num>
+                        <m:d>
+                          <m:dPr>
+                            <m:ctrlPr>
+                              <a:rPr lang="it-IT" i="1">
+                                <a:latin typeface="Cambria Math" panose="02040503050406030204" pitchFamily="18" charset="0"/>
+                              </a:rPr>
+                            </m:ctrlPr>
+                          </m:dPr>
+                          <m:e>
+                            <m:sSub>
+                              <m:sSubPr>
+                                <m:ctrlPr>
+                                  <a:rPr lang="it-IT" i="1">
+                                    <a:latin typeface="Cambria Math" panose="02040503050406030204" pitchFamily="18" charset="0"/>
+                                  </a:rPr>
+                                </m:ctrlPr>
+                              </m:sSubPr>
+                              <m:e>
+                                <m:r>
+                                  <a:rPr lang="it-IT" i="1">
+                                    <a:latin typeface="Cambria Math" panose="02040503050406030204" pitchFamily="18" charset="0"/>
+                                  </a:rPr>
+                                  <m:t>𝑉</m:t>
+                                </m:r>
+                              </m:e>
+                              <m:sub>
+                                <m:r>
+                                  <a:rPr lang="it-IT" i="1">
+                                    <a:latin typeface="Cambria Math" panose="02040503050406030204" pitchFamily="18" charset="0"/>
+                                  </a:rPr>
+                                  <m:t>𝑥</m:t>
+                                </m:r>
+                              </m:sub>
+                            </m:sSub>
+                            <m:r>
+                              <a:rPr lang="it-IT" b="0" i="1" smtClean="0">
+                                <a:latin typeface="Cambria Math" panose="02040503050406030204" pitchFamily="18" charset="0"/>
+                              </a:rPr>
+                              <m:t>+</m:t>
+                            </m:r>
+                            <m:sSub>
+                              <m:sSubPr>
+                                <m:ctrlPr>
+                                  <a:rPr lang="it-IT" b="0" i="1" smtClean="0">
+                                    <a:latin typeface="Cambria Math" panose="02040503050406030204" pitchFamily="18" charset="0"/>
+                                  </a:rPr>
+                                </m:ctrlPr>
+                              </m:sSubPr>
+                              <m:e>
+                                <m:r>
+                                  <a:rPr lang="it-IT" b="0" i="1" smtClean="0">
+                                    <a:latin typeface="Cambria Math" panose="02040503050406030204" pitchFamily="18" charset="0"/>
+                                  </a:rPr>
+                                  <m:t>𝑛</m:t>
+                                </m:r>
+                              </m:e>
+                              <m:sub>
+                                <m:r>
+                                  <a:rPr lang="it-IT" b="0" i="1" smtClean="0">
+                                    <a:latin typeface="Cambria Math" panose="02040503050406030204" pitchFamily="18" charset="0"/>
+                                  </a:rPr>
+                                  <m:t>𝑥</m:t>
+                                </m:r>
+                              </m:sub>
+                            </m:sSub>
+                          </m:e>
+                        </m:d>
+                        <m:r>
+                          <a:rPr lang="it-IT" i="1">
+                            <a:latin typeface="Cambria Math" panose="02040503050406030204" pitchFamily="18" charset="0"/>
+                          </a:rPr>
+                          <m:t>−</m:t>
+                        </m:r>
+                        <m:d>
+                          <m:dPr>
+                            <m:ctrlPr>
+                              <a:rPr lang="it-IT" i="1">
+                                <a:latin typeface="Cambria Math" panose="02040503050406030204" pitchFamily="18" charset="0"/>
+                              </a:rPr>
+                            </m:ctrlPr>
+                          </m:dPr>
+                          <m:e>
+                            <m:sSub>
+                              <m:sSubPr>
+                                <m:ctrlPr>
+                                  <a:rPr lang="it-IT" i="1">
+                                    <a:latin typeface="Cambria Math" panose="02040503050406030204" pitchFamily="18" charset="0"/>
+                                  </a:rPr>
+                                </m:ctrlPr>
+                              </m:sSubPr>
+                              <m:e>
+                                <m:r>
+                                  <a:rPr lang="it-IT" i="1">
+                                    <a:latin typeface="Cambria Math" panose="02040503050406030204" pitchFamily="18" charset="0"/>
+                                  </a:rPr>
+                                  <m:t>𝑉</m:t>
+                                </m:r>
+                              </m:e>
+                              <m:sub>
+                                <m:r>
+                                  <a:rPr lang="it-IT" b="0" i="1" smtClean="0">
+                                    <a:latin typeface="Cambria Math" panose="02040503050406030204" pitchFamily="18" charset="0"/>
+                                  </a:rPr>
+                                  <m:t>𝑦</m:t>
+                                </m:r>
+                              </m:sub>
+                            </m:sSub>
+                            <m:r>
+                              <a:rPr lang="it-IT" i="1">
+                                <a:latin typeface="Cambria Math" panose="02040503050406030204" pitchFamily="18" charset="0"/>
+                              </a:rPr>
+                              <m:t>+</m:t>
+                            </m:r>
+                            <m:sSub>
+                              <m:sSubPr>
+                                <m:ctrlPr>
+                                  <a:rPr lang="it-IT" i="1">
+                                    <a:latin typeface="Cambria Math" panose="02040503050406030204" pitchFamily="18" charset="0"/>
+                                  </a:rPr>
+                                </m:ctrlPr>
+                              </m:sSubPr>
+                              <m:e>
+                                <m:r>
+                                  <a:rPr lang="it-IT" i="1">
+                                    <a:latin typeface="Cambria Math" panose="02040503050406030204" pitchFamily="18" charset="0"/>
+                                  </a:rPr>
+                                  <m:t>𝑛</m:t>
+                                </m:r>
+                              </m:e>
+                              <m:sub>
+                                <m:r>
+                                  <a:rPr lang="it-IT" b="0" i="1" smtClean="0">
+                                    <a:latin typeface="Cambria Math" panose="02040503050406030204" pitchFamily="18" charset="0"/>
+                                  </a:rPr>
+                                  <m:t>𝑦</m:t>
+                                </m:r>
+                              </m:sub>
+                            </m:sSub>
+                          </m:e>
+                        </m:d>
+                      </m:num>
+                      <m:den>
+                        <m:sSub>
+                          <m:sSubPr>
+                            <m:ctrlPr>
+                              <a:rPr lang="it-IT" i="1">
+                                <a:latin typeface="Cambria Math" panose="02040503050406030204" pitchFamily="18" charset="0"/>
+                              </a:rPr>
+                            </m:ctrlPr>
+                          </m:sSubPr>
+                          <m:e>
+                            <m:r>
+                              <a:rPr lang="it-IT" i="1">
+                                <a:latin typeface="Cambria Math" panose="02040503050406030204" pitchFamily="18" charset="0"/>
+                              </a:rPr>
+                              <m:t>𝑉</m:t>
+                            </m:r>
+                          </m:e>
+                          <m:sub>
+                            <m:r>
+                              <a:rPr lang="it-IT" i="1">
+                                <a:latin typeface="Cambria Math" panose="02040503050406030204" pitchFamily="18" charset="0"/>
+                              </a:rPr>
+                              <m:t>𝑥</m:t>
+                            </m:r>
+                          </m:sub>
+                        </m:sSub>
+                        <m:r>
+                          <a:rPr lang="it-IT" i="1">
+                            <a:latin typeface="Cambria Math" panose="02040503050406030204" pitchFamily="18" charset="0"/>
+                          </a:rPr>
+                          <m:t>+</m:t>
+                        </m:r>
+                        <m:sSub>
+                          <m:sSubPr>
+                            <m:ctrlPr>
+                              <a:rPr lang="it-IT" i="1">
+                                <a:latin typeface="Cambria Math" panose="02040503050406030204" pitchFamily="18" charset="0"/>
+                              </a:rPr>
+                            </m:ctrlPr>
+                          </m:sSubPr>
+                          <m:e>
+                            <m:r>
+                              <a:rPr lang="it-IT" i="1">
+                                <a:latin typeface="Cambria Math" panose="02040503050406030204" pitchFamily="18" charset="0"/>
+                              </a:rPr>
+                              <m:t>𝑉</m:t>
+                            </m:r>
+                          </m:e>
+                          <m:sub>
+                            <m:r>
+                              <a:rPr lang="it-IT" i="1">
+                                <a:latin typeface="Cambria Math" panose="02040503050406030204" pitchFamily="18" charset="0"/>
+                              </a:rPr>
+                              <m:t>𝑦</m:t>
+                            </m:r>
+                          </m:sub>
+                        </m:sSub>
+                      </m:den>
+                    </m:f>
+                  </m:oMath>
+                </a14:m>
+                <a:r>
+                  <a:rPr lang="it-IT" dirty="0"/>
+                  <a:t> = </a:t>
+                </a:r>
+                <a14:m>
+                  <m:oMath xmlns:m="http://schemas.openxmlformats.org/officeDocument/2006/math">
+                    <m:f>
+                      <m:fPr>
+                        <m:ctrlPr>
+                          <a:rPr lang="it-IT" i="1" smtClean="0">
+                            <a:latin typeface="Cambria Math" panose="02040503050406030204" pitchFamily="18" charset="0"/>
+                          </a:rPr>
+                        </m:ctrlPr>
+                      </m:fPr>
+                      <m:num>
+                        <m:d>
+                          <m:dPr>
+                            <m:ctrlPr>
+                              <a:rPr lang="it-IT" i="1">
+                                <a:latin typeface="Cambria Math" panose="02040503050406030204" pitchFamily="18" charset="0"/>
+                              </a:rPr>
+                            </m:ctrlPr>
+                          </m:dPr>
+                          <m:e>
+                            <m:sSub>
+                              <m:sSubPr>
+                                <m:ctrlPr>
+                                  <a:rPr lang="it-IT" i="1">
+                                    <a:latin typeface="Cambria Math" panose="02040503050406030204" pitchFamily="18" charset="0"/>
+                                  </a:rPr>
+                                </m:ctrlPr>
+                              </m:sSubPr>
+                              <m:e>
+                                <m:r>
+                                  <a:rPr lang="it-IT" i="1">
+                                    <a:latin typeface="Cambria Math" panose="02040503050406030204" pitchFamily="18" charset="0"/>
+                                  </a:rPr>
+                                  <m:t>𝑉</m:t>
+                                </m:r>
+                              </m:e>
+                              <m:sub>
+                                <m:r>
+                                  <a:rPr lang="it-IT" i="1">
+                                    <a:latin typeface="Cambria Math" panose="02040503050406030204" pitchFamily="18" charset="0"/>
+                                  </a:rPr>
+                                  <m:t>𝑥</m:t>
+                                </m:r>
+                              </m:sub>
+                            </m:sSub>
+                            <m:r>
+                              <a:rPr lang="it-IT" b="0" i="1" smtClean="0">
+                                <a:latin typeface="Cambria Math" panose="02040503050406030204" pitchFamily="18" charset="0"/>
+                              </a:rPr>
+                              <m:t>−</m:t>
+                            </m:r>
+                            <m:sSub>
+                              <m:sSubPr>
+                                <m:ctrlPr>
+                                  <a:rPr lang="it-IT" b="0" i="1" smtClean="0">
+                                    <a:latin typeface="Cambria Math" panose="02040503050406030204" pitchFamily="18" charset="0"/>
+                                  </a:rPr>
+                                </m:ctrlPr>
+                              </m:sSubPr>
+                              <m:e>
+                                <m:r>
+                                  <a:rPr lang="it-IT" b="0" i="1" smtClean="0">
+                                    <a:latin typeface="Cambria Math" panose="02040503050406030204" pitchFamily="18" charset="0"/>
+                                  </a:rPr>
+                                  <m:t>𝑉</m:t>
+                                </m:r>
+                              </m:e>
+                              <m:sub>
+                                <m:r>
+                                  <a:rPr lang="it-IT" b="0" i="1" smtClean="0">
+                                    <a:latin typeface="Cambria Math" panose="02040503050406030204" pitchFamily="18" charset="0"/>
+                                  </a:rPr>
+                                  <m:t>𝑦</m:t>
+                                </m:r>
+                              </m:sub>
+                            </m:sSub>
+                          </m:e>
+                        </m:d>
+                      </m:num>
+                      <m:den>
+                        <m:sSub>
+                          <m:sSubPr>
+                            <m:ctrlPr>
+                              <a:rPr lang="it-IT" i="1">
+                                <a:latin typeface="Cambria Math" panose="02040503050406030204" pitchFamily="18" charset="0"/>
+                              </a:rPr>
+                            </m:ctrlPr>
+                          </m:sSubPr>
+                          <m:e>
+                            <m:r>
+                              <a:rPr lang="it-IT" i="1">
+                                <a:latin typeface="Cambria Math" panose="02040503050406030204" pitchFamily="18" charset="0"/>
+                              </a:rPr>
+                              <m:t>𝑉</m:t>
+                            </m:r>
+                          </m:e>
+                          <m:sub>
+                            <m:r>
+                              <a:rPr lang="it-IT" i="1">
+                                <a:latin typeface="Cambria Math" panose="02040503050406030204" pitchFamily="18" charset="0"/>
+                              </a:rPr>
+                              <m:t>𝑥</m:t>
+                            </m:r>
+                          </m:sub>
+                        </m:sSub>
+                        <m:r>
+                          <a:rPr lang="it-IT" i="1">
+                            <a:latin typeface="Cambria Math" panose="02040503050406030204" pitchFamily="18" charset="0"/>
+                          </a:rPr>
+                          <m:t>+</m:t>
+                        </m:r>
+                        <m:sSub>
+                          <m:sSubPr>
+                            <m:ctrlPr>
+                              <a:rPr lang="it-IT" i="1">
+                                <a:latin typeface="Cambria Math" panose="02040503050406030204" pitchFamily="18" charset="0"/>
+                              </a:rPr>
+                            </m:ctrlPr>
+                          </m:sSubPr>
+                          <m:e>
+                            <m:r>
+                              <a:rPr lang="it-IT" i="1">
+                                <a:latin typeface="Cambria Math" panose="02040503050406030204" pitchFamily="18" charset="0"/>
+                              </a:rPr>
+                              <m:t>𝑉</m:t>
+                            </m:r>
+                          </m:e>
+                          <m:sub>
+                            <m:r>
+                              <a:rPr lang="it-IT" i="1">
+                                <a:latin typeface="Cambria Math" panose="02040503050406030204" pitchFamily="18" charset="0"/>
+                              </a:rPr>
+                              <m:t>𝑦</m:t>
+                            </m:r>
+                          </m:sub>
+                        </m:sSub>
+                      </m:den>
+                    </m:f>
+                    <m:r>
+                      <a:rPr lang="it-IT" b="0" i="1" smtClean="0">
+                        <a:latin typeface="Cambria Math" panose="02040503050406030204" pitchFamily="18" charset="0"/>
+                      </a:rPr>
+                      <m:t>+</m:t>
+                    </m:r>
+                    <m:f>
+                      <m:fPr>
+                        <m:ctrlPr>
+                          <a:rPr lang="it-IT" i="1">
+                            <a:latin typeface="Cambria Math" panose="02040503050406030204" pitchFamily="18" charset="0"/>
+                          </a:rPr>
+                        </m:ctrlPr>
+                      </m:fPr>
+                      <m:num>
+                        <m:d>
+                          <m:dPr>
+                            <m:ctrlPr>
+                              <a:rPr lang="it-IT" i="1" smtClean="0">
+                                <a:latin typeface="Cambria Math" panose="02040503050406030204" pitchFamily="18" charset="0"/>
+                              </a:rPr>
+                            </m:ctrlPr>
+                          </m:dPr>
+                          <m:e>
+                            <m:sSub>
+                              <m:sSubPr>
+                                <m:ctrlPr>
+                                  <a:rPr lang="it-IT" b="0" i="1" smtClean="0">
+                                    <a:latin typeface="Cambria Math" panose="02040503050406030204" pitchFamily="18" charset="0"/>
+                                  </a:rPr>
+                                </m:ctrlPr>
+                              </m:sSubPr>
+                              <m:e>
+                                <m:r>
+                                  <a:rPr lang="it-IT" b="0" i="1" smtClean="0">
+                                    <a:latin typeface="Cambria Math" panose="02040503050406030204" pitchFamily="18" charset="0"/>
+                                  </a:rPr>
+                                  <m:t>𝑛</m:t>
+                                </m:r>
+                              </m:e>
+                              <m:sub>
+                                <m:r>
+                                  <a:rPr lang="it-IT" i="1">
+                                    <a:latin typeface="Cambria Math" panose="02040503050406030204" pitchFamily="18" charset="0"/>
+                                  </a:rPr>
+                                  <m:t>𝑥</m:t>
+                                </m:r>
+                              </m:sub>
+                            </m:sSub>
+                            <m:r>
+                              <a:rPr lang="it-IT" i="1">
+                                <a:latin typeface="Cambria Math" panose="02040503050406030204" pitchFamily="18" charset="0"/>
+                              </a:rPr>
+                              <m:t>−</m:t>
+                            </m:r>
+                            <m:sSub>
+                              <m:sSubPr>
+                                <m:ctrlPr>
+                                  <a:rPr lang="it-IT" b="0" i="1" smtClean="0">
+                                    <a:latin typeface="Cambria Math" panose="02040503050406030204" pitchFamily="18" charset="0"/>
+                                  </a:rPr>
+                                </m:ctrlPr>
+                              </m:sSubPr>
+                              <m:e>
+                                <m:r>
+                                  <a:rPr lang="it-IT" b="0" i="1" smtClean="0">
+                                    <a:latin typeface="Cambria Math" panose="02040503050406030204" pitchFamily="18" charset="0"/>
+                                  </a:rPr>
+                                  <m:t>𝑛</m:t>
+                                </m:r>
+                              </m:e>
+                              <m:sub>
+                                <m:r>
+                                  <a:rPr lang="it-IT" i="1">
+                                    <a:latin typeface="Cambria Math" panose="02040503050406030204" pitchFamily="18" charset="0"/>
+                                  </a:rPr>
+                                  <m:t>𝑦</m:t>
+                                </m:r>
+                              </m:sub>
+                            </m:sSub>
+                          </m:e>
+                        </m:d>
+                      </m:num>
+                      <m:den>
+                        <m:sSub>
+                          <m:sSubPr>
+                            <m:ctrlPr>
+                              <a:rPr lang="it-IT" i="1">
+                                <a:latin typeface="Cambria Math" panose="02040503050406030204" pitchFamily="18" charset="0"/>
+                              </a:rPr>
+                            </m:ctrlPr>
+                          </m:sSubPr>
+                          <m:e>
+                            <m:r>
+                              <a:rPr lang="it-IT" i="1">
+                                <a:latin typeface="Cambria Math" panose="02040503050406030204" pitchFamily="18" charset="0"/>
+                              </a:rPr>
+                              <m:t>𝑉</m:t>
+                            </m:r>
+                          </m:e>
+                          <m:sub>
+                            <m:r>
+                              <a:rPr lang="it-IT" i="1">
+                                <a:latin typeface="Cambria Math" panose="02040503050406030204" pitchFamily="18" charset="0"/>
+                              </a:rPr>
+                              <m:t>𝑥</m:t>
+                            </m:r>
+                          </m:sub>
+                        </m:sSub>
+                        <m:r>
+                          <a:rPr lang="it-IT" i="1">
+                            <a:latin typeface="Cambria Math" panose="02040503050406030204" pitchFamily="18" charset="0"/>
+                          </a:rPr>
+                          <m:t>+</m:t>
+                        </m:r>
+                        <m:sSub>
+                          <m:sSubPr>
+                            <m:ctrlPr>
+                              <a:rPr lang="it-IT" i="1">
+                                <a:latin typeface="Cambria Math" panose="02040503050406030204" pitchFamily="18" charset="0"/>
+                              </a:rPr>
+                            </m:ctrlPr>
+                          </m:sSubPr>
+                          <m:e>
+                            <m:r>
+                              <a:rPr lang="it-IT" i="1">
+                                <a:latin typeface="Cambria Math" panose="02040503050406030204" pitchFamily="18" charset="0"/>
+                              </a:rPr>
+                              <m:t>𝑉</m:t>
+                            </m:r>
+                          </m:e>
+                          <m:sub>
+                            <m:r>
+                              <a:rPr lang="it-IT" i="1">
+                                <a:latin typeface="Cambria Math" panose="02040503050406030204" pitchFamily="18" charset="0"/>
+                              </a:rPr>
+                              <m:t>𝑦</m:t>
+                            </m:r>
+                          </m:sub>
+                        </m:sSub>
+                      </m:den>
+                    </m:f>
+                    <m:r>
+                      <a:rPr lang="it-IT" b="0" i="1" smtClean="0">
+                        <a:latin typeface="Cambria Math" panose="02040503050406030204" pitchFamily="18" charset="0"/>
+                      </a:rPr>
+                      <m:t>=</m:t>
+                    </m:r>
+                    <m:sSub>
+                      <m:sSubPr>
+                        <m:ctrlPr>
+                          <a:rPr lang="it-IT" i="1">
+                            <a:latin typeface="Cambria Math" panose="02040503050406030204" pitchFamily="18" charset="0"/>
+                          </a:rPr>
+                        </m:ctrlPr>
+                      </m:sSubPr>
+                      <m:e>
+                        <m:r>
+                          <a:rPr lang="it-IT" i="1">
+                            <a:latin typeface="Cambria Math" panose="02040503050406030204" pitchFamily="18" charset="0"/>
+                          </a:rPr>
+                          <m:t>𝑆</m:t>
+                        </m:r>
+                      </m:e>
+                      <m:sub>
+                        <m:r>
+                          <a:rPr lang="it-IT" i="1">
+                            <a:latin typeface="Cambria Math" panose="02040503050406030204" pitchFamily="18" charset="0"/>
+                          </a:rPr>
+                          <m:t>1</m:t>
+                        </m:r>
+                      </m:sub>
+                    </m:sSub>
+                    <m:r>
+                      <a:rPr lang="it-IT" i="1">
+                        <a:latin typeface="Cambria Math" panose="02040503050406030204" pitchFamily="18" charset="0"/>
+                      </a:rPr>
+                      <m:t>+</m:t>
+                    </m:r>
+                    <m:f>
+                      <m:fPr>
+                        <m:ctrlPr>
+                          <a:rPr lang="it-IT" i="1">
+                            <a:latin typeface="Cambria Math" panose="02040503050406030204" pitchFamily="18" charset="0"/>
+                          </a:rPr>
+                        </m:ctrlPr>
+                      </m:fPr>
+                      <m:num>
+                        <m:d>
+                          <m:dPr>
+                            <m:ctrlPr>
+                              <a:rPr lang="it-IT" i="1">
+                                <a:latin typeface="Cambria Math" panose="02040503050406030204" pitchFamily="18" charset="0"/>
+                              </a:rPr>
+                            </m:ctrlPr>
+                          </m:dPr>
+                          <m:e>
+                            <m:sSub>
+                              <m:sSubPr>
+                                <m:ctrlPr>
+                                  <a:rPr lang="it-IT" i="1">
+                                    <a:latin typeface="Cambria Math" panose="02040503050406030204" pitchFamily="18" charset="0"/>
+                                  </a:rPr>
+                                </m:ctrlPr>
+                              </m:sSubPr>
+                              <m:e>
+                                <m:r>
+                                  <a:rPr lang="it-IT" i="1">
+                                    <a:latin typeface="Cambria Math" panose="02040503050406030204" pitchFamily="18" charset="0"/>
+                                  </a:rPr>
+                                  <m:t>𝑛</m:t>
+                                </m:r>
+                              </m:e>
+                              <m:sub>
+                                <m:r>
+                                  <a:rPr lang="it-IT" i="1">
+                                    <a:latin typeface="Cambria Math" panose="02040503050406030204" pitchFamily="18" charset="0"/>
+                                  </a:rPr>
+                                  <m:t>𝑥</m:t>
+                                </m:r>
+                              </m:sub>
+                            </m:sSub>
+                            <m:r>
+                              <a:rPr lang="it-IT" i="1">
+                                <a:latin typeface="Cambria Math" panose="02040503050406030204" pitchFamily="18" charset="0"/>
+                              </a:rPr>
+                              <m:t>−</m:t>
+                            </m:r>
+                            <m:sSub>
+                              <m:sSubPr>
+                                <m:ctrlPr>
+                                  <a:rPr lang="it-IT" i="1">
+                                    <a:latin typeface="Cambria Math" panose="02040503050406030204" pitchFamily="18" charset="0"/>
+                                  </a:rPr>
+                                </m:ctrlPr>
+                              </m:sSubPr>
+                              <m:e>
+                                <m:r>
+                                  <a:rPr lang="it-IT" i="1">
+                                    <a:latin typeface="Cambria Math" panose="02040503050406030204" pitchFamily="18" charset="0"/>
+                                  </a:rPr>
+                                  <m:t>𝑛</m:t>
+                                </m:r>
+                              </m:e>
+                              <m:sub>
+                                <m:r>
+                                  <a:rPr lang="it-IT" i="1">
+                                    <a:latin typeface="Cambria Math" panose="02040503050406030204" pitchFamily="18" charset="0"/>
+                                  </a:rPr>
+                                  <m:t>𝑦</m:t>
+                                </m:r>
+                              </m:sub>
+                            </m:sSub>
+                          </m:e>
+                        </m:d>
+                      </m:num>
+                      <m:den>
+                        <m:sSub>
+                          <m:sSubPr>
+                            <m:ctrlPr>
+                              <a:rPr lang="it-IT" i="1">
+                                <a:latin typeface="Cambria Math" panose="02040503050406030204" pitchFamily="18" charset="0"/>
+                              </a:rPr>
+                            </m:ctrlPr>
+                          </m:sSubPr>
+                          <m:e>
+                            <m:r>
+                              <a:rPr lang="it-IT" i="1">
+                                <a:latin typeface="Cambria Math" panose="02040503050406030204" pitchFamily="18" charset="0"/>
+                              </a:rPr>
+                              <m:t>𝑉</m:t>
+                            </m:r>
+                          </m:e>
+                          <m:sub>
+                            <m:r>
+                              <a:rPr lang="it-IT" i="1">
+                                <a:latin typeface="Cambria Math" panose="02040503050406030204" pitchFamily="18" charset="0"/>
+                              </a:rPr>
+                              <m:t>𝑥</m:t>
+                            </m:r>
+                          </m:sub>
+                        </m:sSub>
+                        <m:r>
+                          <a:rPr lang="it-IT" i="1">
+                            <a:latin typeface="Cambria Math" panose="02040503050406030204" pitchFamily="18" charset="0"/>
+                          </a:rPr>
+                          <m:t>+</m:t>
+                        </m:r>
+                        <m:sSub>
+                          <m:sSubPr>
+                            <m:ctrlPr>
+                              <a:rPr lang="it-IT" i="1">
+                                <a:latin typeface="Cambria Math" panose="02040503050406030204" pitchFamily="18" charset="0"/>
+                              </a:rPr>
+                            </m:ctrlPr>
+                          </m:sSubPr>
+                          <m:e>
+                            <m:r>
+                              <a:rPr lang="it-IT" i="1">
+                                <a:latin typeface="Cambria Math" panose="02040503050406030204" pitchFamily="18" charset="0"/>
+                              </a:rPr>
+                              <m:t>𝑉</m:t>
+                            </m:r>
+                          </m:e>
+                          <m:sub>
+                            <m:r>
+                              <a:rPr lang="it-IT" i="1">
+                                <a:latin typeface="Cambria Math" panose="02040503050406030204" pitchFamily="18" charset="0"/>
+                              </a:rPr>
+                              <m:t>𝑦</m:t>
+                            </m:r>
+                          </m:sub>
+                        </m:sSub>
+                      </m:den>
+                    </m:f>
+                  </m:oMath>
+                </a14:m>
+                <a:endParaRPr lang="it-IT" dirty="0"/>
+              </a:p>
+            </p:txBody>
+          </p:sp>
+        </mc:Choice>
+        <mc:Fallback>
+          <p:sp>
+            <p:nvSpPr>
+              <p:cNvPr id="7" name="CasellaDiTesto 6">
+                <a:extLst>
+                  <a:ext uri="{FF2B5EF4-FFF2-40B4-BE49-F238E27FC236}">
+                    <a16:creationId xmlns:a16="http://schemas.microsoft.com/office/drawing/2014/main" id="{CFDDC759-4560-E234-6CF0-912EB346746A}"/>
+                  </a:ext>
+                </a:extLst>
+              </p:cNvPr>
+              <p:cNvSpPr txBox="1">
+                <a:spLocks noRot="1" noChangeAspect="1" noMove="1" noResize="1" noEditPoints="1" noAdjustHandles="1" noChangeArrowheads="1" noChangeShapeType="1" noTextEdit="1"/>
+              </p:cNvSpPr>
+              <p:nvPr/>
+            </p:nvSpPr>
+            <p:spPr>
+              <a:xfrm>
+                <a:off x="980775" y="2628314"/>
+                <a:ext cx="7201200" cy="607474"/>
+              </a:xfrm>
+              <a:prstGeom prst="rect">
+                <a:avLst/>
+              </a:prstGeom>
+              <a:blipFill>
+                <a:blip r:embed="rId3"/>
+                <a:stretch>
+                  <a:fillRect/>
+                </a:stretch>
+              </a:blipFill>
+            </p:spPr>
+            <p:txBody>
+              <a:bodyPr/>
+              <a:lstStyle/>
+              <a:p>
+                <a:r>
+                  <a:rPr lang="it-IT">
+                    <a:noFill/>
+                  </a:rPr>
+                  <a:t> </a:t>
+                </a:r>
+              </a:p>
+            </p:txBody>
+          </p:sp>
+        </mc:Fallback>
+      </mc:AlternateContent>
+      <mc:AlternateContent xmlns:mc="http://schemas.openxmlformats.org/markup-compatibility/2006">
+        <mc:Choice xmlns:a14="http://schemas.microsoft.com/office/drawing/2010/main" Requires="a14">
+          <p:sp>
+            <p:nvSpPr>
+              <p:cNvPr id="9" name="CasellaDiTesto 8">
+                <a:extLst>
+                  <a:ext uri="{FF2B5EF4-FFF2-40B4-BE49-F238E27FC236}">
+                    <a16:creationId xmlns:a16="http://schemas.microsoft.com/office/drawing/2014/main" id="{ECCEC8B8-9F9C-9BCA-1E13-A4398632FEF0}"/>
+                  </a:ext>
+                </a:extLst>
+              </p:cNvPr>
+              <p:cNvSpPr txBox="1"/>
+              <p:nvPr/>
+            </p:nvSpPr>
+            <p:spPr>
+              <a:xfrm>
+                <a:off x="1533375" y="3679734"/>
+                <a:ext cx="6096000" cy="422360"/>
+              </a:xfrm>
+              <a:prstGeom prst="rect">
+                <a:avLst/>
+              </a:prstGeom>
+              <a:noFill/>
+            </p:spPr>
+            <p:txBody>
+              <a:bodyPr wrap="square">
+                <a:spAutoFit/>
+              </a:bodyPr>
+              <a:lstStyle/>
+              <a:p>
+                <a:pPr/>
+                <a14:m>
+                  <m:oMath xmlns:m="http://schemas.openxmlformats.org/officeDocument/2006/math">
+                    <m:sSub>
+                      <m:sSubPr>
+                        <m:ctrlPr>
+                          <a:rPr lang="it-IT" sz="1800" b="0" i="1" smtClean="0">
+                            <a:latin typeface="Cambria Math" panose="02040503050406030204" pitchFamily="18" charset="0"/>
+                          </a:rPr>
+                        </m:ctrlPr>
+                      </m:sSubPr>
+                      <m:e>
+                        <m:r>
+                          <a:rPr lang="it-IT" sz="1800" b="0" i="1" smtClean="0">
+                            <a:latin typeface="Cambria Math" panose="02040503050406030204" pitchFamily="18" charset="0"/>
+                          </a:rPr>
+                          <m:t>𝑃𝑆𝐷</m:t>
+                        </m:r>
+                      </m:e>
+                      <m:sub>
+                        <m:sSubSup>
+                          <m:sSubSupPr>
+                            <m:ctrlPr>
+                              <a:rPr lang="it-IT" sz="1800" b="0" i="1" smtClean="0">
+                                <a:latin typeface="Cambria Math" panose="02040503050406030204" pitchFamily="18" charset="0"/>
+                              </a:rPr>
+                            </m:ctrlPr>
+                          </m:sSubSupPr>
+                          <m:e>
+                            <m:r>
+                              <a:rPr lang="it-IT" sz="1800" b="0" i="1" smtClean="0">
+                                <a:latin typeface="Cambria Math" panose="02040503050406030204" pitchFamily="18" charset="0"/>
+                              </a:rPr>
+                              <m:t>𝑆</m:t>
+                            </m:r>
+                          </m:e>
+                          <m:sub>
+                            <m:r>
+                              <a:rPr lang="it-IT" sz="1800" b="0" i="1" smtClean="0">
+                                <a:latin typeface="Cambria Math" panose="02040503050406030204" pitchFamily="18" charset="0"/>
+                              </a:rPr>
+                              <m:t>1</m:t>
+                            </m:r>
+                          </m:sub>
+                          <m:sup>
+                            <m:r>
+                              <a:rPr lang="it-IT" sz="1800" b="0" i="1" smtClean="0">
+                                <a:latin typeface="Cambria Math" panose="02040503050406030204" pitchFamily="18" charset="0"/>
+                              </a:rPr>
+                              <m:t>′</m:t>
+                            </m:r>
+                          </m:sup>
+                        </m:sSubSup>
+                      </m:sub>
+                    </m:sSub>
+                    <m:r>
+                      <a:rPr lang="it-IT" sz="1800" b="0" i="1" smtClean="0">
+                        <a:latin typeface="Cambria Math" panose="02040503050406030204" pitchFamily="18" charset="0"/>
+                      </a:rPr>
+                      <m:t>=</m:t>
+                    </m:r>
+                    <m:sSub>
+                      <m:sSubPr>
+                        <m:ctrlPr>
+                          <a:rPr lang="it-IT" i="1">
+                            <a:latin typeface="Cambria Math" panose="02040503050406030204" pitchFamily="18" charset="0"/>
+                          </a:rPr>
+                        </m:ctrlPr>
+                      </m:sSubPr>
+                      <m:e>
+                        <m:r>
+                          <a:rPr lang="it-IT" i="1">
+                            <a:latin typeface="Cambria Math" panose="02040503050406030204" pitchFamily="18" charset="0"/>
+                          </a:rPr>
+                          <m:t>𝑃𝑆𝐷</m:t>
+                        </m:r>
+                      </m:e>
+                      <m:sub>
+                        <m:sSub>
+                          <m:sSubPr>
+                            <m:ctrlPr>
+                              <a:rPr lang="it-IT" i="1">
+                                <a:latin typeface="Cambria Math" panose="02040503050406030204" pitchFamily="18" charset="0"/>
+                              </a:rPr>
+                            </m:ctrlPr>
+                          </m:sSubPr>
+                          <m:e>
+                            <m:r>
+                              <a:rPr lang="it-IT" i="1">
+                                <a:latin typeface="Cambria Math" panose="02040503050406030204" pitchFamily="18" charset="0"/>
+                              </a:rPr>
+                              <m:t>𝑆</m:t>
+                            </m:r>
+                          </m:e>
+                          <m:sub>
+                            <m:r>
+                              <a:rPr lang="it-IT" i="1">
+                                <a:latin typeface="Cambria Math" panose="02040503050406030204" pitchFamily="18" charset="0"/>
+                              </a:rPr>
+                              <m:t>1</m:t>
+                            </m:r>
+                          </m:sub>
+                        </m:sSub>
+                      </m:sub>
+                    </m:sSub>
+                    <m:r>
+                      <a:rPr lang="it-IT" b="0" i="1" smtClean="0">
+                        <a:latin typeface="Cambria Math" panose="02040503050406030204" pitchFamily="18" charset="0"/>
+                      </a:rPr>
+                      <m:t>+</m:t>
+                    </m:r>
+                    <m:sSub>
+                      <m:sSubPr>
+                        <m:ctrlPr>
+                          <a:rPr lang="it-IT" b="0" i="1" smtClean="0">
+                            <a:latin typeface="Cambria Math" panose="02040503050406030204" pitchFamily="18" charset="0"/>
+                          </a:rPr>
+                        </m:ctrlPr>
+                      </m:sSubPr>
+                      <m:e>
+                        <m:r>
+                          <a:rPr lang="it-IT" b="0" i="1" smtClean="0">
+                            <a:latin typeface="Cambria Math" panose="02040503050406030204" pitchFamily="18" charset="0"/>
+                          </a:rPr>
+                          <m:t>𝑃𝑆𝐷</m:t>
+                        </m:r>
+                      </m:e>
+                      <m:sub>
+                        <m:sSub>
+                          <m:sSubPr>
+                            <m:ctrlPr>
+                              <a:rPr lang="it-IT" b="0" i="1" smtClean="0">
+                                <a:latin typeface="Cambria Math" panose="02040503050406030204" pitchFamily="18" charset="0"/>
+                              </a:rPr>
+                            </m:ctrlPr>
+                          </m:sSubPr>
+                          <m:e>
+                            <m:r>
+                              <a:rPr lang="it-IT" b="0" i="1" smtClean="0">
+                                <a:latin typeface="Cambria Math" panose="02040503050406030204" pitchFamily="18" charset="0"/>
+                              </a:rPr>
+                              <m:t>𝐴𝐷𝐶</m:t>
+                            </m:r>
+                          </m:e>
+                          <m:sub>
+                            <m:r>
+                              <a:rPr lang="it-IT" b="0" i="1" smtClean="0">
+                                <a:latin typeface="Cambria Math" panose="02040503050406030204" pitchFamily="18" charset="0"/>
+                              </a:rPr>
+                              <m:t>𝑥</m:t>
+                            </m:r>
+                          </m:sub>
+                        </m:sSub>
+                      </m:sub>
+                    </m:sSub>
+                  </m:oMath>
+                </a14:m>
+                <a:r>
+                  <a:rPr lang="it-IT" dirty="0"/>
+                  <a:t> </a:t>
+                </a:r>
+                <a14:m>
+                  <m:oMath xmlns:m="http://schemas.openxmlformats.org/officeDocument/2006/math">
+                    <m:r>
+                      <a:rPr lang="it-IT" i="1">
+                        <a:latin typeface="Cambria Math" panose="02040503050406030204" pitchFamily="18" charset="0"/>
+                      </a:rPr>
+                      <m:t>+</m:t>
+                    </m:r>
+                    <m:sSub>
+                      <m:sSubPr>
+                        <m:ctrlPr>
+                          <a:rPr lang="it-IT" i="1">
+                            <a:latin typeface="Cambria Math" panose="02040503050406030204" pitchFamily="18" charset="0"/>
+                          </a:rPr>
+                        </m:ctrlPr>
+                      </m:sSubPr>
+                      <m:e>
+                        <m:r>
+                          <a:rPr lang="it-IT" i="1">
+                            <a:latin typeface="Cambria Math" panose="02040503050406030204" pitchFamily="18" charset="0"/>
+                          </a:rPr>
+                          <m:t>𝑃𝑆𝐷</m:t>
+                        </m:r>
+                      </m:e>
+                      <m:sub>
+                        <m:sSub>
+                          <m:sSubPr>
+                            <m:ctrlPr>
+                              <a:rPr lang="it-IT" i="1">
+                                <a:latin typeface="Cambria Math" panose="02040503050406030204" pitchFamily="18" charset="0"/>
+                              </a:rPr>
+                            </m:ctrlPr>
+                          </m:sSubPr>
+                          <m:e>
+                            <m:r>
+                              <a:rPr lang="it-IT" i="1">
+                                <a:latin typeface="Cambria Math" panose="02040503050406030204" pitchFamily="18" charset="0"/>
+                              </a:rPr>
+                              <m:t>𝐴𝐷𝐶</m:t>
+                            </m:r>
+                          </m:e>
+                          <m:sub>
+                            <m:r>
+                              <a:rPr lang="it-IT" b="0" i="1" smtClean="0">
+                                <a:latin typeface="Cambria Math" panose="02040503050406030204" pitchFamily="18" charset="0"/>
+                              </a:rPr>
+                              <m:t>𝑦</m:t>
+                            </m:r>
+                          </m:sub>
+                        </m:sSub>
+                      </m:sub>
+                    </m:sSub>
+                  </m:oMath>
+                </a14:m>
+                <a:endParaRPr lang="it-IT" dirty="0"/>
+              </a:p>
+            </p:txBody>
+          </p:sp>
+        </mc:Choice>
+        <mc:Fallback>
+          <p:sp>
+            <p:nvSpPr>
+              <p:cNvPr id="9" name="CasellaDiTesto 8">
+                <a:extLst>
+                  <a:ext uri="{FF2B5EF4-FFF2-40B4-BE49-F238E27FC236}">
+                    <a16:creationId xmlns:a16="http://schemas.microsoft.com/office/drawing/2014/main" id="{ECCEC8B8-9F9C-9BCA-1E13-A4398632FEF0}"/>
+                  </a:ext>
+                </a:extLst>
+              </p:cNvPr>
+              <p:cNvSpPr txBox="1">
+                <a:spLocks noRot="1" noChangeAspect="1" noMove="1" noResize="1" noEditPoints="1" noAdjustHandles="1" noChangeArrowheads="1" noChangeShapeType="1" noTextEdit="1"/>
+              </p:cNvSpPr>
+              <p:nvPr/>
+            </p:nvSpPr>
+            <p:spPr>
+              <a:xfrm>
+                <a:off x="1533375" y="3679734"/>
+                <a:ext cx="6096000" cy="422360"/>
+              </a:xfrm>
+              <a:prstGeom prst="rect">
+                <a:avLst/>
+              </a:prstGeom>
+              <a:blipFill>
+                <a:blip r:embed="rId4"/>
+                <a:stretch>
+                  <a:fillRect b="-2899"/>
+                </a:stretch>
+              </a:blipFill>
+            </p:spPr>
+            <p:txBody>
+              <a:bodyPr/>
+              <a:lstStyle/>
+              <a:p>
+                <a:r>
+                  <a:rPr lang="it-IT">
+                    <a:noFill/>
+                  </a:rPr>
+                  <a:t> </a:t>
+                </a:r>
+              </a:p>
+            </p:txBody>
+          </p:sp>
+        </mc:Fallback>
+      </mc:AlternateContent>
+      <mc:AlternateContent xmlns:mc="http://schemas.openxmlformats.org/markup-compatibility/2006">
+        <mc:Choice xmlns:a14="http://schemas.microsoft.com/office/drawing/2010/main" Requires="a14">
+          <p:sp>
+            <p:nvSpPr>
+              <p:cNvPr id="11" name="CasellaDiTesto 10">
+                <a:extLst>
+                  <a:ext uri="{FF2B5EF4-FFF2-40B4-BE49-F238E27FC236}">
+                    <a16:creationId xmlns:a16="http://schemas.microsoft.com/office/drawing/2014/main" id="{380BCD46-18CB-6C18-D504-68C04F2D7540}"/>
+                  </a:ext>
+                </a:extLst>
+              </p:cNvPr>
+              <p:cNvSpPr txBox="1"/>
+              <p:nvPr/>
+            </p:nvSpPr>
+            <p:spPr>
+              <a:xfrm>
+                <a:off x="1428450" y="4246824"/>
+                <a:ext cx="6096000" cy="767005"/>
+              </a:xfrm>
+              <a:prstGeom prst="rect">
+                <a:avLst/>
+              </a:prstGeom>
+              <a:noFill/>
+            </p:spPr>
+            <p:txBody>
+              <a:bodyPr wrap="square">
+                <a:spAutoFit/>
+              </a:bodyPr>
+              <a:lstStyle/>
+              <a:p>
+                <a:pPr/>
+                <a14:m>
+                  <m:oMathPara xmlns:m="http://schemas.openxmlformats.org/officeDocument/2006/math">
+                    <m:oMathParaPr>
+                      <m:jc m:val="left"/>
+                    </m:oMathParaPr>
+                    <m:oMath>
+                      <m:sSub>
+                        <m:sSubPr>
+                          <m:ctrlPr>
+                            <a:rPr lang="it-IT" sz="1800" b="0" i="1" smtClean="0">
+                              <a:latin typeface="Cambria Math" panose="02040503050406030204" pitchFamily="18" charset="0"/>
+                            </a:rPr>
+                          </m:ctrlPr>
+                        </m:sSubPr>
+                        <m:e>
+                          <m:r>
+                            <a:rPr lang="it-IT" sz="1800" b="0" i="1" smtClean="0">
+                              <a:latin typeface="Cambria Math" panose="02040503050406030204" pitchFamily="18" charset="0"/>
+                            </a:rPr>
+                            <m:t>𝑃𝑆𝐷</m:t>
+                          </m:r>
+                        </m:e>
+                        <m:sub>
+                          <m:sSub>
+                            <m:sSubPr>
+                              <m:ctrlPr>
+                                <a:rPr lang="it-IT" sz="1800" b="0" i="1" smtClean="0">
+                                  <a:latin typeface="Cambria Math" panose="02040503050406030204" pitchFamily="18" charset="0"/>
+                                </a:rPr>
+                              </m:ctrlPr>
+                            </m:sSubPr>
+                            <m:e>
+                              <m:r>
+                                <a:rPr lang="it-IT" sz="1800" b="0" i="1" smtClean="0">
+                                  <a:latin typeface="Cambria Math" panose="02040503050406030204" pitchFamily="18" charset="0"/>
+                                </a:rPr>
+                                <m:t>𝐴𝐷𝐶</m:t>
+                              </m:r>
+                            </m:e>
+                            <m:sub>
+                              <m:r>
+                                <a:rPr lang="it-IT" sz="1800" b="0" i="1" smtClean="0">
+                                  <a:latin typeface="Cambria Math" panose="02040503050406030204" pitchFamily="18" charset="0"/>
+                                </a:rPr>
+                                <m:t>𝑥</m:t>
+                              </m:r>
+                            </m:sub>
+                          </m:sSub>
+                        </m:sub>
+                      </m:sSub>
+                      <m:r>
+                        <a:rPr lang="it-IT" sz="1800" b="0" i="1" smtClean="0">
+                          <a:latin typeface="Cambria Math" panose="02040503050406030204" pitchFamily="18" charset="0"/>
+                        </a:rPr>
+                        <m:t>=</m:t>
+                      </m:r>
+                      <m:f>
+                        <m:fPr>
+                          <m:ctrlPr>
+                            <a:rPr lang="it-IT" i="1">
+                              <a:latin typeface="Cambria Math" panose="02040503050406030204" pitchFamily="18" charset="0"/>
+                            </a:rPr>
+                          </m:ctrlPr>
+                        </m:fPr>
+                        <m:num>
+                          <m:sSub>
+                            <m:sSubPr>
+                              <m:ctrlPr>
+                                <a:rPr lang="it-IT" i="1">
+                                  <a:latin typeface="Cambria Math" panose="02040503050406030204" pitchFamily="18" charset="0"/>
+                                </a:rPr>
+                              </m:ctrlPr>
+                            </m:sSubPr>
+                            <m:e>
+                              <m:r>
+                                <a:rPr lang="it-IT" i="1">
+                                  <a:latin typeface="Cambria Math" panose="02040503050406030204" pitchFamily="18" charset="0"/>
+                                </a:rPr>
+                                <m:t>𝑛</m:t>
+                              </m:r>
+                            </m:e>
+                            <m:sub>
+                              <m:r>
+                                <a:rPr lang="it-IT" i="1">
+                                  <a:latin typeface="Cambria Math" panose="02040503050406030204" pitchFamily="18" charset="0"/>
+                                </a:rPr>
+                                <m:t>𝑥</m:t>
+                              </m:r>
+                            </m:sub>
+                          </m:sSub>
+                        </m:num>
+                        <m:den>
+                          <m:sSup>
+                            <m:sSupPr>
+                              <m:ctrlPr>
+                                <a:rPr lang="it-IT" i="1" smtClean="0">
+                                  <a:latin typeface="Cambria Math" panose="02040503050406030204" pitchFamily="18" charset="0"/>
+                                </a:rPr>
+                              </m:ctrlPr>
+                            </m:sSupPr>
+                            <m:e>
+                              <m:d>
+                                <m:dPr>
+                                  <m:ctrlPr>
+                                    <a:rPr lang="it-IT" i="1">
+                                      <a:latin typeface="Cambria Math" panose="02040503050406030204" pitchFamily="18" charset="0"/>
+                                    </a:rPr>
+                                  </m:ctrlPr>
+                                </m:dPr>
+                                <m:e>
+                                  <m:sSub>
+                                    <m:sSubPr>
+                                      <m:ctrlPr>
+                                        <a:rPr lang="it-IT" i="1">
+                                          <a:latin typeface="Cambria Math" panose="02040503050406030204" pitchFamily="18" charset="0"/>
+                                        </a:rPr>
+                                      </m:ctrlPr>
+                                    </m:sSubPr>
+                                    <m:e>
+                                      <m:r>
+                                        <a:rPr lang="it-IT" i="1">
+                                          <a:latin typeface="Cambria Math" panose="02040503050406030204" pitchFamily="18" charset="0"/>
+                                        </a:rPr>
+                                        <m:t>𝑉</m:t>
+                                      </m:r>
+                                    </m:e>
+                                    <m:sub>
+                                      <m:r>
+                                        <a:rPr lang="it-IT" i="1">
+                                          <a:latin typeface="Cambria Math" panose="02040503050406030204" pitchFamily="18" charset="0"/>
+                                        </a:rPr>
+                                        <m:t>𝑥</m:t>
+                                      </m:r>
+                                    </m:sub>
+                                  </m:sSub>
+                                  <m:r>
+                                    <a:rPr lang="it-IT" i="1">
+                                      <a:latin typeface="Cambria Math" panose="02040503050406030204" pitchFamily="18" charset="0"/>
+                                    </a:rPr>
+                                    <m:t>+</m:t>
+                                  </m:r>
+                                  <m:sSub>
+                                    <m:sSubPr>
+                                      <m:ctrlPr>
+                                        <a:rPr lang="it-IT" i="1">
+                                          <a:latin typeface="Cambria Math" panose="02040503050406030204" pitchFamily="18" charset="0"/>
+                                        </a:rPr>
+                                      </m:ctrlPr>
+                                    </m:sSubPr>
+                                    <m:e>
+                                      <m:r>
+                                        <a:rPr lang="it-IT" i="1">
+                                          <a:latin typeface="Cambria Math" panose="02040503050406030204" pitchFamily="18" charset="0"/>
+                                        </a:rPr>
+                                        <m:t>𝑉</m:t>
+                                      </m:r>
+                                    </m:e>
+                                    <m:sub>
+                                      <m:r>
+                                        <a:rPr lang="it-IT" i="1">
+                                          <a:latin typeface="Cambria Math" panose="02040503050406030204" pitchFamily="18" charset="0"/>
+                                        </a:rPr>
+                                        <m:t>𝑦</m:t>
+                                      </m:r>
+                                    </m:sub>
+                                  </m:sSub>
+                                </m:e>
+                              </m:d>
+                            </m:e>
+                            <m:sup>
+                              <m:r>
+                                <a:rPr lang="it-IT" b="0" i="1" smtClean="0">
+                                  <a:latin typeface="Cambria Math" panose="02040503050406030204" pitchFamily="18" charset="0"/>
+                                </a:rPr>
+                                <m:t>2</m:t>
+                              </m:r>
+                            </m:sup>
+                          </m:sSup>
+                        </m:den>
+                      </m:f>
+                      <m:r>
+                        <a:rPr lang="it-IT" i="1">
+                          <a:latin typeface="Cambria Math" panose="02040503050406030204" pitchFamily="18" charset="0"/>
+                          <a:ea typeface="Cambria Math" panose="02040503050406030204" pitchFamily="18" charset="0"/>
+                        </a:rPr>
+                        <m:t>∝</m:t>
+                      </m:r>
+                      <m:f>
+                        <m:fPr>
+                          <m:ctrlPr>
+                            <a:rPr lang="it-IT" b="0" i="1" smtClean="0">
+                              <a:latin typeface="Cambria Math" panose="02040503050406030204" pitchFamily="18" charset="0"/>
+                            </a:rPr>
+                          </m:ctrlPr>
+                        </m:fPr>
+                        <m:num>
+                          <m:r>
+                            <a:rPr lang="it-IT" b="0" i="1" smtClean="0">
+                              <a:latin typeface="Cambria Math" panose="02040503050406030204" pitchFamily="18" charset="0"/>
+                            </a:rPr>
+                            <m:t>1</m:t>
+                          </m:r>
+                        </m:num>
+                        <m:den>
+                          <m:sSubSup>
+                            <m:sSubSupPr>
+                              <m:ctrlPr>
+                                <a:rPr lang="it-IT" b="0" i="1" smtClean="0">
+                                  <a:latin typeface="Cambria Math" panose="02040503050406030204" pitchFamily="18" charset="0"/>
+                                </a:rPr>
+                              </m:ctrlPr>
+                            </m:sSubSupPr>
+                            <m:e>
+                              <m:r>
+                                <a:rPr lang="it-IT" b="0" i="1" smtClean="0">
+                                  <a:latin typeface="Cambria Math" panose="02040503050406030204" pitchFamily="18" charset="0"/>
+                                </a:rPr>
+                                <m:t>𝑃</m:t>
+                              </m:r>
+                            </m:e>
+                            <m:sub>
+                              <m:r>
+                                <a:rPr lang="it-IT" b="0" i="1" smtClean="0">
+                                  <a:latin typeface="Cambria Math" panose="02040503050406030204" pitchFamily="18" charset="0"/>
+                                </a:rPr>
+                                <m:t>𝑖𝑛</m:t>
+                              </m:r>
+                            </m:sub>
+                            <m:sup>
+                              <m:r>
+                                <a:rPr lang="it-IT" b="0" i="1" smtClean="0">
+                                  <a:latin typeface="Cambria Math" panose="02040503050406030204" pitchFamily="18" charset="0"/>
+                                </a:rPr>
+                                <m:t>2</m:t>
+                              </m:r>
+                            </m:sup>
+                          </m:sSubSup>
+                        </m:den>
+                      </m:f>
+                    </m:oMath>
+                  </m:oMathPara>
+                </a14:m>
+                <a:endParaRPr lang="it-IT" dirty="0"/>
+              </a:p>
+            </p:txBody>
+          </p:sp>
+        </mc:Choice>
+        <mc:Fallback>
+          <p:sp>
+            <p:nvSpPr>
+              <p:cNvPr id="11" name="CasellaDiTesto 10">
+                <a:extLst>
+                  <a:ext uri="{FF2B5EF4-FFF2-40B4-BE49-F238E27FC236}">
+                    <a16:creationId xmlns:a16="http://schemas.microsoft.com/office/drawing/2014/main" id="{380BCD46-18CB-6C18-D504-68C04F2D7540}"/>
+                  </a:ext>
+                </a:extLst>
+              </p:cNvPr>
+              <p:cNvSpPr txBox="1">
+                <a:spLocks noRot="1" noChangeAspect="1" noMove="1" noResize="1" noEditPoints="1" noAdjustHandles="1" noChangeArrowheads="1" noChangeShapeType="1" noTextEdit="1"/>
+              </p:cNvSpPr>
+              <p:nvPr/>
+            </p:nvSpPr>
+            <p:spPr>
+              <a:xfrm>
+                <a:off x="1428450" y="4246824"/>
+                <a:ext cx="6096000" cy="767005"/>
+              </a:xfrm>
+              <a:prstGeom prst="rect">
+                <a:avLst/>
+              </a:prstGeom>
+              <a:blipFill>
+                <a:blip r:embed="rId5"/>
+                <a:stretch>
+                  <a:fillRect/>
+                </a:stretch>
+              </a:blipFill>
+            </p:spPr>
+            <p:txBody>
+              <a:bodyPr/>
+              <a:lstStyle/>
+              <a:p>
+                <a:r>
+                  <a:rPr lang="it-IT">
+                    <a:noFill/>
+                  </a:rPr>
+                  <a:t> </a:t>
+                </a:r>
+              </a:p>
+            </p:txBody>
+          </p:sp>
+        </mc:Fallback>
+      </mc:AlternateContent>
+      <mc:AlternateContent xmlns:mc="http://schemas.openxmlformats.org/markup-compatibility/2006">
+        <mc:Choice xmlns:a14="http://schemas.microsoft.com/office/drawing/2010/main" Requires="a14">
+          <p:sp>
+            <p:nvSpPr>
+              <p:cNvPr id="13" name="CasellaDiTesto 12">
+                <a:extLst>
+                  <a:ext uri="{FF2B5EF4-FFF2-40B4-BE49-F238E27FC236}">
+                    <a16:creationId xmlns:a16="http://schemas.microsoft.com/office/drawing/2014/main" id="{0E984328-7905-CB23-9819-EA01C4C32EEB}"/>
+                  </a:ext>
+                </a:extLst>
+              </p:cNvPr>
+              <p:cNvSpPr txBox="1"/>
+              <p:nvPr/>
+            </p:nvSpPr>
+            <p:spPr>
+              <a:xfrm>
+                <a:off x="1437005" y="5113130"/>
+                <a:ext cx="6096000" cy="767005"/>
+              </a:xfrm>
+              <a:prstGeom prst="rect">
+                <a:avLst/>
+              </a:prstGeom>
+              <a:noFill/>
+            </p:spPr>
+            <p:txBody>
+              <a:bodyPr wrap="square">
+                <a:spAutoFit/>
+              </a:bodyPr>
+              <a:lstStyle/>
+              <a:p>
+                <a:pPr/>
+                <a14:m>
+                  <m:oMathPara xmlns:m="http://schemas.openxmlformats.org/officeDocument/2006/math">
+                    <m:oMathParaPr>
+                      <m:jc m:val="left"/>
+                    </m:oMathParaPr>
+                    <m:oMath>
+                      <m:sSub>
+                        <m:sSubPr>
+                          <m:ctrlPr>
+                            <a:rPr lang="it-IT" sz="1800" b="0" i="1" smtClean="0">
+                              <a:latin typeface="Cambria Math" panose="02040503050406030204" pitchFamily="18" charset="0"/>
+                            </a:rPr>
+                          </m:ctrlPr>
+                        </m:sSubPr>
+                        <m:e>
+                          <m:r>
+                            <a:rPr lang="it-IT" sz="1800" b="0" i="1" smtClean="0">
+                              <a:latin typeface="Cambria Math" panose="02040503050406030204" pitchFamily="18" charset="0"/>
+                            </a:rPr>
+                            <m:t>𝑃𝑆𝐷</m:t>
+                          </m:r>
+                        </m:e>
+                        <m:sub>
+                          <m:sSub>
+                            <m:sSubPr>
+                              <m:ctrlPr>
+                                <a:rPr lang="it-IT" sz="1800" b="0" i="1" smtClean="0">
+                                  <a:latin typeface="Cambria Math" panose="02040503050406030204" pitchFamily="18" charset="0"/>
+                                </a:rPr>
+                              </m:ctrlPr>
+                            </m:sSubPr>
+                            <m:e>
+                              <m:r>
+                                <a:rPr lang="it-IT" sz="1800" b="0" i="1" smtClean="0">
+                                  <a:latin typeface="Cambria Math" panose="02040503050406030204" pitchFamily="18" charset="0"/>
+                                </a:rPr>
+                                <m:t>𝐴𝐷𝐶</m:t>
+                              </m:r>
+                            </m:e>
+                            <m:sub>
+                              <m:r>
+                                <a:rPr lang="it-IT" sz="1800" b="0" i="1" smtClean="0">
+                                  <a:latin typeface="Cambria Math" panose="02040503050406030204" pitchFamily="18" charset="0"/>
+                                </a:rPr>
+                                <m:t>𝑦</m:t>
+                              </m:r>
+                            </m:sub>
+                          </m:sSub>
+                        </m:sub>
+                      </m:sSub>
+                      <m:r>
+                        <a:rPr lang="it-IT" sz="1800" b="0" i="1" smtClean="0">
+                          <a:latin typeface="Cambria Math" panose="02040503050406030204" pitchFamily="18" charset="0"/>
+                        </a:rPr>
+                        <m:t>=</m:t>
+                      </m:r>
+                      <m:f>
+                        <m:fPr>
+                          <m:ctrlPr>
+                            <a:rPr lang="it-IT" sz="1800" i="1">
+                              <a:latin typeface="Cambria Math" panose="02040503050406030204" pitchFamily="18" charset="0"/>
+                            </a:rPr>
+                          </m:ctrlPr>
+                        </m:fPr>
+                        <m:num>
+                          <m:sSub>
+                            <m:sSubPr>
+                              <m:ctrlPr>
+                                <a:rPr lang="it-IT" sz="1800" i="1">
+                                  <a:latin typeface="Cambria Math" panose="02040503050406030204" pitchFamily="18" charset="0"/>
+                                </a:rPr>
+                              </m:ctrlPr>
+                            </m:sSubPr>
+                            <m:e>
+                              <m:r>
+                                <a:rPr lang="it-IT" sz="1800" i="1">
+                                  <a:latin typeface="Cambria Math" panose="02040503050406030204" pitchFamily="18" charset="0"/>
+                                </a:rPr>
+                                <m:t>𝑛</m:t>
+                              </m:r>
+                            </m:e>
+                            <m:sub>
+                              <m:r>
+                                <a:rPr lang="it-IT" sz="1800" b="0" i="1" smtClean="0">
+                                  <a:latin typeface="Cambria Math" panose="02040503050406030204" pitchFamily="18" charset="0"/>
+                                </a:rPr>
+                                <m:t>𝑦</m:t>
+                              </m:r>
+                            </m:sub>
+                          </m:sSub>
+                        </m:num>
+                        <m:den>
+                          <m:sSup>
+                            <m:sSupPr>
+                              <m:ctrlPr>
+                                <a:rPr lang="it-IT" sz="1800" i="1">
+                                  <a:latin typeface="Cambria Math" panose="02040503050406030204" pitchFamily="18" charset="0"/>
+                                </a:rPr>
+                              </m:ctrlPr>
+                            </m:sSupPr>
+                            <m:e>
+                              <m:d>
+                                <m:dPr>
+                                  <m:ctrlPr>
+                                    <a:rPr lang="it-IT" sz="1800" i="1">
+                                      <a:latin typeface="Cambria Math" panose="02040503050406030204" pitchFamily="18" charset="0"/>
+                                    </a:rPr>
+                                  </m:ctrlPr>
+                                </m:dPr>
+                                <m:e>
+                                  <m:sSub>
+                                    <m:sSubPr>
+                                      <m:ctrlPr>
+                                        <a:rPr lang="it-IT" sz="1800" i="1">
+                                          <a:latin typeface="Cambria Math" panose="02040503050406030204" pitchFamily="18" charset="0"/>
+                                        </a:rPr>
+                                      </m:ctrlPr>
+                                    </m:sSubPr>
+                                    <m:e>
+                                      <m:r>
+                                        <a:rPr lang="it-IT" sz="1800" i="1">
+                                          <a:latin typeface="Cambria Math" panose="02040503050406030204" pitchFamily="18" charset="0"/>
+                                        </a:rPr>
+                                        <m:t>𝑉</m:t>
+                                      </m:r>
+                                    </m:e>
+                                    <m:sub>
+                                      <m:r>
+                                        <a:rPr lang="it-IT" sz="1800" i="1">
+                                          <a:latin typeface="Cambria Math" panose="02040503050406030204" pitchFamily="18" charset="0"/>
+                                        </a:rPr>
+                                        <m:t>𝑥</m:t>
+                                      </m:r>
+                                    </m:sub>
+                                  </m:sSub>
+                                  <m:r>
+                                    <a:rPr lang="it-IT" sz="1800" i="1">
+                                      <a:latin typeface="Cambria Math" panose="02040503050406030204" pitchFamily="18" charset="0"/>
+                                    </a:rPr>
+                                    <m:t>+</m:t>
+                                  </m:r>
+                                  <m:sSub>
+                                    <m:sSubPr>
+                                      <m:ctrlPr>
+                                        <a:rPr lang="it-IT" sz="1800" i="1">
+                                          <a:latin typeface="Cambria Math" panose="02040503050406030204" pitchFamily="18" charset="0"/>
+                                        </a:rPr>
+                                      </m:ctrlPr>
+                                    </m:sSubPr>
+                                    <m:e>
+                                      <m:r>
+                                        <a:rPr lang="it-IT" sz="1800" i="1">
+                                          <a:latin typeface="Cambria Math" panose="02040503050406030204" pitchFamily="18" charset="0"/>
+                                        </a:rPr>
+                                        <m:t>𝑉</m:t>
+                                      </m:r>
+                                    </m:e>
+                                    <m:sub>
+                                      <m:r>
+                                        <a:rPr lang="it-IT" sz="1800" i="1">
+                                          <a:latin typeface="Cambria Math" panose="02040503050406030204" pitchFamily="18" charset="0"/>
+                                        </a:rPr>
+                                        <m:t>𝑦</m:t>
+                                      </m:r>
+                                    </m:sub>
+                                  </m:sSub>
+                                </m:e>
+                              </m:d>
+                            </m:e>
+                            <m:sup>
+                              <m:r>
+                                <a:rPr lang="it-IT" sz="1800" b="0" i="1" smtClean="0">
+                                  <a:latin typeface="Cambria Math" panose="02040503050406030204" pitchFamily="18" charset="0"/>
+                                </a:rPr>
+                                <m:t>2</m:t>
+                              </m:r>
+                            </m:sup>
+                          </m:sSup>
+                        </m:den>
+                      </m:f>
+                      <m:r>
+                        <a:rPr lang="it-IT" sz="1800" i="1">
+                          <a:latin typeface="Cambria Math" panose="02040503050406030204" pitchFamily="18" charset="0"/>
+                          <a:ea typeface="Cambria Math" panose="02040503050406030204" pitchFamily="18" charset="0"/>
+                        </a:rPr>
+                        <m:t>∝</m:t>
+                      </m:r>
+                      <m:f>
+                        <m:fPr>
+                          <m:ctrlPr>
+                            <a:rPr lang="it-IT" sz="1800" b="0" i="1" smtClean="0">
+                              <a:latin typeface="Cambria Math" panose="02040503050406030204" pitchFamily="18" charset="0"/>
+                            </a:rPr>
+                          </m:ctrlPr>
+                        </m:fPr>
+                        <m:num>
+                          <m:r>
+                            <a:rPr lang="it-IT" sz="1800" b="0" i="1" smtClean="0">
+                              <a:latin typeface="Cambria Math" panose="02040503050406030204" pitchFamily="18" charset="0"/>
+                            </a:rPr>
+                            <m:t>1</m:t>
+                          </m:r>
+                        </m:num>
+                        <m:den>
+                          <m:sSubSup>
+                            <m:sSubSupPr>
+                              <m:ctrlPr>
+                                <a:rPr lang="it-IT" sz="1800" b="0" i="1" smtClean="0">
+                                  <a:latin typeface="Cambria Math" panose="02040503050406030204" pitchFamily="18" charset="0"/>
+                                </a:rPr>
+                              </m:ctrlPr>
+                            </m:sSubSupPr>
+                            <m:e>
+                              <m:r>
+                                <a:rPr lang="it-IT" sz="1800" b="0" i="1" smtClean="0">
+                                  <a:latin typeface="Cambria Math" panose="02040503050406030204" pitchFamily="18" charset="0"/>
+                                </a:rPr>
+                                <m:t>𝑃</m:t>
+                              </m:r>
+                            </m:e>
+                            <m:sub>
+                              <m:r>
+                                <a:rPr lang="it-IT" sz="1800" b="0" i="1" smtClean="0">
+                                  <a:latin typeface="Cambria Math" panose="02040503050406030204" pitchFamily="18" charset="0"/>
+                                </a:rPr>
+                                <m:t>𝑖𝑛</m:t>
+                              </m:r>
+                            </m:sub>
+                            <m:sup>
+                              <m:r>
+                                <a:rPr lang="it-IT" sz="1800" b="0" i="1" smtClean="0">
+                                  <a:latin typeface="Cambria Math" panose="02040503050406030204" pitchFamily="18" charset="0"/>
+                                </a:rPr>
+                                <m:t>2</m:t>
+                              </m:r>
+                            </m:sup>
+                          </m:sSubSup>
+                        </m:den>
+                      </m:f>
+                    </m:oMath>
+                  </m:oMathPara>
+                </a14:m>
+                <a:endParaRPr lang="it-IT" dirty="0"/>
+              </a:p>
+            </p:txBody>
+          </p:sp>
+        </mc:Choice>
+        <mc:Fallback>
+          <p:sp>
+            <p:nvSpPr>
+              <p:cNvPr id="13" name="CasellaDiTesto 12">
+                <a:extLst>
+                  <a:ext uri="{FF2B5EF4-FFF2-40B4-BE49-F238E27FC236}">
+                    <a16:creationId xmlns:a16="http://schemas.microsoft.com/office/drawing/2014/main" id="{0E984328-7905-CB23-9819-EA01C4C32EEB}"/>
+                  </a:ext>
+                </a:extLst>
+              </p:cNvPr>
+              <p:cNvSpPr txBox="1">
+                <a:spLocks noRot="1" noChangeAspect="1" noMove="1" noResize="1" noEditPoints="1" noAdjustHandles="1" noChangeArrowheads="1" noChangeShapeType="1" noTextEdit="1"/>
+              </p:cNvSpPr>
+              <p:nvPr/>
+            </p:nvSpPr>
+            <p:spPr>
+              <a:xfrm>
+                <a:off x="1437005" y="5113130"/>
+                <a:ext cx="6096000" cy="767005"/>
+              </a:xfrm>
+              <a:prstGeom prst="rect">
+                <a:avLst/>
+              </a:prstGeom>
+              <a:blipFill>
+                <a:blip r:embed="rId6"/>
+                <a:stretch>
+                  <a:fillRect/>
+                </a:stretch>
+              </a:blipFill>
+            </p:spPr>
+            <p:txBody>
+              <a:bodyPr/>
+              <a:lstStyle/>
+              <a:p>
+                <a:r>
+                  <a:rPr lang="it-IT">
+                    <a:noFill/>
+                  </a:rPr>
+                  <a:t> </a:t>
+                </a:r>
+              </a:p>
+            </p:txBody>
+          </p:sp>
+        </mc:Fallback>
+      </mc:AlternateContent>
+      <p:grpSp>
+        <p:nvGrpSpPr>
+          <p:cNvPr id="23" name="Gruppo 22">
+            <a:extLst>
+              <a:ext uri="{FF2B5EF4-FFF2-40B4-BE49-F238E27FC236}">
+                <a16:creationId xmlns:a16="http://schemas.microsoft.com/office/drawing/2014/main" id="{5F43744E-E79D-6F7D-4010-7282CFB63D74}"/>
+              </a:ext>
+            </a:extLst>
+          </p:cNvPr>
+          <p:cNvGrpSpPr/>
+          <p:nvPr/>
+        </p:nvGrpSpPr>
+        <p:grpSpPr>
+          <a:xfrm>
+            <a:off x="1036955" y="1263968"/>
+            <a:ext cx="2558649" cy="852926"/>
+            <a:chOff x="1024351" y="1671152"/>
+            <a:chExt cx="2558649" cy="852926"/>
+          </a:xfrm>
+        </p:grpSpPr>
+        <mc:AlternateContent xmlns:mc="http://schemas.openxmlformats.org/markup-compatibility/2006">
+          <mc:Choice xmlns:a14="http://schemas.microsoft.com/office/drawing/2010/main" Requires="a14">
+            <p:sp>
+              <p:nvSpPr>
+                <p:cNvPr id="4" name="CasellaDiTesto 3">
+                  <a:extLst>
+                    <a:ext uri="{FF2B5EF4-FFF2-40B4-BE49-F238E27FC236}">
+                      <a16:creationId xmlns:a16="http://schemas.microsoft.com/office/drawing/2014/main" id="{6577AFF8-6639-9BFC-E69E-87038233B259}"/>
+                    </a:ext>
+                  </a:extLst>
+                </p:cNvPr>
+                <p:cNvSpPr txBox="1"/>
+                <p:nvPr/>
+              </p:nvSpPr>
+              <p:spPr>
+                <a:xfrm>
+                  <a:off x="1024351" y="1671152"/>
+                  <a:ext cx="2558649" cy="852926"/>
+                </a:xfrm>
+                <a:prstGeom prst="rect">
+                  <a:avLst/>
+                </a:prstGeom>
+                <a:noFill/>
+              </p:spPr>
+              <p:txBody>
+                <a:bodyPr wrap="none" lIns="0" tIns="0" rIns="0" bIns="0" rtlCol="0">
+                  <a:spAutoFit/>
+                </a:bodyPr>
+                <a:lstStyle/>
+                <a:p>
+                  <a14:m>
+                    <m:oMath xmlns:m="http://schemas.openxmlformats.org/officeDocument/2006/math">
+                      <m:sSub>
+                        <m:sSubPr>
+                          <m:ctrlPr>
+                            <a:rPr lang="it-IT" b="0" i="1" smtClean="0">
+                              <a:latin typeface="Cambria Math" panose="02040503050406030204" pitchFamily="18" charset="0"/>
+                            </a:rPr>
+                          </m:ctrlPr>
+                        </m:sSubPr>
+                        <m:e>
+                          <m:r>
+                            <a:rPr lang="it-IT" b="0" i="1" smtClean="0">
+                              <a:latin typeface="Cambria Math" panose="02040503050406030204" pitchFamily="18" charset="0"/>
+                            </a:rPr>
+                            <m:t>𝑖</m:t>
+                          </m:r>
+                        </m:e>
+                        <m:sub>
+                          <m:r>
+                            <a:rPr lang="it-IT" b="0" i="1" smtClean="0">
+                              <a:latin typeface="Cambria Math" panose="02040503050406030204" pitchFamily="18" charset="0"/>
+                            </a:rPr>
+                            <m:t>𝑥</m:t>
+                          </m:r>
+                        </m:sub>
+                      </m:sSub>
+                      <m:r>
+                        <a:rPr lang="it-IT" i="1" smtClean="0">
+                          <a:latin typeface="Cambria Math" panose="02040503050406030204" pitchFamily="18" charset="0"/>
+                        </a:rPr>
+                        <m:t>=</m:t>
+                      </m:r>
+                      <m:r>
+                        <a:rPr lang="it-IT" b="0" i="1" smtClean="0">
+                          <a:latin typeface="Cambria Math" panose="02040503050406030204" pitchFamily="18" charset="0"/>
+                          <a:ea typeface="Cambria Math" panose="02040503050406030204" pitchFamily="18" charset="0"/>
+                        </a:rPr>
+                        <m:t>ℛ</m:t>
+                      </m:r>
+                      <m:sSub>
+                        <m:sSubPr>
+                          <m:ctrlPr>
+                            <a:rPr lang="it-IT" b="0" i="1" smtClean="0">
+                              <a:latin typeface="Cambria Math" panose="02040503050406030204" pitchFamily="18" charset="0"/>
+                              <a:ea typeface="Cambria Math" panose="02040503050406030204" pitchFamily="18" charset="0"/>
+                            </a:rPr>
+                          </m:ctrlPr>
+                        </m:sSubPr>
+                        <m:e>
+                          <m:r>
+                            <a:rPr lang="it-IT" b="0" i="1" smtClean="0">
+                              <a:latin typeface="Cambria Math" panose="02040503050406030204" pitchFamily="18" charset="0"/>
+                              <a:ea typeface="Cambria Math" panose="02040503050406030204" pitchFamily="18" charset="0"/>
+                            </a:rPr>
+                            <m:t>𝑃</m:t>
+                          </m:r>
+                        </m:e>
+                        <m:sub>
+                          <m:r>
+                            <a:rPr lang="it-IT" b="0" i="1" smtClean="0">
+                              <a:latin typeface="Cambria Math" panose="02040503050406030204" pitchFamily="18" charset="0"/>
+                              <a:ea typeface="Cambria Math" panose="02040503050406030204" pitchFamily="18" charset="0"/>
+                            </a:rPr>
+                            <m:t>𝑥</m:t>
+                          </m:r>
+                        </m:sub>
+                      </m:sSub>
+                    </m:oMath>
+                  </a14:m>
+                  <a:r>
+                    <a:rPr lang="it-IT" dirty="0"/>
+                    <a:t>         </a:t>
+                  </a:r>
+                  <a14:m>
+                    <m:oMath xmlns:m="http://schemas.openxmlformats.org/officeDocument/2006/math">
+                      <m:sSub>
+                        <m:sSubPr>
+                          <m:ctrlPr>
+                            <a:rPr lang="it-IT" b="0" i="1" smtClean="0">
+                              <a:latin typeface="Cambria Math" panose="02040503050406030204" pitchFamily="18" charset="0"/>
+                            </a:rPr>
+                          </m:ctrlPr>
+                        </m:sSubPr>
+                        <m:e>
+                          <m:r>
+                            <a:rPr lang="it-IT" b="0" i="1" smtClean="0">
+                              <a:latin typeface="Cambria Math" panose="02040503050406030204" pitchFamily="18" charset="0"/>
+                            </a:rPr>
+                            <m:t>𝑉</m:t>
+                          </m:r>
+                        </m:e>
+                        <m:sub>
+                          <m:r>
+                            <a:rPr lang="it-IT" i="1">
+                              <a:latin typeface="Cambria Math" panose="02040503050406030204" pitchFamily="18" charset="0"/>
+                            </a:rPr>
+                            <m:t>𝑥</m:t>
+                          </m:r>
+                        </m:sub>
+                      </m:sSub>
+                      <m:r>
+                        <a:rPr lang="it-IT" i="1">
+                          <a:latin typeface="Cambria Math" panose="02040503050406030204" pitchFamily="18" charset="0"/>
+                        </a:rPr>
+                        <m:t>=</m:t>
+                      </m:r>
+                      <m:r>
+                        <a:rPr lang="it-IT" b="0" i="1" smtClean="0">
+                          <a:latin typeface="Cambria Math" panose="02040503050406030204" pitchFamily="18" charset="0"/>
+                        </a:rPr>
+                        <m:t>𝑅</m:t>
+                      </m:r>
+                      <m:r>
+                        <a:rPr lang="it-IT" i="1">
+                          <a:latin typeface="Cambria Math" panose="02040503050406030204" pitchFamily="18" charset="0"/>
+                          <a:ea typeface="Cambria Math" panose="02040503050406030204" pitchFamily="18" charset="0"/>
+                        </a:rPr>
+                        <m:t>ℛ</m:t>
+                      </m:r>
+                      <m:sSub>
+                        <m:sSubPr>
+                          <m:ctrlPr>
+                            <a:rPr lang="it-IT" i="1">
+                              <a:latin typeface="Cambria Math" panose="02040503050406030204" pitchFamily="18" charset="0"/>
+                              <a:ea typeface="Cambria Math" panose="02040503050406030204" pitchFamily="18" charset="0"/>
+                            </a:rPr>
+                          </m:ctrlPr>
+                        </m:sSubPr>
+                        <m:e>
+                          <m:r>
+                            <a:rPr lang="it-IT" i="1">
+                              <a:latin typeface="Cambria Math" panose="02040503050406030204" pitchFamily="18" charset="0"/>
+                              <a:ea typeface="Cambria Math" panose="02040503050406030204" pitchFamily="18" charset="0"/>
+                            </a:rPr>
+                            <m:t>𝑃</m:t>
+                          </m:r>
+                        </m:e>
+                        <m:sub>
+                          <m:r>
+                            <a:rPr lang="it-IT" i="1">
+                              <a:latin typeface="Cambria Math" panose="02040503050406030204" pitchFamily="18" charset="0"/>
+                              <a:ea typeface="Cambria Math" panose="02040503050406030204" pitchFamily="18" charset="0"/>
+                            </a:rPr>
+                            <m:t>𝑥</m:t>
+                          </m:r>
+                        </m:sub>
+                      </m:sSub>
+                    </m:oMath>
+                  </a14:m>
+                  <a:endParaRPr lang="it-IT" dirty="0"/>
+                </a:p>
+                <a:p>
+                  <a:endParaRPr lang="it-IT" dirty="0"/>
+                </a:p>
+                <a:p>
+                  <a14:m>
+                    <m:oMath xmlns:m="http://schemas.openxmlformats.org/officeDocument/2006/math">
+                      <m:sSub>
+                        <m:sSubPr>
+                          <m:ctrlPr>
+                            <a:rPr lang="it-IT" i="1">
+                              <a:latin typeface="Cambria Math" panose="02040503050406030204" pitchFamily="18" charset="0"/>
+                            </a:rPr>
+                          </m:ctrlPr>
+                        </m:sSubPr>
+                        <m:e>
+                          <m:r>
+                            <a:rPr lang="it-IT" i="1">
+                              <a:latin typeface="Cambria Math" panose="02040503050406030204" pitchFamily="18" charset="0"/>
+                            </a:rPr>
+                            <m:t>𝑖</m:t>
+                          </m:r>
+                        </m:e>
+                        <m:sub>
+                          <m:r>
+                            <a:rPr lang="it-IT" b="0" i="1" smtClean="0">
+                              <a:latin typeface="Cambria Math" panose="02040503050406030204" pitchFamily="18" charset="0"/>
+                            </a:rPr>
+                            <m:t>𝑦</m:t>
+                          </m:r>
+                        </m:sub>
+                      </m:sSub>
+                      <m:r>
+                        <a:rPr lang="it-IT" i="1">
+                          <a:latin typeface="Cambria Math" panose="02040503050406030204" pitchFamily="18" charset="0"/>
+                        </a:rPr>
+                        <m:t>=</m:t>
+                      </m:r>
+                      <m:r>
+                        <a:rPr lang="it-IT" i="1">
+                          <a:latin typeface="Cambria Math" panose="02040503050406030204" pitchFamily="18" charset="0"/>
+                          <a:ea typeface="Cambria Math" panose="02040503050406030204" pitchFamily="18" charset="0"/>
+                        </a:rPr>
+                        <m:t>ℛ</m:t>
+                      </m:r>
+                      <m:sSub>
+                        <m:sSubPr>
+                          <m:ctrlPr>
+                            <a:rPr lang="it-IT" i="1">
+                              <a:latin typeface="Cambria Math" panose="02040503050406030204" pitchFamily="18" charset="0"/>
+                              <a:ea typeface="Cambria Math" panose="02040503050406030204" pitchFamily="18" charset="0"/>
+                            </a:rPr>
+                          </m:ctrlPr>
+                        </m:sSubPr>
+                        <m:e>
+                          <m:r>
+                            <a:rPr lang="it-IT" i="1">
+                              <a:latin typeface="Cambria Math" panose="02040503050406030204" pitchFamily="18" charset="0"/>
+                              <a:ea typeface="Cambria Math" panose="02040503050406030204" pitchFamily="18" charset="0"/>
+                            </a:rPr>
+                            <m:t>𝑃</m:t>
+                          </m:r>
+                        </m:e>
+                        <m:sub>
+                          <m:r>
+                            <a:rPr lang="it-IT" b="0" i="1" smtClean="0">
+                              <a:latin typeface="Cambria Math" panose="02040503050406030204" pitchFamily="18" charset="0"/>
+                              <a:ea typeface="Cambria Math" panose="02040503050406030204" pitchFamily="18" charset="0"/>
+                            </a:rPr>
+                            <m:t>𝑦</m:t>
+                          </m:r>
+                        </m:sub>
+                      </m:sSub>
+                    </m:oMath>
+                  </a14:m>
+                  <a:r>
+                    <a:rPr lang="it-IT" dirty="0"/>
+                    <a:t>         </a:t>
+                  </a:r>
+                  <a14:m>
+                    <m:oMath xmlns:m="http://schemas.openxmlformats.org/officeDocument/2006/math">
+                      <m:sSub>
+                        <m:sSubPr>
+                          <m:ctrlPr>
+                            <a:rPr lang="it-IT" i="1">
+                              <a:latin typeface="Cambria Math" panose="02040503050406030204" pitchFamily="18" charset="0"/>
+                            </a:rPr>
+                          </m:ctrlPr>
+                        </m:sSubPr>
+                        <m:e>
+                          <m:r>
+                            <a:rPr lang="it-IT" i="1">
+                              <a:latin typeface="Cambria Math" panose="02040503050406030204" pitchFamily="18" charset="0"/>
+                            </a:rPr>
+                            <m:t>𝑉</m:t>
+                          </m:r>
+                        </m:e>
+                        <m:sub>
+                          <m:r>
+                            <a:rPr lang="it-IT" b="0" i="1" smtClean="0">
+                              <a:latin typeface="Cambria Math" panose="02040503050406030204" pitchFamily="18" charset="0"/>
+                            </a:rPr>
+                            <m:t>𝑦</m:t>
+                          </m:r>
+                        </m:sub>
+                      </m:sSub>
+                      <m:r>
+                        <a:rPr lang="it-IT" i="1">
+                          <a:latin typeface="Cambria Math" panose="02040503050406030204" pitchFamily="18" charset="0"/>
+                        </a:rPr>
+                        <m:t>=</m:t>
+                      </m:r>
+                      <m:r>
+                        <a:rPr lang="it-IT" i="1">
+                          <a:latin typeface="Cambria Math" panose="02040503050406030204" pitchFamily="18" charset="0"/>
+                        </a:rPr>
+                        <m:t>𝑅</m:t>
+                      </m:r>
+                      <m:r>
+                        <a:rPr lang="it-IT" i="1">
+                          <a:latin typeface="Cambria Math" panose="02040503050406030204" pitchFamily="18" charset="0"/>
+                          <a:ea typeface="Cambria Math" panose="02040503050406030204" pitchFamily="18" charset="0"/>
+                        </a:rPr>
+                        <m:t>ℛ</m:t>
+                      </m:r>
+                      <m:sSub>
+                        <m:sSubPr>
+                          <m:ctrlPr>
+                            <a:rPr lang="it-IT" i="1">
+                              <a:latin typeface="Cambria Math" panose="02040503050406030204" pitchFamily="18" charset="0"/>
+                              <a:ea typeface="Cambria Math" panose="02040503050406030204" pitchFamily="18" charset="0"/>
+                            </a:rPr>
+                          </m:ctrlPr>
+                        </m:sSubPr>
+                        <m:e>
+                          <m:r>
+                            <a:rPr lang="it-IT" i="1">
+                              <a:latin typeface="Cambria Math" panose="02040503050406030204" pitchFamily="18" charset="0"/>
+                              <a:ea typeface="Cambria Math" panose="02040503050406030204" pitchFamily="18" charset="0"/>
+                            </a:rPr>
+                            <m:t>𝑃</m:t>
+                          </m:r>
+                        </m:e>
+                        <m:sub>
+                          <m:r>
+                            <a:rPr lang="it-IT" b="0" i="1" smtClean="0">
+                              <a:latin typeface="Cambria Math" panose="02040503050406030204" pitchFamily="18" charset="0"/>
+                              <a:ea typeface="Cambria Math" panose="02040503050406030204" pitchFamily="18" charset="0"/>
+                            </a:rPr>
+                            <m:t>𝑦</m:t>
+                          </m:r>
+                        </m:sub>
+                      </m:sSub>
+                    </m:oMath>
+                  </a14:m>
+                  <a:endParaRPr lang="it-IT" dirty="0"/>
+                </a:p>
+              </p:txBody>
+            </p:sp>
+          </mc:Choice>
+          <mc:Fallback>
+            <p:sp>
+              <p:nvSpPr>
+                <p:cNvPr id="4" name="CasellaDiTesto 3">
+                  <a:extLst>
+                    <a:ext uri="{FF2B5EF4-FFF2-40B4-BE49-F238E27FC236}">
+                      <a16:creationId xmlns:a16="http://schemas.microsoft.com/office/drawing/2014/main" id="{6577AFF8-6639-9BFC-E69E-87038233B259}"/>
+                    </a:ext>
+                  </a:extLst>
+                </p:cNvPr>
+                <p:cNvSpPr txBox="1">
+                  <a:spLocks noRot="1" noChangeAspect="1" noMove="1" noResize="1" noEditPoints="1" noAdjustHandles="1" noChangeArrowheads="1" noChangeShapeType="1" noTextEdit="1"/>
+                </p:cNvSpPr>
+                <p:nvPr/>
+              </p:nvSpPr>
+              <p:spPr>
+                <a:xfrm>
+                  <a:off x="1024351" y="1671152"/>
+                  <a:ext cx="2558649" cy="852926"/>
+                </a:xfrm>
+                <a:prstGeom prst="rect">
+                  <a:avLst/>
+                </a:prstGeom>
+                <a:blipFill>
+                  <a:blip r:embed="rId7"/>
+                  <a:stretch>
+                    <a:fillRect l="-3333" b="-6429"/>
+                  </a:stretch>
+                </a:blipFill>
+              </p:spPr>
+              <p:txBody>
+                <a:bodyPr/>
+                <a:lstStyle/>
+                <a:p>
+                  <a:r>
+                    <a:rPr lang="it-IT">
+                      <a:noFill/>
+                    </a:rPr>
+                    <a:t> </a:t>
+                  </a:r>
+                </a:p>
+              </p:txBody>
+            </p:sp>
+          </mc:Fallback>
+        </mc:AlternateContent>
+        <mc:AlternateContent xmlns:mc="http://schemas.openxmlformats.org/markup-compatibility/2006">
+          <mc:Choice xmlns:a14="http://schemas.microsoft.com/office/drawing/2010/main" Requires="a14">
+            <p:sp>
+              <p:nvSpPr>
+                <p:cNvPr id="19" name="CasellaDiTesto 18">
+                  <a:extLst>
+                    <a:ext uri="{FF2B5EF4-FFF2-40B4-BE49-F238E27FC236}">
+                      <a16:creationId xmlns:a16="http://schemas.microsoft.com/office/drawing/2014/main" id="{432E266D-AED8-CABF-8E8D-6D8A7E52F179}"/>
+                    </a:ext>
+                  </a:extLst>
+                </p:cNvPr>
+                <p:cNvSpPr txBox="1"/>
+                <p:nvPr/>
+              </p:nvSpPr>
+              <p:spPr>
+                <a:xfrm>
+                  <a:off x="2038482" y="1671152"/>
+                  <a:ext cx="264496" cy="276999"/>
+                </a:xfrm>
+                <a:prstGeom prst="rect">
+                  <a:avLst/>
+                </a:prstGeom>
+                <a:noFill/>
+              </p:spPr>
+              <p:txBody>
+                <a:bodyPr wrap="none" lIns="0" tIns="0" rIns="0" bIns="0" rtlCol="0">
+                  <a:spAutoFit/>
+                </a:bodyPr>
+                <a:lstStyle/>
+                <a:p>
+                  <a14:m>
+                    <m:oMathPara xmlns:m="http://schemas.openxmlformats.org/officeDocument/2006/math">
+                      <m:oMath>
+                        <m:r>
+                          <a:rPr lang="it-IT" i="1" smtClean="0">
+                            <a:latin typeface="Cambria Math" panose="02040503050406030204" pitchFamily="18" charset="0"/>
+                            <a:ea typeface="Cambria Math" panose="02040503050406030204" pitchFamily="18" charset="0"/>
+                          </a:rPr>
+                          <m:t>⇒</m:t>
+                        </m:r>
+                      </m:oMath>
+                    </m:oMathPara>
+                  </a14:m>
+                  <a:endParaRPr lang="it-IT" dirty="0"/>
+                </a:p>
+              </p:txBody>
+            </p:sp>
+          </mc:Choice>
+          <mc:Fallback>
+            <p:sp>
+              <p:nvSpPr>
+                <p:cNvPr id="19" name="CasellaDiTesto 18">
+                  <a:extLst>
+                    <a:ext uri="{FF2B5EF4-FFF2-40B4-BE49-F238E27FC236}">
+                      <a16:creationId xmlns:a16="http://schemas.microsoft.com/office/drawing/2014/main" id="{432E266D-AED8-CABF-8E8D-6D8A7E52F179}"/>
+                    </a:ext>
+                  </a:extLst>
+                </p:cNvPr>
+                <p:cNvSpPr txBox="1">
+                  <a:spLocks noRot="1" noChangeAspect="1" noMove="1" noResize="1" noEditPoints="1" noAdjustHandles="1" noChangeArrowheads="1" noChangeShapeType="1" noTextEdit="1"/>
+                </p:cNvSpPr>
+                <p:nvPr/>
+              </p:nvSpPr>
+              <p:spPr>
+                <a:xfrm>
+                  <a:off x="2038482" y="1671152"/>
+                  <a:ext cx="264496" cy="276999"/>
+                </a:xfrm>
+                <a:prstGeom prst="rect">
+                  <a:avLst/>
+                </a:prstGeom>
+                <a:blipFill>
+                  <a:blip r:embed="rId8"/>
+                  <a:stretch>
+                    <a:fillRect l="-13636" r="-11364" b="-4348"/>
+                  </a:stretch>
+                </a:blipFill>
+              </p:spPr>
+              <p:txBody>
+                <a:bodyPr/>
+                <a:lstStyle/>
+                <a:p>
+                  <a:r>
+                    <a:rPr lang="it-IT">
+                      <a:noFill/>
+                    </a:rPr>
+                    <a:t> </a:t>
+                  </a:r>
+                </a:p>
+              </p:txBody>
+            </p:sp>
+          </mc:Fallback>
+        </mc:AlternateContent>
+        <mc:AlternateContent xmlns:mc="http://schemas.openxmlformats.org/markup-compatibility/2006">
+          <mc:Choice xmlns:a14="http://schemas.microsoft.com/office/drawing/2010/main" Requires="a14">
+            <p:sp>
+              <p:nvSpPr>
+                <p:cNvPr id="21" name="CasellaDiTesto 20">
+                  <a:extLst>
+                    <a:ext uri="{FF2B5EF4-FFF2-40B4-BE49-F238E27FC236}">
+                      <a16:creationId xmlns:a16="http://schemas.microsoft.com/office/drawing/2014/main" id="{E118A2DD-8A3C-4F21-0C8D-428E93768537}"/>
+                    </a:ext>
+                  </a:extLst>
+                </p:cNvPr>
+                <p:cNvSpPr txBox="1"/>
+                <p:nvPr/>
+              </p:nvSpPr>
+              <p:spPr>
+                <a:xfrm>
+                  <a:off x="2038482" y="2242866"/>
+                  <a:ext cx="264496" cy="276999"/>
+                </a:xfrm>
+                <a:prstGeom prst="rect">
+                  <a:avLst/>
+                </a:prstGeom>
+                <a:noFill/>
+              </p:spPr>
+              <p:txBody>
+                <a:bodyPr wrap="none" lIns="0" tIns="0" rIns="0" bIns="0" rtlCol="0">
+                  <a:spAutoFit/>
+                </a:bodyPr>
+                <a:lstStyle/>
+                <a:p>
+                  <a:pPr/>
+                  <a14:m>
+                    <m:oMathPara xmlns:m="http://schemas.openxmlformats.org/officeDocument/2006/math">
+                      <m:oMath>
+                        <m:r>
+                          <a:rPr lang="it-IT" i="1" smtClean="0">
+                            <a:latin typeface="Cambria Math" panose="02040503050406030204" pitchFamily="18" charset="0"/>
+                            <a:ea typeface="Cambria Math" panose="02040503050406030204" pitchFamily="18" charset="0"/>
+                          </a:rPr>
+                          <m:t>⇒</m:t>
+                        </m:r>
+                      </m:oMath>
+                    </m:oMathPara>
+                  </a14:m>
+                  <a:endParaRPr lang="it-IT" dirty="0"/>
+                </a:p>
+              </p:txBody>
+            </p:sp>
+          </mc:Choice>
+          <mc:Fallback>
+            <p:sp>
+              <p:nvSpPr>
+                <p:cNvPr id="21" name="CasellaDiTesto 20">
+                  <a:extLst>
+                    <a:ext uri="{FF2B5EF4-FFF2-40B4-BE49-F238E27FC236}">
+                      <a16:creationId xmlns:a16="http://schemas.microsoft.com/office/drawing/2014/main" id="{E118A2DD-8A3C-4F21-0C8D-428E93768537}"/>
+                    </a:ext>
+                  </a:extLst>
+                </p:cNvPr>
+                <p:cNvSpPr txBox="1">
+                  <a:spLocks noRot="1" noChangeAspect="1" noMove="1" noResize="1" noEditPoints="1" noAdjustHandles="1" noChangeArrowheads="1" noChangeShapeType="1" noTextEdit="1"/>
+                </p:cNvSpPr>
+                <p:nvPr/>
+              </p:nvSpPr>
+              <p:spPr>
+                <a:xfrm>
+                  <a:off x="2038482" y="2242866"/>
+                  <a:ext cx="264496" cy="276999"/>
+                </a:xfrm>
+                <a:prstGeom prst="rect">
+                  <a:avLst/>
+                </a:prstGeom>
+                <a:blipFill>
+                  <a:blip r:embed="rId9"/>
+                  <a:stretch>
+                    <a:fillRect l="-13636" r="-11364" b="-4348"/>
+                  </a:stretch>
+                </a:blipFill>
+              </p:spPr>
+              <p:txBody>
+                <a:bodyPr/>
+                <a:lstStyle/>
+                <a:p>
+                  <a:r>
+                    <a:rPr lang="it-IT">
+                      <a:noFill/>
+                    </a:rPr>
+                    <a:t> </a:t>
+                  </a:r>
+                </a:p>
+              </p:txBody>
+            </p:sp>
+          </mc:Fallback>
+        </mc:AlternateContent>
+      </p:grpSp>
+      <mc:AlternateContent xmlns:mc="http://schemas.openxmlformats.org/markup-compatibility/2006">
+        <mc:Choice xmlns:a14="http://schemas.microsoft.com/office/drawing/2010/main" Requires="a14">
+          <p:sp>
+            <p:nvSpPr>
+              <p:cNvPr id="25" name="CasellaDiTesto 24">
+                <a:extLst>
+                  <a:ext uri="{FF2B5EF4-FFF2-40B4-BE49-F238E27FC236}">
+                    <a16:creationId xmlns:a16="http://schemas.microsoft.com/office/drawing/2014/main" id="{391ACFBA-69B8-39FA-EFD6-12912BEDEF37}"/>
+                  </a:ext>
+                </a:extLst>
+              </p:cNvPr>
+              <p:cNvSpPr txBox="1"/>
+              <p:nvPr/>
+            </p:nvSpPr>
+            <p:spPr>
+              <a:xfrm>
+                <a:off x="4663806" y="1476525"/>
+                <a:ext cx="264496" cy="276999"/>
+              </a:xfrm>
+              <a:prstGeom prst="rect">
+                <a:avLst/>
+              </a:prstGeom>
+              <a:noFill/>
+            </p:spPr>
+            <p:txBody>
+              <a:bodyPr wrap="none" lIns="0" tIns="0" rIns="0" bIns="0" rtlCol="0">
+                <a:spAutoFit/>
+              </a:bodyPr>
+              <a:lstStyle/>
+              <a:p>
+                <a:pPr/>
+                <a14:m>
+                  <m:oMathPara xmlns:m="http://schemas.openxmlformats.org/officeDocument/2006/math">
+                    <m:oMath>
+                      <m:r>
+                        <a:rPr lang="it-IT" i="1" smtClean="0">
+                          <a:latin typeface="Cambria Math" panose="02040503050406030204" pitchFamily="18" charset="0"/>
+                          <a:ea typeface="Cambria Math" panose="02040503050406030204" pitchFamily="18" charset="0"/>
+                        </a:rPr>
+                        <m:t>⇒</m:t>
+                      </m:r>
+                    </m:oMath>
+                  </m:oMathPara>
+                </a14:m>
+                <a:endParaRPr lang="it-IT" dirty="0"/>
+              </a:p>
+            </p:txBody>
+          </p:sp>
+        </mc:Choice>
+        <mc:Fallback>
+          <p:sp>
+            <p:nvSpPr>
+              <p:cNvPr id="25" name="CasellaDiTesto 24">
+                <a:extLst>
+                  <a:ext uri="{FF2B5EF4-FFF2-40B4-BE49-F238E27FC236}">
+                    <a16:creationId xmlns:a16="http://schemas.microsoft.com/office/drawing/2014/main" id="{391ACFBA-69B8-39FA-EFD6-12912BEDEF37}"/>
+                  </a:ext>
+                </a:extLst>
+              </p:cNvPr>
+              <p:cNvSpPr txBox="1">
+                <a:spLocks noRot="1" noChangeAspect="1" noMove="1" noResize="1" noEditPoints="1" noAdjustHandles="1" noChangeArrowheads="1" noChangeShapeType="1" noTextEdit="1"/>
+              </p:cNvSpPr>
+              <p:nvPr/>
+            </p:nvSpPr>
+            <p:spPr>
+              <a:xfrm>
+                <a:off x="4663806" y="1476525"/>
+                <a:ext cx="264496" cy="276999"/>
+              </a:xfrm>
+              <a:prstGeom prst="rect">
+                <a:avLst/>
+              </a:prstGeom>
+              <a:blipFill>
+                <a:blip r:embed="rId10"/>
+                <a:stretch>
+                  <a:fillRect l="-13953" r="-13953" b="-4348"/>
+                </a:stretch>
+              </a:blipFill>
+            </p:spPr>
+            <p:txBody>
+              <a:bodyPr/>
+              <a:lstStyle/>
+              <a:p>
+                <a:r>
+                  <a:rPr lang="it-IT">
+                    <a:noFill/>
+                  </a:rPr>
+                  <a:t> </a:t>
+                </a:r>
+              </a:p>
+            </p:txBody>
+          </p:sp>
+        </mc:Fallback>
+      </mc:AlternateContent>
+      <mc:AlternateContent xmlns:mc="http://schemas.openxmlformats.org/markup-compatibility/2006">
+        <mc:Choice xmlns:a14="http://schemas.microsoft.com/office/drawing/2010/main" Requires="a14">
+          <p:sp>
+            <p:nvSpPr>
+              <p:cNvPr id="27" name="CasellaDiTesto 26">
+                <a:extLst>
+                  <a:ext uri="{FF2B5EF4-FFF2-40B4-BE49-F238E27FC236}">
+                    <a16:creationId xmlns:a16="http://schemas.microsoft.com/office/drawing/2014/main" id="{50FCE3DE-EDA0-E186-68BD-35E18C6A3606}"/>
+                  </a:ext>
+                </a:extLst>
+              </p:cNvPr>
+              <p:cNvSpPr txBox="1"/>
+              <p:nvPr/>
+            </p:nvSpPr>
+            <p:spPr>
+              <a:xfrm>
+                <a:off x="1036955" y="3747208"/>
+                <a:ext cx="264496" cy="276999"/>
+              </a:xfrm>
+              <a:prstGeom prst="rect">
+                <a:avLst/>
+              </a:prstGeom>
+              <a:noFill/>
+            </p:spPr>
+            <p:txBody>
+              <a:bodyPr wrap="none" lIns="0" tIns="0" rIns="0" bIns="0" rtlCol="0">
+                <a:spAutoFit/>
+              </a:bodyPr>
+              <a:lstStyle/>
+              <a:p>
+                <a:pPr/>
+                <a14:m>
+                  <m:oMathPara xmlns:m="http://schemas.openxmlformats.org/officeDocument/2006/math">
+                    <m:oMath>
+                      <m:r>
+                        <a:rPr lang="it-IT" i="1" smtClean="0">
+                          <a:latin typeface="Cambria Math" panose="02040503050406030204" pitchFamily="18" charset="0"/>
+                          <a:ea typeface="Cambria Math" panose="02040503050406030204" pitchFamily="18" charset="0"/>
+                        </a:rPr>
+                        <m:t>⇒</m:t>
+                      </m:r>
+                    </m:oMath>
+                  </m:oMathPara>
+                </a14:m>
+                <a:endParaRPr lang="it-IT" dirty="0"/>
+              </a:p>
+            </p:txBody>
+          </p:sp>
+        </mc:Choice>
+        <mc:Fallback>
+          <p:sp>
+            <p:nvSpPr>
+              <p:cNvPr id="27" name="CasellaDiTesto 26">
+                <a:extLst>
+                  <a:ext uri="{FF2B5EF4-FFF2-40B4-BE49-F238E27FC236}">
+                    <a16:creationId xmlns:a16="http://schemas.microsoft.com/office/drawing/2014/main" id="{50FCE3DE-EDA0-E186-68BD-35E18C6A3606}"/>
+                  </a:ext>
+                </a:extLst>
+              </p:cNvPr>
+              <p:cNvSpPr txBox="1">
+                <a:spLocks noRot="1" noChangeAspect="1" noMove="1" noResize="1" noEditPoints="1" noAdjustHandles="1" noChangeArrowheads="1" noChangeShapeType="1" noTextEdit="1"/>
+              </p:cNvSpPr>
+              <p:nvPr/>
+            </p:nvSpPr>
+            <p:spPr>
+              <a:xfrm>
+                <a:off x="1036955" y="3747208"/>
+                <a:ext cx="264496" cy="276999"/>
+              </a:xfrm>
+              <a:prstGeom prst="rect">
+                <a:avLst/>
+              </a:prstGeom>
+              <a:blipFill>
+                <a:blip r:embed="rId11"/>
+                <a:stretch>
+                  <a:fillRect l="-13953" r="-13953" b="-6667"/>
+                </a:stretch>
+              </a:blipFill>
+            </p:spPr>
+            <p:txBody>
+              <a:bodyPr/>
+              <a:lstStyle/>
+              <a:p>
+                <a:r>
+                  <a:rPr lang="it-IT">
+                    <a:noFill/>
+                  </a:rPr>
+                  <a:t> </a:t>
+                </a:r>
+              </a:p>
+            </p:txBody>
+          </p:sp>
+        </mc:Fallback>
+      </mc:AlternateContent>
+      <mc:AlternateContent xmlns:mc="http://schemas.openxmlformats.org/markup-compatibility/2006">
+        <mc:Choice xmlns:a14="http://schemas.microsoft.com/office/drawing/2010/main" Requires="a14">
+          <p:sp>
+            <p:nvSpPr>
+              <p:cNvPr id="29" name="CasellaDiTesto 28">
+                <a:extLst>
+                  <a:ext uri="{FF2B5EF4-FFF2-40B4-BE49-F238E27FC236}">
+                    <a16:creationId xmlns:a16="http://schemas.microsoft.com/office/drawing/2014/main" id="{F7E92814-594E-E253-8986-4081F4A63FA0}"/>
+                  </a:ext>
+                </a:extLst>
+              </p:cNvPr>
+              <p:cNvSpPr txBox="1"/>
+              <p:nvPr/>
+            </p:nvSpPr>
+            <p:spPr>
+              <a:xfrm>
+                <a:off x="1036955" y="4447334"/>
+                <a:ext cx="264496" cy="276999"/>
+              </a:xfrm>
+              <a:prstGeom prst="rect">
+                <a:avLst/>
+              </a:prstGeom>
+              <a:noFill/>
+            </p:spPr>
+            <p:txBody>
+              <a:bodyPr wrap="none" lIns="0" tIns="0" rIns="0" bIns="0" rtlCol="0">
+                <a:spAutoFit/>
+              </a:bodyPr>
+              <a:lstStyle/>
+              <a:p>
+                <a:pPr/>
+                <a14:m>
+                  <m:oMathPara xmlns:m="http://schemas.openxmlformats.org/officeDocument/2006/math">
+                    <m:oMath>
+                      <m:r>
+                        <a:rPr lang="it-IT" i="1" smtClean="0">
+                          <a:latin typeface="Cambria Math" panose="02040503050406030204" pitchFamily="18" charset="0"/>
+                          <a:ea typeface="Cambria Math" panose="02040503050406030204" pitchFamily="18" charset="0"/>
+                        </a:rPr>
+                        <m:t>⇒</m:t>
+                      </m:r>
+                    </m:oMath>
+                  </m:oMathPara>
+                </a14:m>
+                <a:endParaRPr lang="it-IT" dirty="0"/>
+              </a:p>
+            </p:txBody>
+          </p:sp>
+        </mc:Choice>
+        <mc:Fallback>
+          <p:sp>
+            <p:nvSpPr>
+              <p:cNvPr id="29" name="CasellaDiTesto 28">
+                <a:extLst>
+                  <a:ext uri="{FF2B5EF4-FFF2-40B4-BE49-F238E27FC236}">
+                    <a16:creationId xmlns:a16="http://schemas.microsoft.com/office/drawing/2014/main" id="{F7E92814-594E-E253-8986-4081F4A63FA0}"/>
+                  </a:ext>
+                </a:extLst>
+              </p:cNvPr>
+              <p:cNvSpPr txBox="1">
+                <a:spLocks noRot="1" noChangeAspect="1" noMove="1" noResize="1" noEditPoints="1" noAdjustHandles="1" noChangeArrowheads="1" noChangeShapeType="1" noTextEdit="1"/>
+              </p:cNvSpPr>
+              <p:nvPr/>
+            </p:nvSpPr>
+            <p:spPr>
+              <a:xfrm>
+                <a:off x="1036955" y="4447334"/>
+                <a:ext cx="264496" cy="276999"/>
+              </a:xfrm>
+              <a:prstGeom prst="rect">
+                <a:avLst/>
+              </a:prstGeom>
+              <a:blipFill>
+                <a:blip r:embed="rId12"/>
+                <a:stretch>
+                  <a:fillRect l="-13953" r="-13953" b="-6667"/>
+                </a:stretch>
+              </a:blipFill>
+            </p:spPr>
+            <p:txBody>
+              <a:bodyPr/>
+              <a:lstStyle/>
+              <a:p>
+                <a:r>
+                  <a:rPr lang="it-IT">
+                    <a:noFill/>
+                  </a:rPr>
+                  <a:t> </a:t>
+                </a:r>
+              </a:p>
+            </p:txBody>
+          </p:sp>
+        </mc:Fallback>
+      </mc:AlternateContent>
+    </p:spTree>
+    <p:extLst>
+      <p:ext uri="{BB962C8B-B14F-4D97-AF65-F5344CB8AC3E}">
+        <p14:creationId xmlns:p14="http://schemas.microsoft.com/office/powerpoint/2010/main" val="3713200150"/>
+      </p:ext>
+    </p:extLst>
+  </p:cSld>
+  <p:clrMapOvr>
+    <a:masterClrMapping/>
+  </p:clrMapOvr>
+</p:sld>
+</file>
+
+<file path=ppt/slides/slide12.xml><?xml version="1.0" encoding="utf-8"?>
+<p:sld xmlns:a="http://schemas.openxmlformats.org/drawingml/2006/main" xmlns:r="http://schemas.openxmlformats.org/officeDocument/2006/relationships" xmlns:p="http://schemas.openxmlformats.org/presentationml/2006/main">
+  <p:cSld>
+    <p:spTree>
+      <p:nvGrpSpPr>
+        <p:cNvPr id="1" name="">
+          <a:extLst>
+            <a:ext uri="{FF2B5EF4-FFF2-40B4-BE49-F238E27FC236}">
+              <a16:creationId xmlns:a16="http://schemas.microsoft.com/office/drawing/2014/main" id="{24B95816-1246-0E3D-254C-357A7C6D525D}"/>
+            </a:ext>
+          </a:extLst>
+        </p:cNvPr>
+        <p:cNvGrpSpPr/>
+        <p:nvPr/>
+      </p:nvGrpSpPr>
+      <p:grpSpPr>
+        <a:xfrm>
+          <a:off x="0" y="0"/>
+          <a:ext cx="0" cy="0"/>
+          <a:chOff x="0" y="0"/>
+          <a:chExt cx="0" cy="0"/>
+        </a:xfrm>
+      </p:grpSpPr>
+      <p:sp>
+        <p:nvSpPr>
+          <p:cNvPr id="2" name="Titolo 1">
+            <a:extLst>
+              <a:ext uri="{FF2B5EF4-FFF2-40B4-BE49-F238E27FC236}">
+                <a16:creationId xmlns:a16="http://schemas.microsoft.com/office/drawing/2014/main" id="{6B9339CC-7190-C680-5A1D-A8AAF073DFF7}"/>
+              </a:ext>
+            </a:extLst>
+          </p:cNvPr>
+          <p:cNvSpPr>
+            <a:spLocks noGrp="1"/>
+          </p:cNvSpPr>
+          <p:nvPr>
+            <p:ph type="title"/>
+          </p:nvPr>
+        </p:nvSpPr>
+        <p:spPr>
+          <a:xfrm>
+            <a:off x="263524" y="170475"/>
+            <a:ext cx="11664950" cy="1080000"/>
+          </a:xfrm>
+        </p:spPr>
+        <p:txBody>
+          <a:bodyPr/>
+          <a:lstStyle/>
+          <a:p>
+            <a:r>
+              <a:rPr lang="en-GB" noProof="0" dirty="0"/>
+              <a:t>PSD SOP con </a:t>
+            </a:r>
+            <a:r>
+              <a:rPr lang="en-GB" noProof="0" dirty="0" err="1"/>
+              <a:t>diversi</a:t>
+            </a:r>
+            <a:r>
+              <a:rPr lang="en-GB" noProof="0" dirty="0"/>
+              <a:t> </a:t>
+            </a:r>
+            <a:r>
+              <a:rPr lang="en-GB" noProof="0" dirty="0" err="1"/>
+              <a:t>livelli</a:t>
+            </a:r>
+            <a:r>
+              <a:rPr lang="en-GB" noProof="0" dirty="0"/>
+              <a:t> di Pin</a:t>
+            </a:r>
+          </a:p>
+        </p:txBody>
+      </p:sp>
+      <p:pic>
+        <p:nvPicPr>
+          <p:cNvPr id="15" name="Immagine 14">
+            <a:extLst>
+              <a:ext uri="{FF2B5EF4-FFF2-40B4-BE49-F238E27FC236}">
+                <a16:creationId xmlns:a16="http://schemas.microsoft.com/office/drawing/2014/main" id="{746EF982-0473-B41B-7270-91C859390CF7}"/>
+              </a:ext>
+            </a:extLst>
+          </p:cNvPr>
+          <p:cNvPicPr>
+            <a:picLocks noChangeAspect="1"/>
+          </p:cNvPicPr>
+          <p:nvPr/>
+        </p:nvPicPr>
+        <p:blipFill>
+          <a:blip r:embed="rId2">
+            <a:clrChange>
+              <a:clrFrom>
+                <a:srgbClr val="FFFFFF"/>
+              </a:clrFrom>
+              <a:clrTo>
+                <a:srgbClr val="FFFFFF">
+                  <a:alpha val="0"/>
+                </a:srgbClr>
+              </a:clrTo>
+            </a:clrChange>
+            <a:extLst>
+              <a:ext uri="{28A0092B-C50C-407E-A947-70E740481C1C}">
+                <a14:useLocalDpi xmlns:a14="http://schemas.microsoft.com/office/drawing/2010/main" val="0"/>
+              </a:ext>
+            </a:extLst>
+          </a:blip>
+          <a:srcRect t="7768"/>
+          <a:stretch>
+            <a:fillRect/>
+          </a:stretch>
+        </p:blipFill>
+        <p:spPr>
+          <a:xfrm>
+            <a:off x="0" y="900975"/>
+            <a:ext cx="12192000" cy="5616577"/>
+          </a:xfrm>
+          <a:prstGeom prst="rect">
+            <a:avLst/>
+          </a:prstGeom>
+        </p:spPr>
+      </p:pic>
+    </p:spTree>
+    <p:extLst>
+      <p:ext uri="{BB962C8B-B14F-4D97-AF65-F5344CB8AC3E}">
+        <p14:creationId xmlns:p14="http://schemas.microsoft.com/office/powerpoint/2010/main" val="940292374"/>
+      </p:ext>
+    </p:extLst>
+  </p:cSld>
+  <p:clrMapOvr>
+    <a:masterClrMapping/>
+  </p:clrMapOvr>
+</p:sld>
+</file>
+
+<file path=ppt/slides/slide13.xml><?xml version="1.0" encoding="utf-8"?>
 <p:sld xmlns:a="http://schemas.openxmlformats.org/drawingml/2006/main" xmlns:r="http://schemas.openxmlformats.org/officeDocument/2006/relationships" xmlns:p="http://schemas.openxmlformats.org/presentationml/2006/main">
   <p:cSld>
     <p:spTree>
@@ -10825,12 +14159,106 @@
           </a:p>
         </p:txBody>
       </p:sp>
+      <p:pic>
+        <p:nvPicPr>
+          <p:cNvPr id="5" name="Immagine 4">
+            <a:extLst>
+              <a:ext uri="{FF2B5EF4-FFF2-40B4-BE49-F238E27FC236}">
+                <a16:creationId xmlns:a16="http://schemas.microsoft.com/office/drawing/2014/main" id="{9E946333-9F07-A21F-D469-E6993ABD7F1D}"/>
+              </a:ext>
+            </a:extLst>
+          </p:cNvPr>
+          <p:cNvPicPr>
+            <a:picLocks noChangeAspect="1"/>
+          </p:cNvPicPr>
+          <p:nvPr/>
+        </p:nvPicPr>
+        <p:blipFill>
+          <a:blip r:embed="rId2"/>
+          <a:stretch>
+            <a:fillRect/>
+          </a:stretch>
+        </p:blipFill>
+        <p:spPr>
+          <a:xfrm>
+            <a:off x="4833761" y="2166761"/>
+            <a:ext cx="2524477" cy="2524477"/>
+          </a:xfrm>
+          <a:prstGeom prst="rect">
+            <a:avLst/>
+          </a:prstGeom>
+        </p:spPr>
+      </p:pic>
+    </p:spTree>
+    <p:extLst>
+      <p:ext uri="{BB962C8B-B14F-4D97-AF65-F5344CB8AC3E}">
+        <p14:creationId xmlns:p14="http://schemas.microsoft.com/office/powerpoint/2010/main" val="1377187253"/>
+      </p:ext>
+    </p:extLst>
+  </p:cSld>
+  <p:clrMapOvr>
+    <a:masterClrMapping/>
+  </p:clrMapOvr>
+</p:sld>
+</file>
+
+<file path=ppt/slides/slide14.xml><?xml version="1.0" encoding="utf-8"?>
+<p:sld xmlns:a="http://schemas.openxmlformats.org/drawingml/2006/main" xmlns:r="http://schemas.openxmlformats.org/officeDocument/2006/relationships" xmlns:p="http://schemas.openxmlformats.org/presentationml/2006/main">
+  <p:cSld>
+    <p:spTree>
+      <p:nvGrpSpPr>
+        <p:cNvPr id="1" name="">
+          <a:extLst>
+            <a:ext uri="{FF2B5EF4-FFF2-40B4-BE49-F238E27FC236}">
+              <a16:creationId xmlns:a16="http://schemas.microsoft.com/office/drawing/2014/main" id="{F8FE4182-0EEF-E864-FC16-FAEC19745B17}"/>
+            </a:ext>
+          </a:extLst>
+        </p:cNvPr>
+        <p:cNvGrpSpPr/>
+        <p:nvPr/>
+      </p:nvGrpSpPr>
+      <p:grpSpPr>
+        <a:xfrm>
+          <a:off x="0" y="0"/>
+          <a:ext cx="0" cy="0"/>
+          <a:chOff x="0" y="0"/>
+          <a:chExt cx="0" cy="0"/>
+        </a:xfrm>
+      </p:grpSpPr>
+      <p:sp>
+        <p:nvSpPr>
+          <p:cNvPr id="2" name="Titolo 1">
+            <a:extLst>
+              <a:ext uri="{FF2B5EF4-FFF2-40B4-BE49-F238E27FC236}">
+                <a16:creationId xmlns:a16="http://schemas.microsoft.com/office/drawing/2014/main" id="{36C11B2A-6AB3-B7F3-ED5B-A5716EA2BE8D}"/>
+              </a:ext>
+            </a:extLst>
+          </p:cNvPr>
+          <p:cNvSpPr>
+            <a:spLocks noGrp="1"/>
+          </p:cNvSpPr>
+          <p:nvPr>
+            <p:ph type="title"/>
+          </p:nvPr>
+        </p:nvSpPr>
+        <p:spPr/>
+        <p:txBody>
+          <a:bodyPr/>
+          <a:lstStyle/>
+          <a:p>
+            <a:r>
+              <a:rPr lang="en-GB" noProof="0" dirty="0"/>
+              <a:t>Aliasing</a:t>
+            </a:r>
+          </a:p>
+        </p:txBody>
+      </p:sp>
       <p:sp>
         <p:nvSpPr>
           <p:cNvPr id="3" name="Segnaposto contenuto 2">
             <a:extLst>
               <a:ext uri="{FF2B5EF4-FFF2-40B4-BE49-F238E27FC236}">
-                <a16:creationId xmlns:a16="http://schemas.microsoft.com/office/drawing/2014/main" id="{31DA2A48-4642-43C5-A219-D69143989F14}"/>
+                <a16:creationId xmlns:a16="http://schemas.microsoft.com/office/drawing/2014/main" id="{463C23D7-7EF9-4210-07E7-7D45B950BEB0}"/>
               </a:ext>
             </a:extLst>
           </p:cNvPr>
@@ -10853,7 +14281,7 @@
     </p:spTree>
     <p:extLst>
       <p:ext uri="{BB962C8B-B14F-4D97-AF65-F5344CB8AC3E}">
-        <p14:creationId xmlns:p14="http://schemas.microsoft.com/office/powerpoint/2010/main" val="1377187253"/>
+        <p14:creationId xmlns:p14="http://schemas.microsoft.com/office/powerpoint/2010/main" val="1252674806"/>
       </p:ext>
     </p:extLst>
   </p:cSld>
@@ -10863,7 +14291,7 @@
 </p:sld>
 </file>
 
-<file path=ppt/slides/slide12.xml><?xml version="1.0" encoding="utf-8"?>
+<file path=ppt/slides/slide15.xml><?xml version="1.0" encoding="utf-8"?>
 <p:sld xmlns:a="http://schemas.openxmlformats.org/drawingml/2006/main" xmlns:r="http://schemas.openxmlformats.org/officeDocument/2006/relationships" xmlns:p="http://schemas.openxmlformats.org/presentationml/2006/main">
   <p:cSld>
     <p:spTree>
@@ -10913,31 +14341,6 @@
           </a:p>
         </p:txBody>
       </p:sp>
-      <p:sp>
-        <p:nvSpPr>
-          <p:cNvPr id="3" name="Segnaposto contenuto 2">
-            <a:extLst>
-              <a:ext uri="{FF2B5EF4-FFF2-40B4-BE49-F238E27FC236}">
-                <a16:creationId xmlns:a16="http://schemas.microsoft.com/office/drawing/2014/main" id="{0BB186A3-6FE6-8728-1FDA-73E2A9B3D21D}"/>
-              </a:ext>
-            </a:extLst>
-          </p:cNvPr>
-          <p:cNvSpPr>
-            <a:spLocks noGrp="1"/>
-          </p:cNvSpPr>
-          <p:nvPr>
-            <p:ph idx="1"/>
-          </p:nvPr>
-        </p:nvSpPr>
-        <p:spPr/>
-        <p:txBody>
-          <a:bodyPr/>
-          <a:lstStyle/>
-          <a:p>
-            <a:endParaRPr lang="en-GB" noProof="0" dirty="0"/>
-          </a:p>
-        </p:txBody>
-      </p:sp>
     </p:spTree>
     <p:extLst>
       <p:ext uri="{BB962C8B-B14F-4D97-AF65-F5344CB8AC3E}">
@@ -10951,7 +14354,7 @@
 </p:sld>
 </file>
 
-<file path=ppt/slides/slide13.xml><?xml version="1.0" encoding="utf-8"?>
+<file path=ppt/slides/slide16.xml><?xml version="1.0" encoding="utf-8"?>
 <p:sld xmlns:a="http://schemas.openxmlformats.org/drawingml/2006/main" xmlns:r="http://schemas.openxmlformats.org/officeDocument/2006/relationships" xmlns:p="http://schemas.openxmlformats.org/presentationml/2006/main">
   <p:cSld>
     <p:spTree>
@@ -10995,40 +14398,59 @@
             </a:r>
             <a:r>
               <a:rPr lang="en-GB" noProof="0" dirty="0" err="1"/>
-              <a:t>lavori</a:t>
-            </a:r>
-            <a:r>
-              <a:rPr lang="en-GB" noProof="0" dirty="0"/>
-              <a:t> 4 piano</a:t>
-            </a:r>
-          </a:p>
-        </p:txBody>
-      </p:sp>
-      <p:sp>
-        <p:nvSpPr>
-          <p:cNvPr id="3" name="Segnaposto contenuto 2">
-            <a:extLst>
-              <a:ext uri="{FF2B5EF4-FFF2-40B4-BE49-F238E27FC236}">
-                <a16:creationId xmlns:a16="http://schemas.microsoft.com/office/drawing/2014/main" id="{4FAAB8A8-4C6E-857D-F91B-D496DE51D63C}"/>
-              </a:ext>
-            </a:extLst>
-          </p:cNvPr>
-          <p:cNvSpPr>
-            <a:spLocks noGrp="1"/>
-          </p:cNvSpPr>
-          <p:nvPr>
-            <p:ph idx="1"/>
-          </p:nvPr>
-        </p:nvSpPr>
-        <p:spPr/>
-        <p:txBody>
-          <a:bodyPr/>
-          <a:lstStyle/>
-          <a:p>
+              <a:t>Edificio</a:t>
+            </a:r>
             <a:endParaRPr lang="en-GB" noProof="0" dirty="0"/>
           </a:p>
         </p:txBody>
       </p:sp>
+      <p:pic>
+        <p:nvPicPr>
+          <p:cNvPr id="5" name="Immagine 4">
+            <a:extLst>
+              <a:ext uri="{FF2B5EF4-FFF2-40B4-BE49-F238E27FC236}">
+                <a16:creationId xmlns:a16="http://schemas.microsoft.com/office/drawing/2014/main" id="{AE0B6007-0ED1-6A0D-3DDE-33004FE25C60}"/>
+              </a:ext>
+            </a:extLst>
+          </p:cNvPr>
+          <p:cNvPicPr>
+            <a:picLocks noChangeAspect="1"/>
+          </p:cNvPicPr>
+          <p:nvPr/>
+        </p:nvPicPr>
+        <p:blipFill>
+          <a:blip r:embed="rId2">
+            <a:clrChange>
+              <a:clrFrom>
+                <a:srgbClr val="FFFFFF"/>
+              </a:clrFrom>
+              <a:clrTo>
+                <a:srgbClr val="FFFFFF">
+                  <a:alpha val="0"/>
+                </a:srgbClr>
+              </a:clrTo>
+            </a:clrChange>
+            <a:extLst>
+              <a:ext uri="{28A0092B-C50C-407E-A947-70E740481C1C}">
+                <a14:useLocalDpi xmlns:a14="http://schemas.microsoft.com/office/drawing/2010/main" val="0"/>
+              </a:ext>
+            </a:extLst>
+          </a:blip>
+          <a:srcRect l="2355" t="4125" b="1"/>
+          <a:stretch>
+            <a:fillRect/>
+          </a:stretch>
+        </p:blipFill>
+        <p:spPr>
+          <a:xfrm>
+            <a:off x="514952" y="720000"/>
+            <a:ext cx="11324923" cy="5553947"/>
+          </a:xfrm>
+          <a:prstGeom prst="rect">
+            <a:avLst/>
+          </a:prstGeom>
+        </p:spPr>
+      </p:pic>
     </p:spTree>
     <p:extLst>
       <p:ext uri="{BB962C8B-B14F-4D97-AF65-F5344CB8AC3E}">
@@ -11042,12 +14464,18 @@
 </p:sld>
 </file>
 
-<file path=ppt/slides/slide14.xml><?xml version="1.0" encoding="utf-8"?>
+<file path=ppt/slides/slide17.xml><?xml version="1.0" encoding="utf-8"?>
 <p:sld xmlns:a="http://schemas.openxmlformats.org/drawingml/2006/main" xmlns:r="http://schemas.openxmlformats.org/officeDocument/2006/relationships" xmlns:p="http://schemas.openxmlformats.org/presentationml/2006/main">
   <p:cSld>
     <p:spTree>
       <p:nvGrpSpPr>
-        <p:cNvPr id="1" name=""/>
+        <p:cNvPr id="1" name="">
+          <a:extLst>
+            <a:ext uri="{FF2B5EF4-FFF2-40B4-BE49-F238E27FC236}">
+              <a16:creationId xmlns:a16="http://schemas.microsoft.com/office/drawing/2014/main" id="{9C1608F2-7B4D-52AA-CAFD-3AC1F27B6D49}"/>
+            </a:ext>
+          </a:extLst>
+        </p:cNvPr>
         <p:cNvGrpSpPr/>
         <p:nvPr/>
       </p:nvGrpSpPr>
@@ -11064,7 +14492,7 @@
           <p:cNvPr id="2" name="Titolo 1">
             <a:extLst>
               <a:ext uri="{FF2B5EF4-FFF2-40B4-BE49-F238E27FC236}">
-                <a16:creationId xmlns:a16="http://schemas.microsoft.com/office/drawing/2014/main" id="{B194CA4F-9647-0712-D4E2-721054D2C9DE}"/>
+                <a16:creationId xmlns:a16="http://schemas.microsoft.com/office/drawing/2014/main" id="{95C423A1-9135-08FD-2E62-F513EEB7BCBF}"/>
               </a:ext>
             </a:extLst>
           </p:cNvPr>
@@ -11081,42 +14509,68 @@
           <a:lstStyle/>
           <a:p>
             <a:r>
+              <a:rPr lang="en-GB" noProof="0" dirty="0"/>
+              <a:t>Sensing </a:t>
+            </a:r>
+            <a:r>
               <a:rPr lang="en-GB" noProof="0" dirty="0" err="1"/>
-              <a:t>Terremoto</a:t>
+              <a:t>Edificio</a:t>
             </a:r>
             <a:endParaRPr lang="en-GB" noProof="0" dirty="0"/>
           </a:p>
         </p:txBody>
       </p:sp>
-      <p:sp>
-        <p:nvSpPr>
-          <p:cNvPr id="3" name="Segnaposto contenuto 2">
+      <p:pic>
+        <p:nvPicPr>
+          <p:cNvPr id="4" name="Immagine 3">
             <a:extLst>
               <a:ext uri="{FF2B5EF4-FFF2-40B4-BE49-F238E27FC236}">
-                <a16:creationId xmlns:a16="http://schemas.microsoft.com/office/drawing/2014/main" id="{AC2384BA-1A9F-CCCA-CB2F-B050E00EC90C}"/>
+                <a16:creationId xmlns:a16="http://schemas.microsoft.com/office/drawing/2014/main" id="{9D0022E5-3E02-2379-81AA-8278E682C85E}"/>
               </a:ext>
             </a:extLst>
           </p:cNvPr>
-          <p:cNvSpPr>
-            <a:spLocks noGrp="1"/>
-          </p:cNvSpPr>
-          <p:nvPr>
-            <p:ph idx="1"/>
-          </p:nvPr>
-        </p:nvSpPr>
-        <p:spPr/>
-        <p:txBody>
-          <a:bodyPr/>
-          <a:lstStyle/>
-          <a:p>
-            <a:endParaRPr lang="en-GB" noProof="0" dirty="0"/>
-          </a:p>
-        </p:txBody>
-      </p:sp>
+          <p:cNvPicPr>
+            <a:picLocks noChangeAspect="1"/>
+          </p:cNvPicPr>
+          <p:nvPr/>
+        </p:nvPicPr>
+        <p:blipFill>
+          <a:blip r:embed="rId2">
+            <a:clrChange>
+              <a:clrFrom>
+                <a:srgbClr val="FFFFFF"/>
+              </a:clrFrom>
+              <a:clrTo>
+                <a:srgbClr val="FFFFFF">
+                  <a:alpha val="0"/>
+                </a:srgbClr>
+              </a:clrTo>
+            </a:clrChange>
+            <a:extLst>
+              <a:ext uri="{28A0092B-C50C-407E-A947-70E740481C1C}">
+                <a14:useLocalDpi xmlns:a14="http://schemas.microsoft.com/office/drawing/2010/main" val="0"/>
+              </a:ext>
+            </a:extLst>
+          </a:blip>
+          <a:srcRect l="3047" t="4171"/>
+          <a:stretch>
+            <a:fillRect/>
+          </a:stretch>
+        </p:blipFill>
+        <p:spPr>
+          <a:xfrm>
+            <a:off x="420987" y="733930"/>
+            <a:ext cx="11350025" cy="5603369"/>
+          </a:xfrm>
+          <a:prstGeom prst="rect">
+            <a:avLst/>
+          </a:prstGeom>
+        </p:spPr>
+      </p:pic>
     </p:spTree>
     <p:extLst>
       <p:ext uri="{BB962C8B-B14F-4D97-AF65-F5344CB8AC3E}">
-        <p14:creationId xmlns:p14="http://schemas.microsoft.com/office/powerpoint/2010/main" val="577277101"/>
+        <p14:creationId xmlns:p14="http://schemas.microsoft.com/office/powerpoint/2010/main" val="798856854"/>
       </p:ext>
     </p:extLst>
   </p:cSld>
@@ -11126,12 +14580,18 @@
 </p:sld>
 </file>
 
-<file path=ppt/slides/slide15.xml><?xml version="1.0" encoding="utf-8"?>
+<file path=ppt/slides/slide18.xml><?xml version="1.0" encoding="utf-8"?>
 <p:sld xmlns:a="http://schemas.openxmlformats.org/drawingml/2006/main" xmlns:r="http://schemas.openxmlformats.org/officeDocument/2006/relationships" xmlns:p="http://schemas.openxmlformats.org/presentationml/2006/main">
   <p:cSld>
     <p:spTree>
       <p:nvGrpSpPr>
-        <p:cNvPr id="1" name=""/>
+        <p:cNvPr id="1" name="">
+          <a:extLst>
+            <a:ext uri="{FF2B5EF4-FFF2-40B4-BE49-F238E27FC236}">
+              <a16:creationId xmlns:a16="http://schemas.microsoft.com/office/drawing/2014/main" id="{14258EB7-F680-37DF-6C2B-32CC660F1DF2}"/>
+            </a:ext>
+          </a:extLst>
+        </p:cNvPr>
         <p:cNvGrpSpPr/>
         <p:nvPr/>
       </p:nvGrpSpPr>
@@ -11145,10 +14605,10 @@
       </p:grpSpPr>
       <p:sp>
         <p:nvSpPr>
-          <p:cNvPr id="2" name="Title 1">
+          <p:cNvPr id="2" name="Titolo 1">
             <a:extLst>
               <a:ext uri="{FF2B5EF4-FFF2-40B4-BE49-F238E27FC236}">
-                <a16:creationId xmlns:a16="http://schemas.microsoft.com/office/drawing/2014/main" id="{AAE432A1-F5F3-B742-D559-E164C4A3D222}"/>
+                <a16:creationId xmlns:a16="http://schemas.microsoft.com/office/drawing/2014/main" id="{951D32A5-F7C9-B69B-5CA8-FC1B1F774E3C}"/>
               </a:ext>
             </a:extLst>
           </p:cNvPr>
@@ -11156,36 +14616,182 @@
             <a:spLocks noGrp="1"/>
           </p:cNvSpPr>
           <p:nvPr>
-            <p:ph type="ctrTitle"/>
+            <p:ph type="title"/>
           </p:nvPr>
         </p:nvSpPr>
-        <p:spPr>
-          <a:xfrm>
-            <a:off x="263525" y="3033550"/>
-            <a:ext cx="11664950" cy="790899"/>
-          </a:xfrm>
-        </p:spPr>
+        <p:spPr/>
         <p:txBody>
-          <a:bodyPr vert="horz" lIns="91440" tIns="45720" rIns="91440" bIns="45720" rtlCol="0" anchor="b" anchorCtr="0">
-            <a:normAutofit/>
-          </a:bodyPr>
+          <a:bodyPr/>
           <a:lstStyle/>
           <a:p>
             <a:r>
-              <a:rPr lang="en-GB" b="1" kern="1200" noProof="0" dirty="0">
-                <a:latin typeface="+mj-lt"/>
-                <a:ea typeface="+mj-ea"/>
-                <a:cs typeface="+mj-cs"/>
-              </a:rPr>
-              <a:t>THANKS FOR YOUR ATTENTION</a:t>
-            </a:r>
+              <a:rPr lang="en-GB" noProof="0" dirty="0"/>
+              <a:t>Sensing </a:t>
+            </a:r>
+            <a:r>
+              <a:rPr lang="en-GB" noProof="0" dirty="0" err="1"/>
+              <a:t>Edificio</a:t>
+            </a:r>
+            <a:endParaRPr lang="en-GB" noProof="0" dirty="0"/>
           </a:p>
         </p:txBody>
       </p:sp>
+      <p:pic>
+        <p:nvPicPr>
+          <p:cNvPr id="5" name="Immagine 4">
+            <a:extLst>
+              <a:ext uri="{FF2B5EF4-FFF2-40B4-BE49-F238E27FC236}">
+                <a16:creationId xmlns:a16="http://schemas.microsoft.com/office/drawing/2014/main" id="{78525BEE-AB56-A307-677F-D3850A0D4FCB}"/>
+              </a:ext>
+            </a:extLst>
+          </p:cNvPr>
+          <p:cNvPicPr>
+            <a:picLocks noChangeAspect="1"/>
+          </p:cNvPicPr>
+          <p:nvPr/>
+        </p:nvPicPr>
+        <p:blipFill>
+          <a:blip r:embed="rId2">
+            <a:extLst>
+              <a:ext uri="{28A0092B-C50C-407E-A947-70E740481C1C}">
+                <a14:useLocalDpi xmlns:a14="http://schemas.microsoft.com/office/drawing/2010/main" val="0"/>
+              </a:ext>
+            </a:extLst>
+          </a:blip>
+          <a:stretch>
+            <a:fillRect/>
+          </a:stretch>
+        </p:blipFill>
+        <p:spPr>
+          <a:xfrm>
+            <a:off x="260650" y="684101"/>
+            <a:ext cx="10991044" cy="5489798"/>
+          </a:xfrm>
+          <a:prstGeom prst="rect">
+            <a:avLst/>
+          </a:prstGeom>
+        </p:spPr>
+      </p:pic>
     </p:spTree>
     <p:extLst>
       <p:ext uri="{BB962C8B-B14F-4D97-AF65-F5344CB8AC3E}">
-        <p14:creationId xmlns:p14="http://schemas.microsoft.com/office/powerpoint/2010/main" val="1548438611"/>
+        <p14:creationId xmlns:p14="http://schemas.microsoft.com/office/powerpoint/2010/main" val="3435514505"/>
+      </p:ext>
+    </p:extLst>
+  </p:cSld>
+  <p:clrMapOvr>
+    <a:masterClrMapping/>
+  </p:clrMapOvr>
+</p:sld>
+</file>
+
+<file path=ppt/slides/slide19.xml><?xml version="1.0" encoding="utf-8"?>
+<p:sld xmlns:a="http://schemas.openxmlformats.org/drawingml/2006/main" xmlns:r="http://schemas.openxmlformats.org/officeDocument/2006/relationships" xmlns:p="http://schemas.openxmlformats.org/presentationml/2006/main">
+  <p:cSld>
+    <p:spTree>
+      <p:nvGrpSpPr>
+        <p:cNvPr id="1" name="">
+          <a:extLst>
+            <a:ext uri="{FF2B5EF4-FFF2-40B4-BE49-F238E27FC236}">
+              <a16:creationId xmlns:a16="http://schemas.microsoft.com/office/drawing/2014/main" id="{103691A3-09DB-56A8-134B-580513FE2222}"/>
+            </a:ext>
+          </a:extLst>
+        </p:cNvPr>
+        <p:cNvGrpSpPr/>
+        <p:nvPr/>
+      </p:nvGrpSpPr>
+      <p:grpSpPr>
+        <a:xfrm>
+          <a:off x="0" y="0"/>
+          <a:ext cx="0" cy="0"/>
+          <a:chOff x="0" y="0"/>
+          <a:chExt cx="0" cy="0"/>
+        </a:xfrm>
+      </p:grpSpPr>
+      <p:sp>
+        <p:nvSpPr>
+          <p:cNvPr id="2" name="Titolo 1">
+            <a:extLst>
+              <a:ext uri="{FF2B5EF4-FFF2-40B4-BE49-F238E27FC236}">
+                <a16:creationId xmlns:a16="http://schemas.microsoft.com/office/drawing/2014/main" id="{9091BBA4-3729-F6D3-7EF6-E5707D8BF25F}"/>
+              </a:ext>
+            </a:extLst>
+          </p:cNvPr>
+          <p:cNvSpPr>
+            <a:spLocks noGrp="1"/>
+          </p:cNvSpPr>
+          <p:nvPr>
+            <p:ph type="title"/>
+          </p:nvPr>
+        </p:nvSpPr>
+        <p:spPr/>
+        <p:txBody>
+          <a:bodyPr/>
+          <a:lstStyle/>
+          <a:p>
+            <a:r>
+              <a:rPr lang="en-GB" noProof="0" dirty="0"/>
+              <a:t>Sensing </a:t>
+            </a:r>
+            <a:r>
+              <a:rPr lang="en-GB" noProof="0" dirty="0" err="1"/>
+              <a:t>Edificio</a:t>
+            </a:r>
+            <a:endParaRPr lang="en-GB" noProof="0" dirty="0"/>
+          </a:p>
+        </p:txBody>
+      </p:sp>
+      <p:pic>
+        <p:nvPicPr>
+          <p:cNvPr id="5" name="Immagine 4">
+            <a:extLst>
+              <a:ext uri="{FF2B5EF4-FFF2-40B4-BE49-F238E27FC236}">
+                <a16:creationId xmlns:a16="http://schemas.microsoft.com/office/drawing/2014/main" id="{4BBFD902-D0BF-AAF9-B0B1-1B57D50D84B3}"/>
+              </a:ext>
+            </a:extLst>
+          </p:cNvPr>
+          <p:cNvPicPr>
+            <a:picLocks noChangeAspect="1"/>
+          </p:cNvPicPr>
+          <p:nvPr/>
+        </p:nvPicPr>
+        <p:blipFill>
+          <a:blip r:embed="rId2">
+            <a:clrChange>
+              <a:clrFrom>
+                <a:srgbClr val="FFFFFF"/>
+              </a:clrFrom>
+              <a:clrTo>
+                <a:srgbClr val="FFFFFF">
+                  <a:alpha val="0"/>
+                </a:srgbClr>
+              </a:clrTo>
+            </a:clrChange>
+            <a:extLst>
+              <a:ext uri="{28A0092B-C50C-407E-A947-70E740481C1C}">
+                <a14:useLocalDpi xmlns:a14="http://schemas.microsoft.com/office/drawing/2010/main" val="0"/>
+              </a:ext>
+            </a:extLst>
+          </a:blip>
+          <a:srcRect l="2138" r="10625"/>
+          <a:stretch>
+            <a:fillRect/>
+          </a:stretch>
+        </p:blipFill>
+        <p:spPr>
+          <a:xfrm>
+            <a:off x="1375075" y="644452"/>
+            <a:ext cx="9959675" cy="5702446"/>
+          </a:xfrm>
+          <a:prstGeom prst="rect">
+            <a:avLst/>
+          </a:prstGeom>
+        </p:spPr>
+      </p:pic>
+    </p:spTree>
+    <p:extLst>
+      <p:ext uri="{BB962C8B-B14F-4D97-AF65-F5344CB8AC3E}">
+        <p14:creationId xmlns:p14="http://schemas.microsoft.com/office/powerpoint/2010/main" val="469411484"/>
       </p:ext>
     </p:extLst>
   </p:cSld>
@@ -11840,6 +15446,378 @@
     <p:extLst>
       <p:ext uri="{BB962C8B-B14F-4D97-AF65-F5344CB8AC3E}">
         <p14:creationId xmlns:p14="http://schemas.microsoft.com/office/powerpoint/2010/main" val="120020874"/>
+      </p:ext>
+    </p:extLst>
+  </p:cSld>
+  <p:clrMapOvr>
+    <a:masterClrMapping/>
+  </p:clrMapOvr>
+</p:sld>
+</file>
+
+<file path=ppt/slides/slide20.xml><?xml version="1.0" encoding="utf-8"?>
+<p:sld xmlns:a="http://schemas.openxmlformats.org/drawingml/2006/main" xmlns:r="http://schemas.openxmlformats.org/officeDocument/2006/relationships" xmlns:p="http://schemas.openxmlformats.org/presentationml/2006/main">
+  <p:cSld>
+    <p:spTree>
+      <p:nvGrpSpPr>
+        <p:cNvPr id="1" name="">
+          <a:extLst>
+            <a:ext uri="{FF2B5EF4-FFF2-40B4-BE49-F238E27FC236}">
+              <a16:creationId xmlns:a16="http://schemas.microsoft.com/office/drawing/2014/main" id="{7BBDFC87-6343-FF43-451B-B8661DB18006}"/>
+            </a:ext>
+          </a:extLst>
+        </p:cNvPr>
+        <p:cNvGrpSpPr/>
+        <p:nvPr/>
+      </p:nvGrpSpPr>
+      <p:grpSpPr>
+        <a:xfrm>
+          <a:off x="0" y="0"/>
+          <a:ext cx="0" cy="0"/>
+          <a:chOff x="0" y="0"/>
+          <a:chExt cx="0" cy="0"/>
+        </a:xfrm>
+      </p:grpSpPr>
+      <p:sp>
+        <p:nvSpPr>
+          <p:cNvPr id="2" name="Titolo 1">
+            <a:extLst>
+              <a:ext uri="{FF2B5EF4-FFF2-40B4-BE49-F238E27FC236}">
+                <a16:creationId xmlns:a16="http://schemas.microsoft.com/office/drawing/2014/main" id="{051B6004-021A-4B6F-6CFF-E56E58199D4C}"/>
+              </a:ext>
+            </a:extLst>
+          </p:cNvPr>
+          <p:cNvSpPr>
+            <a:spLocks noGrp="1"/>
+          </p:cNvSpPr>
+          <p:nvPr>
+            <p:ph type="title"/>
+          </p:nvPr>
+        </p:nvSpPr>
+        <p:spPr/>
+        <p:txBody>
+          <a:bodyPr/>
+          <a:lstStyle/>
+          <a:p>
+            <a:r>
+              <a:rPr lang="en-GB" noProof="0" dirty="0" err="1"/>
+              <a:t>Terremoto</a:t>
+            </a:r>
+            <a:r>
+              <a:rPr lang="en-GB" noProof="0" dirty="0"/>
+              <a:t> </a:t>
+            </a:r>
+          </a:p>
+        </p:txBody>
+      </p:sp>
+      <p:sp>
+        <p:nvSpPr>
+          <p:cNvPr id="5" name="CasellaDiTesto 4">
+            <a:extLst>
+              <a:ext uri="{FF2B5EF4-FFF2-40B4-BE49-F238E27FC236}">
+                <a16:creationId xmlns:a16="http://schemas.microsoft.com/office/drawing/2014/main" id="{E2DF3884-9DD7-D229-82CF-39B9B5C150B2}"/>
+              </a:ext>
+            </a:extLst>
+          </p:cNvPr>
+          <p:cNvSpPr txBox="1"/>
+          <p:nvPr/>
+        </p:nvSpPr>
+        <p:spPr>
+          <a:xfrm>
+            <a:off x="260650" y="720000"/>
+            <a:ext cx="8549135" cy="369332"/>
+          </a:xfrm>
+          <a:prstGeom prst="rect">
+            <a:avLst/>
+          </a:prstGeom>
+          <a:noFill/>
+        </p:spPr>
+        <p:txBody>
+          <a:bodyPr wrap="none" rtlCol="0">
+            <a:spAutoFit/>
+          </a:bodyPr>
+          <a:lstStyle/>
+          <a:p>
+            <a:r>
+              <a:rPr lang="it-IT" dirty="0"/>
+              <a:t>5 km N San Damiano Macra (CN),</a:t>
+            </a:r>
+            <a:r>
+              <a:rPr lang="en-GB" dirty="0"/>
+              <a:t> Mw 3.3, 09/08/2026 00:10:34 (UTC+02:00)</a:t>
+            </a:r>
+            <a:endParaRPr lang="it-IT" dirty="0"/>
+          </a:p>
+        </p:txBody>
+      </p:sp>
+      <p:pic>
+        <p:nvPicPr>
+          <p:cNvPr id="7" name="Immagine 6">
+            <a:extLst>
+              <a:ext uri="{FF2B5EF4-FFF2-40B4-BE49-F238E27FC236}">
+                <a16:creationId xmlns:a16="http://schemas.microsoft.com/office/drawing/2014/main" id="{2218329B-9EA8-F859-DD7C-188A7F449ED6}"/>
+              </a:ext>
+            </a:extLst>
+          </p:cNvPr>
+          <p:cNvPicPr>
+            <a:picLocks noChangeAspect="1"/>
+          </p:cNvPicPr>
+          <p:nvPr/>
+        </p:nvPicPr>
+        <p:blipFill>
+          <a:blip r:embed="rId2">
+            <a:clrChange>
+              <a:clrFrom>
+                <a:srgbClr val="FFFFFF"/>
+              </a:clrFrom>
+              <a:clrTo>
+                <a:srgbClr val="FFFFFF">
+                  <a:alpha val="0"/>
+                </a:srgbClr>
+              </a:clrTo>
+            </a:clrChange>
+            <a:extLst>
+              <a:ext uri="{28A0092B-C50C-407E-A947-70E740481C1C}">
+                <a14:useLocalDpi xmlns:a14="http://schemas.microsoft.com/office/drawing/2010/main" val="0"/>
+              </a:ext>
+            </a:extLst>
+          </a:blip>
+          <a:srcRect l="2138" t="1824" r="8672" b="4328"/>
+          <a:stretch>
+            <a:fillRect/>
+          </a:stretch>
+        </p:blipFill>
+        <p:spPr>
+          <a:xfrm>
+            <a:off x="1355515" y="1158879"/>
+            <a:ext cx="9683961" cy="5089521"/>
+          </a:xfrm>
+          <a:prstGeom prst="rect">
+            <a:avLst/>
+          </a:prstGeom>
+        </p:spPr>
+      </p:pic>
+    </p:spTree>
+    <p:extLst>
+      <p:ext uri="{BB962C8B-B14F-4D97-AF65-F5344CB8AC3E}">
+        <p14:creationId xmlns:p14="http://schemas.microsoft.com/office/powerpoint/2010/main" val="2585452372"/>
+      </p:ext>
+    </p:extLst>
+  </p:cSld>
+  <p:clrMapOvr>
+    <a:masterClrMapping/>
+  </p:clrMapOvr>
+</p:sld>
+</file>
+
+<file path=ppt/slides/slide21.xml><?xml version="1.0" encoding="utf-8"?>
+<p:sld xmlns:a="http://schemas.openxmlformats.org/drawingml/2006/main" xmlns:r="http://schemas.openxmlformats.org/officeDocument/2006/relationships" xmlns:p="http://schemas.openxmlformats.org/presentationml/2006/main">
+  <p:cSld>
+    <p:spTree>
+      <p:nvGrpSpPr>
+        <p:cNvPr id="1" name=""/>
+        <p:cNvGrpSpPr/>
+        <p:nvPr/>
+      </p:nvGrpSpPr>
+      <p:grpSpPr>
+        <a:xfrm>
+          <a:off x="0" y="0"/>
+          <a:ext cx="0" cy="0"/>
+          <a:chOff x="0" y="0"/>
+          <a:chExt cx="0" cy="0"/>
+        </a:xfrm>
+      </p:grpSpPr>
+      <p:sp>
+        <p:nvSpPr>
+          <p:cNvPr id="2" name="Titolo 1">
+            <a:extLst>
+              <a:ext uri="{FF2B5EF4-FFF2-40B4-BE49-F238E27FC236}">
+                <a16:creationId xmlns:a16="http://schemas.microsoft.com/office/drawing/2014/main" id="{B194CA4F-9647-0712-D4E2-721054D2C9DE}"/>
+              </a:ext>
+            </a:extLst>
+          </p:cNvPr>
+          <p:cNvSpPr>
+            <a:spLocks noGrp="1"/>
+          </p:cNvSpPr>
+          <p:nvPr>
+            <p:ph type="title"/>
+          </p:nvPr>
+        </p:nvSpPr>
+        <p:spPr/>
+        <p:txBody>
+          <a:bodyPr/>
+          <a:lstStyle/>
+          <a:p>
+            <a:r>
+              <a:rPr lang="en-GB" noProof="0" dirty="0" err="1"/>
+              <a:t>Terremoto</a:t>
+            </a:r>
+            <a:r>
+              <a:rPr lang="en-GB" noProof="0" dirty="0"/>
+              <a:t> </a:t>
+            </a:r>
+          </a:p>
+        </p:txBody>
+      </p:sp>
+      <p:sp>
+        <p:nvSpPr>
+          <p:cNvPr id="5" name="CasellaDiTesto 4">
+            <a:extLst>
+              <a:ext uri="{FF2B5EF4-FFF2-40B4-BE49-F238E27FC236}">
+                <a16:creationId xmlns:a16="http://schemas.microsoft.com/office/drawing/2014/main" id="{27E79EF1-17F4-08AC-EA72-50C5680D6D44}"/>
+              </a:ext>
+            </a:extLst>
+          </p:cNvPr>
+          <p:cNvSpPr txBox="1"/>
+          <p:nvPr/>
+        </p:nvSpPr>
+        <p:spPr>
+          <a:xfrm>
+            <a:off x="260650" y="720000"/>
+            <a:ext cx="8549135" cy="369332"/>
+          </a:xfrm>
+          <a:prstGeom prst="rect">
+            <a:avLst/>
+          </a:prstGeom>
+          <a:noFill/>
+        </p:spPr>
+        <p:txBody>
+          <a:bodyPr wrap="none" rtlCol="0">
+            <a:spAutoFit/>
+          </a:bodyPr>
+          <a:lstStyle/>
+          <a:p>
+            <a:r>
+              <a:rPr lang="it-IT" dirty="0"/>
+              <a:t>5 km N San Damiano Macra (CN),</a:t>
+            </a:r>
+            <a:r>
+              <a:rPr lang="en-GB" dirty="0"/>
+              <a:t> Mw 3.3, 09/08/2026 00:10:34 (UTC+02:00)</a:t>
+            </a:r>
+            <a:endParaRPr lang="it-IT" dirty="0"/>
+          </a:p>
+        </p:txBody>
+      </p:sp>
+      <p:pic>
+        <p:nvPicPr>
+          <p:cNvPr id="9" name="Immagine 8">
+            <a:extLst>
+              <a:ext uri="{FF2B5EF4-FFF2-40B4-BE49-F238E27FC236}">
+                <a16:creationId xmlns:a16="http://schemas.microsoft.com/office/drawing/2014/main" id="{1564EB2E-3878-444C-BB4C-2261EF89E891}"/>
+              </a:ext>
+            </a:extLst>
+          </p:cNvPr>
+          <p:cNvPicPr>
+            <a:picLocks noChangeAspect="1"/>
+          </p:cNvPicPr>
+          <p:nvPr/>
+        </p:nvPicPr>
+        <p:blipFill>
+          <a:blip r:embed="rId2">
+            <a:clrChange>
+              <a:clrFrom>
+                <a:srgbClr val="FFFFFF"/>
+              </a:clrFrom>
+              <a:clrTo>
+                <a:srgbClr val="FFFFFF">
+                  <a:alpha val="0"/>
+                </a:srgbClr>
+              </a:clrTo>
+            </a:clrChange>
+            <a:extLst>
+              <a:ext uri="{28A0092B-C50C-407E-A947-70E740481C1C}">
+                <a14:useLocalDpi xmlns:a14="http://schemas.microsoft.com/office/drawing/2010/main" val="0"/>
+              </a:ext>
+            </a:extLst>
+          </a:blip>
+          <a:stretch>
+            <a:fillRect/>
+          </a:stretch>
+        </p:blipFill>
+        <p:spPr>
+          <a:xfrm>
+            <a:off x="-76200" y="498475"/>
+            <a:ext cx="12192000" cy="6089650"/>
+          </a:xfrm>
+          <a:prstGeom prst="rect">
+            <a:avLst/>
+          </a:prstGeom>
+        </p:spPr>
+      </p:pic>
+    </p:spTree>
+    <p:extLst>
+      <p:ext uri="{BB962C8B-B14F-4D97-AF65-F5344CB8AC3E}">
+        <p14:creationId xmlns:p14="http://schemas.microsoft.com/office/powerpoint/2010/main" val="577277101"/>
+      </p:ext>
+    </p:extLst>
+  </p:cSld>
+  <p:clrMapOvr>
+    <a:masterClrMapping/>
+  </p:clrMapOvr>
+</p:sld>
+</file>
+
+<file path=ppt/slides/slide22.xml><?xml version="1.0" encoding="utf-8"?>
+<p:sld xmlns:a="http://schemas.openxmlformats.org/drawingml/2006/main" xmlns:r="http://schemas.openxmlformats.org/officeDocument/2006/relationships" xmlns:p="http://schemas.openxmlformats.org/presentationml/2006/main">
+  <p:cSld>
+    <p:spTree>
+      <p:nvGrpSpPr>
+        <p:cNvPr id="1" name=""/>
+        <p:cNvGrpSpPr/>
+        <p:nvPr/>
+      </p:nvGrpSpPr>
+      <p:grpSpPr>
+        <a:xfrm>
+          <a:off x="0" y="0"/>
+          <a:ext cx="0" cy="0"/>
+          <a:chOff x="0" y="0"/>
+          <a:chExt cx="0" cy="0"/>
+        </a:xfrm>
+      </p:grpSpPr>
+      <p:sp>
+        <p:nvSpPr>
+          <p:cNvPr id="2" name="Title 1">
+            <a:extLst>
+              <a:ext uri="{FF2B5EF4-FFF2-40B4-BE49-F238E27FC236}">
+                <a16:creationId xmlns:a16="http://schemas.microsoft.com/office/drawing/2014/main" id="{AAE432A1-F5F3-B742-D559-E164C4A3D222}"/>
+              </a:ext>
+            </a:extLst>
+          </p:cNvPr>
+          <p:cNvSpPr>
+            <a:spLocks noGrp="1"/>
+          </p:cNvSpPr>
+          <p:nvPr>
+            <p:ph type="ctrTitle"/>
+          </p:nvPr>
+        </p:nvSpPr>
+        <p:spPr>
+          <a:xfrm>
+            <a:off x="263525" y="3033550"/>
+            <a:ext cx="11664950" cy="790899"/>
+          </a:xfrm>
+        </p:spPr>
+        <p:txBody>
+          <a:bodyPr vert="horz" lIns="91440" tIns="45720" rIns="91440" bIns="45720" rtlCol="0" anchor="b" anchorCtr="0">
+            <a:normAutofit/>
+          </a:bodyPr>
+          <a:lstStyle/>
+          <a:p>
+            <a:r>
+              <a:rPr lang="en-GB" b="1" kern="1200" noProof="0" dirty="0">
+                <a:latin typeface="+mj-lt"/>
+                <a:ea typeface="+mj-ea"/>
+                <a:cs typeface="+mj-cs"/>
+              </a:rPr>
+              <a:t>THANKS FOR YOUR ATTENTION</a:t>
+            </a:r>
+          </a:p>
+        </p:txBody>
+      </p:sp>
+    </p:spTree>
+    <p:extLst>
+      <p:ext uri="{BB962C8B-B14F-4D97-AF65-F5344CB8AC3E}">
+        <p14:creationId xmlns:p14="http://schemas.microsoft.com/office/powerpoint/2010/main" val="1548438611"/>
       </p:ext>
     </p:extLst>
   </p:cSld>
@@ -25051,7 +29029,7 @@
         </p:blipFill>
         <p:spPr>
           <a:xfrm>
-            <a:off x="416578" y="737584"/>
+            <a:off x="260650" y="720000"/>
             <a:ext cx="11109404" cy="5548915"/>
           </a:xfrm>
           <a:prstGeom prst="rect">
@@ -25154,6 +29132,32 @@
           <a:bodyPr/>
           <a:lstStyle/>
           <a:p>
+            <a:r>
+              <a:rPr lang="en-GB" noProof="0" dirty="0" err="1"/>
+              <a:t>Aspetto</a:t>
+            </a:r>
+            <a:r>
+              <a:rPr lang="en-GB" noProof="0" dirty="0"/>
+              <a:t> </a:t>
+            </a:r>
+            <a:r>
+              <a:rPr lang="en-GB" dirty="0"/>
+              <a:t>B</a:t>
+            </a:r>
+            <a:r>
+              <a:rPr lang="en-GB" noProof="0" dirty="0" err="1"/>
+              <a:t>en</a:t>
+            </a:r>
+            <a:r>
+              <a:rPr lang="en-GB" noProof="0" dirty="0"/>
+              <a:t> </a:t>
+            </a:r>
+            <a:r>
+              <a:rPr lang="en-GB" noProof="0" dirty="0">
+                <a:sym typeface="Wingdings" panose="05000000000000000000" pitchFamily="2" charset="2"/>
+              </a:rPr>
+              <a:t> </a:t>
+            </a:r>
             <a:endParaRPr lang="en-GB" noProof="0" dirty="0"/>
           </a:p>
         </p:txBody>
@@ -26378,20 +30382,20 @@
 </file>
 
 <file path=customXml/item1.xml><?xml version="1.0" encoding="utf-8"?>
+<p:properties xmlns:p="http://schemas.microsoft.com/office/2006/metadata/properties" xmlns:xsi="http://www.w3.org/2001/XMLSchema-instance" xmlns:pc="http://schemas.microsoft.com/office/infopath/2007/PartnerControls">
+  <documentManagement>
+    <_activity xmlns="e1991b7f-6b7d-449b-b767-f5f786c869d3" xsi:nil="true"/>
+  </documentManagement>
+</p:properties>
+</file>
+
+<file path=customXml/item2.xml><?xml version="1.0" encoding="utf-8"?>
 <?mso-contentType ?>
 <FormTemplates xmlns="http://schemas.microsoft.com/sharepoint/v3/contenttype/forms">
   <Display>DocumentLibraryForm</Display>
   <Edit>DocumentLibraryForm</Edit>
   <New>DocumentLibraryForm</New>
 </FormTemplates>
-</file>
-
-<file path=customXml/item2.xml><?xml version="1.0" encoding="utf-8"?>
-<p:properties xmlns:p="http://schemas.microsoft.com/office/2006/metadata/properties" xmlns:xsi="http://www.w3.org/2001/XMLSchema-instance" xmlns:pc="http://schemas.microsoft.com/office/infopath/2007/PartnerControls">
-  <documentManagement>
-    <_activity xmlns="e1991b7f-6b7d-449b-b767-f5f786c869d3" xsi:nil="true"/>
-  </documentManagement>
-</p:properties>
 </file>
 
 <file path=customXml/item3.xml><?xml version="1.0" encoding="utf-8"?>
@@ -26589,14 +30593,6 @@
 </file>
 
 <file path=customXml/itemProps1.xml><?xml version="1.0" encoding="utf-8"?>
-<ds:datastoreItem xmlns:ds="http://schemas.openxmlformats.org/officeDocument/2006/customXml" ds:itemID="{C49F161D-94DE-4FB8-B032-342C52D425B3}">
-  <ds:schemaRefs>
-    <ds:schemaRef ds:uri="http://schemas.microsoft.com/sharepoint/v3/contenttype/forms"/>
-  </ds:schemaRefs>
-</ds:datastoreItem>
-</file>
-
-<file path=customXml/itemProps2.xml><?xml version="1.0" encoding="utf-8"?>
 <ds:datastoreItem xmlns:ds="http://schemas.openxmlformats.org/officeDocument/2006/customXml" ds:itemID="{2CABA873-0994-4738-95F5-BEAE2390D7EB}">
   <ds:schemaRefs>
     <ds:schemaRef ds:uri="http://purl.org/dc/elements/1.1/"/>
@@ -26608,6 +30604,14 @@
     <ds:schemaRef ds:uri="http://schemas.openxmlformats.org/package/2006/metadata/core-properties"/>
     <ds:schemaRef ds:uri="http://schemas.microsoft.com/office/infopath/2007/PartnerControls"/>
     <ds:schemaRef ds:uri="http://purl.org/dc/terms/"/>
+  </ds:schemaRefs>
+</ds:datastoreItem>
+</file>
+
+<file path=customXml/itemProps2.xml><?xml version="1.0" encoding="utf-8"?>
+<ds:datastoreItem xmlns:ds="http://schemas.openxmlformats.org/officeDocument/2006/customXml" ds:itemID="{C49F161D-94DE-4FB8-B032-342C52D425B3}">
+  <ds:schemaRefs>
+    <ds:schemaRef ds:uri="http://schemas.microsoft.com/sharepoint/v3/contenttype/forms"/>
   </ds:schemaRefs>
 </ds:datastoreItem>
 </file>

--- a/Presentazione_07_09 (1).pptx
+++ b/Presentazione_07_09 (1).pptx
@@ -17,18 +17,18 @@
     <p:sldId id="338" r:id="rId11"/>
     <p:sldId id="339" r:id="rId12"/>
     <p:sldId id="340" r:id="rId13"/>
-    <p:sldId id="331" r:id="rId14"/>
-    <p:sldId id="333" r:id="rId15"/>
-    <p:sldId id="332" r:id="rId16"/>
-    <p:sldId id="345" r:id="rId17"/>
-    <p:sldId id="344" r:id="rId18"/>
-    <p:sldId id="334" r:id="rId19"/>
-    <p:sldId id="346" r:id="rId20"/>
-    <p:sldId id="335" r:id="rId21"/>
-    <p:sldId id="336" r:id="rId22"/>
-    <p:sldId id="342" r:id="rId23"/>
+    <p:sldId id="348" r:id="rId14"/>
+    <p:sldId id="331" r:id="rId15"/>
+    <p:sldId id="333" r:id="rId16"/>
+    <p:sldId id="346" r:id="rId17"/>
+    <p:sldId id="332" r:id="rId18"/>
+    <p:sldId id="345" r:id="rId19"/>
+    <p:sldId id="344" r:id="rId20"/>
+    <p:sldId id="334" r:id="rId21"/>
+    <p:sldId id="335" r:id="rId22"/>
+    <p:sldId id="343" r:id="rId23"/>
     <p:sldId id="347" r:id="rId24"/>
-    <p:sldId id="343" r:id="rId25"/>
+    <p:sldId id="336" r:id="rId25"/>
     <p:sldId id="341" r:id="rId26"/>
     <p:sldId id="337" r:id="rId27"/>
     <p:sldId id="298" r:id="rId28"/>
@@ -1267,7 +1267,7 @@
           <a:p>
             <a:fld id="{71531CDF-70D6-4AEF-91E2-1A078360BAF5}" type="datetimeFigureOut">
               <a:rPr lang="it-IT" smtClean="0"/>
-              <a:t>03/09/2026</a:t>
+              <a:t>04/09/2026</a:t>
             </a:fld>
             <a:endParaRPr lang="it-IT"/>
           </a:p>
@@ -4549,7 +4549,7 @@
           <a:p>
             <a:fld id="{0AAAF750-697A-42EE-BA8B-A382A30B9D4A}" type="datetimeFigureOut">
               <a:rPr lang="en-GB" smtClean="0"/>
-              <a:t>03/09/2026</a:t>
+              <a:t>04/09/2026</a:t>
             </a:fld>
             <a:endParaRPr lang="en-GB"/>
           </a:p>
@@ -4749,7 +4749,7 @@
           <a:p>
             <a:fld id="{0AAAF750-697A-42EE-BA8B-A382A30B9D4A}" type="datetimeFigureOut">
               <a:rPr lang="en-GB" smtClean="0"/>
-              <a:t>03/09/2026</a:t>
+              <a:t>04/09/2026</a:t>
             </a:fld>
             <a:endParaRPr lang="en-GB"/>
           </a:p>
@@ -5025,7 +5025,7 @@
           <a:p>
             <a:fld id="{0AAAF750-697A-42EE-BA8B-A382A30B9D4A}" type="datetimeFigureOut">
               <a:rPr lang="en-GB" smtClean="0"/>
-              <a:t>03/09/2026</a:t>
+              <a:t>04/09/2026</a:t>
             </a:fld>
             <a:endParaRPr lang="en-GB"/>
           </a:p>
@@ -5293,7 +5293,7 @@
           <a:p>
             <a:fld id="{0AAAF750-697A-42EE-BA8B-A382A30B9D4A}" type="datetimeFigureOut">
               <a:rPr lang="en-GB" smtClean="0"/>
-              <a:t>03/09/2026</a:t>
+              <a:t>04/09/2026</a:t>
             </a:fld>
             <a:endParaRPr lang="en-GB"/>
           </a:p>
@@ -5708,7 +5708,7 @@
           <a:p>
             <a:fld id="{0AAAF750-697A-42EE-BA8B-A382A30B9D4A}" type="datetimeFigureOut">
               <a:rPr lang="en-GB" smtClean="0"/>
-              <a:t>03/09/2026</a:t>
+              <a:t>04/09/2026</a:t>
             </a:fld>
             <a:endParaRPr lang="en-GB"/>
           </a:p>
@@ -5850,7 +5850,7 @@
           <a:p>
             <a:fld id="{0AAAF750-697A-42EE-BA8B-A382A30B9D4A}" type="datetimeFigureOut">
               <a:rPr lang="en-GB" smtClean="0"/>
-              <a:t>03/09/2026</a:t>
+              <a:t>04/09/2026</a:t>
             </a:fld>
             <a:endParaRPr lang="en-GB"/>
           </a:p>
@@ -5963,7 +5963,7 @@
           <a:p>
             <a:fld id="{0AAAF750-697A-42EE-BA8B-A382A30B9D4A}" type="datetimeFigureOut">
               <a:rPr lang="en-GB" smtClean="0"/>
-              <a:t>03/09/2026</a:t>
+              <a:t>04/09/2026</a:t>
             </a:fld>
             <a:endParaRPr lang="en-GB"/>
           </a:p>
@@ -6276,7 +6276,7 @@
           <a:p>
             <a:fld id="{0AAAF750-697A-42EE-BA8B-A382A30B9D4A}" type="datetimeFigureOut">
               <a:rPr lang="en-GB" smtClean="0"/>
-              <a:t>03/09/2026</a:t>
+              <a:t>04/09/2026</a:t>
             </a:fld>
             <a:endParaRPr lang="en-GB"/>
           </a:p>
@@ -6565,7 +6565,7 @@
           <a:p>
             <a:fld id="{0AAAF750-697A-42EE-BA8B-A382A30B9D4A}" type="datetimeFigureOut">
               <a:rPr lang="en-GB" smtClean="0"/>
-              <a:t>03/09/2026</a:t>
+              <a:t>04/09/2026</a:t>
             </a:fld>
             <a:endParaRPr lang="en-GB"/>
           </a:p>
@@ -6765,7 +6765,7 @@
           <a:p>
             <a:fld id="{0AAAF750-697A-42EE-BA8B-A382A30B9D4A}" type="datetimeFigureOut">
               <a:rPr lang="en-GB" smtClean="0"/>
-              <a:t>03/09/2026</a:t>
+              <a:t>04/09/2026</a:t>
             </a:fld>
             <a:endParaRPr lang="en-GB"/>
           </a:p>
@@ -7304,7 +7304,7 @@
           <a:p>
             <a:fld id="{0AAAF750-697A-42EE-BA8B-A382A30B9D4A}" type="datetimeFigureOut">
               <a:rPr lang="en-GB" smtClean="0"/>
-              <a:t>03/09/2026</a:t>
+              <a:t>04/09/2026</a:t>
             </a:fld>
             <a:endParaRPr lang="en-GB"/>
           </a:p>
@@ -9347,7 +9347,7 @@
           <a:p>
             <a:fld id="{0AAAF750-697A-42EE-BA8B-A382A30B9D4A}" type="datetimeFigureOut">
               <a:rPr lang="en-GB" smtClean="0"/>
-              <a:t>03/09/2026</a:t>
+              <a:t>04/09/2026</a:t>
             </a:fld>
             <a:endParaRPr lang="en-GB"/>
           </a:p>
@@ -10692,6 +10692,263 @@
           <p:cNvPr id="2" name="Titolo 1">
             <a:extLst>
               <a:ext uri="{FF2B5EF4-FFF2-40B4-BE49-F238E27FC236}">
+                <a16:creationId xmlns:a16="http://schemas.microsoft.com/office/drawing/2014/main" id="{450B4821-3306-2825-F659-BCD540293CBF}"/>
+              </a:ext>
+            </a:extLst>
+          </p:cNvPr>
+          <p:cNvSpPr>
+            <a:spLocks noGrp="1"/>
+          </p:cNvSpPr>
+          <p:nvPr>
+            <p:ph type="title"/>
+          </p:nvPr>
+        </p:nvSpPr>
+        <p:spPr/>
+        <p:txBody>
+          <a:bodyPr/>
+          <a:lstStyle/>
+          <a:p>
+            <a:r>
+              <a:rPr lang="en-GB" noProof="0" dirty="0"/>
+              <a:t>PSD SOP </a:t>
+            </a:r>
+            <a:r>
+              <a:rPr lang="en-GB" noProof="0" dirty="0" err="1"/>
+              <a:t>diversi</a:t>
+            </a:r>
+            <a:r>
+              <a:rPr lang="en-GB" noProof="0" dirty="0"/>
+              <a:t> </a:t>
+            </a:r>
+            <a:r>
+              <a:rPr lang="en-GB" noProof="0" dirty="0" err="1"/>
+              <a:t>valori</a:t>
+            </a:r>
+            <a:r>
+              <a:rPr lang="en-GB" noProof="0" dirty="0"/>
+              <a:t> di ATE</a:t>
+            </a:r>
+          </a:p>
+        </p:txBody>
+      </p:sp>
+      <p:sp>
+        <p:nvSpPr>
+          <p:cNvPr id="3" name="Segnaposto contenuto 2">
+            <a:extLst>
+              <a:ext uri="{FF2B5EF4-FFF2-40B4-BE49-F238E27FC236}">
+                <a16:creationId xmlns:a16="http://schemas.microsoft.com/office/drawing/2014/main" id="{8A523D95-9A85-051C-4B65-64C702150715}"/>
+              </a:ext>
+            </a:extLst>
+          </p:cNvPr>
+          <p:cNvSpPr>
+            <a:spLocks noGrp="1"/>
+          </p:cNvSpPr>
+          <p:nvPr>
+            <p:ph idx="1"/>
+          </p:nvPr>
+        </p:nvSpPr>
+        <p:spPr/>
+        <p:txBody>
+          <a:bodyPr/>
+          <a:lstStyle/>
+          <a:p>
+            <a:r>
+              <a:rPr lang="en-GB" noProof="0" dirty="0" err="1"/>
+              <a:t>Aspetto</a:t>
+            </a:r>
+            <a:r>
+              <a:rPr lang="en-GB" noProof="0" dirty="0"/>
+              <a:t> </a:t>
+            </a:r>
+            <a:r>
+              <a:rPr lang="en-GB" dirty="0"/>
+              <a:t>B</a:t>
+            </a:r>
+            <a:r>
+              <a:rPr lang="en-GB" noProof="0" dirty="0" err="1"/>
+              <a:t>en</a:t>
+            </a:r>
+            <a:r>
+              <a:rPr lang="en-GB" noProof="0" dirty="0"/>
+              <a:t> </a:t>
+            </a:r>
+            <a:r>
+              <a:rPr lang="en-GB" noProof="0" dirty="0">
+                <a:sym typeface="Wingdings" panose="05000000000000000000" pitchFamily="2" charset="2"/>
+              </a:rPr>
+              <a:t></a:t>
+            </a:r>
+          </a:p>
+          <a:p>
+            <a:endParaRPr lang="en-GB" dirty="0">
+              <a:sym typeface="Wingdings" panose="05000000000000000000" pitchFamily="2" charset="2"/>
+            </a:endParaRPr>
+          </a:p>
+          <a:p>
+            <a:r>
+              <a:rPr lang="en-GB" noProof="0" dirty="0" err="1">
+                <a:sym typeface="Wingdings" panose="05000000000000000000" pitchFamily="2" charset="2"/>
+              </a:rPr>
+              <a:t>Maledetto</a:t>
+            </a:r>
+            <a:r>
+              <a:rPr lang="en-GB" noProof="0" dirty="0">
+                <a:sym typeface="Wingdings" panose="05000000000000000000" pitchFamily="2" charset="2"/>
+              </a:rPr>
+              <a:t> Ben </a:t>
+            </a:r>
+            <a:r>
+              <a:rPr lang="en-GB" noProof="0" dirty="0" err="1">
+                <a:sym typeface="Wingdings" panose="05000000000000000000" pitchFamily="2" charset="2"/>
+              </a:rPr>
+              <a:t>che</a:t>
+            </a:r>
+            <a:r>
+              <a:rPr lang="en-GB" noProof="0" dirty="0">
+                <a:sym typeface="Wingdings" panose="05000000000000000000" pitchFamily="2" charset="2"/>
+              </a:rPr>
+              <a:t> mi </a:t>
+            </a:r>
+            <a:r>
+              <a:rPr lang="en-GB" noProof="0" dirty="0" err="1">
+                <a:sym typeface="Wingdings" panose="05000000000000000000" pitchFamily="2" charset="2"/>
+              </a:rPr>
+              <a:t>ghosta</a:t>
+            </a:r>
+            <a:r>
+              <a:rPr lang="en-GB" noProof="0" dirty="0">
+                <a:sym typeface="Wingdings" panose="05000000000000000000" pitchFamily="2" charset="2"/>
+              </a:rPr>
+              <a:t>  </a:t>
+            </a:r>
+            <a:endParaRPr lang="en-GB" noProof="0" dirty="0"/>
+          </a:p>
+        </p:txBody>
+      </p:sp>
+    </p:spTree>
+    <p:extLst>
+      <p:ext uri="{BB962C8B-B14F-4D97-AF65-F5344CB8AC3E}">
+        <p14:creationId xmlns:p14="http://schemas.microsoft.com/office/powerpoint/2010/main" val="3775798004"/>
+      </p:ext>
+    </p:extLst>
+  </p:cSld>
+  <p:clrMapOvr>
+    <a:masterClrMapping/>
+  </p:clrMapOvr>
+</p:sld>
+</file>
+
+<file path=ppt/slides/slide11.xml><?xml version="1.0" encoding="utf-8"?>
+<p:sld xmlns:a="http://schemas.openxmlformats.org/drawingml/2006/main" xmlns:r="http://schemas.openxmlformats.org/officeDocument/2006/relationships" xmlns:p="http://schemas.openxmlformats.org/presentationml/2006/main">
+  <p:cSld>
+    <p:spTree>
+      <p:nvGrpSpPr>
+        <p:cNvPr id="1" name="">
+          <a:extLst>
+            <a:ext uri="{FF2B5EF4-FFF2-40B4-BE49-F238E27FC236}">
+              <a16:creationId xmlns:a16="http://schemas.microsoft.com/office/drawing/2014/main" id="{F8FE4182-0EEF-E864-FC16-FAEC19745B17}"/>
+            </a:ext>
+          </a:extLst>
+        </p:cNvPr>
+        <p:cNvGrpSpPr/>
+        <p:nvPr/>
+      </p:nvGrpSpPr>
+      <p:grpSpPr>
+        <a:xfrm>
+          <a:off x="0" y="0"/>
+          <a:ext cx="0" cy="0"/>
+          <a:chOff x="0" y="0"/>
+          <a:chExt cx="0" cy="0"/>
+        </a:xfrm>
+      </p:grpSpPr>
+      <p:sp>
+        <p:nvSpPr>
+          <p:cNvPr id="2" name="Titolo 1">
+            <a:extLst>
+              <a:ext uri="{FF2B5EF4-FFF2-40B4-BE49-F238E27FC236}">
+                <a16:creationId xmlns:a16="http://schemas.microsoft.com/office/drawing/2014/main" id="{36C11B2A-6AB3-B7F3-ED5B-A5716EA2BE8D}"/>
+              </a:ext>
+            </a:extLst>
+          </p:cNvPr>
+          <p:cNvSpPr>
+            <a:spLocks noGrp="1"/>
+          </p:cNvSpPr>
+          <p:nvPr>
+            <p:ph type="title"/>
+          </p:nvPr>
+        </p:nvSpPr>
+        <p:spPr/>
+        <p:txBody>
+          <a:bodyPr/>
+          <a:lstStyle/>
+          <a:p>
+            <a:r>
+              <a:rPr lang="en-GB" noProof="0" dirty="0"/>
+              <a:t>Aliasing</a:t>
+            </a:r>
+          </a:p>
+        </p:txBody>
+      </p:sp>
+      <p:sp>
+        <p:nvSpPr>
+          <p:cNvPr id="3" name="Segnaposto contenuto 2">
+            <a:extLst>
+              <a:ext uri="{FF2B5EF4-FFF2-40B4-BE49-F238E27FC236}">
+                <a16:creationId xmlns:a16="http://schemas.microsoft.com/office/drawing/2014/main" id="{463C23D7-7EF9-4210-07E7-7D45B950BEB0}"/>
+              </a:ext>
+            </a:extLst>
+          </p:cNvPr>
+          <p:cNvSpPr>
+            <a:spLocks noGrp="1"/>
+          </p:cNvSpPr>
+          <p:nvPr>
+            <p:ph idx="1"/>
+          </p:nvPr>
+        </p:nvSpPr>
+        <p:spPr/>
+        <p:txBody>
+          <a:bodyPr/>
+          <a:lstStyle/>
+          <a:p>
+            <a:endParaRPr lang="en-GB" noProof="0" dirty="0"/>
+          </a:p>
+        </p:txBody>
+      </p:sp>
+    </p:spTree>
+    <p:extLst>
+      <p:ext uri="{BB962C8B-B14F-4D97-AF65-F5344CB8AC3E}">
+        <p14:creationId xmlns:p14="http://schemas.microsoft.com/office/powerpoint/2010/main" val="1252674806"/>
+      </p:ext>
+    </p:extLst>
+  </p:cSld>
+  <p:clrMapOvr>
+    <a:masterClrMapping/>
+  </p:clrMapOvr>
+</p:sld>
+</file>
+
+<file path=ppt/slides/slide12.xml><?xml version="1.0" encoding="utf-8"?>
+<p:sld xmlns:a="http://schemas.openxmlformats.org/drawingml/2006/main" xmlns:r="http://schemas.openxmlformats.org/officeDocument/2006/relationships" xmlns:p="http://schemas.openxmlformats.org/presentationml/2006/main">
+  <p:cSld>
+    <p:spTree>
+      <p:nvGrpSpPr>
+        <p:cNvPr id="1" name=""/>
+        <p:cNvGrpSpPr/>
+        <p:nvPr/>
+      </p:nvGrpSpPr>
+      <p:grpSpPr>
+        <a:xfrm>
+          <a:off x="0" y="0"/>
+          <a:ext cx="0" cy="0"/>
+          <a:chOff x="0" y="0"/>
+          <a:chExt cx="0" cy="0"/>
+        </a:xfrm>
+      </p:grpSpPr>
+      <p:sp>
+        <p:nvSpPr>
+          <p:cNvPr id="2" name="Titolo 1">
+            <a:extLst>
+              <a:ext uri="{FF2B5EF4-FFF2-40B4-BE49-F238E27FC236}">
                 <a16:creationId xmlns:a16="http://schemas.microsoft.com/office/drawing/2014/main" id="{BD9A8F3E-8C98-B128-B40B-053421F25415}"/>
               </a:ext>
             </a:extLst>
@@ -10796,7 +11053,7 @@
 </p:sld>
 </file>
 
-<file path=ppt/slides/slide11.xml><?xml version="1.0" encoding="utf-8"?>
+<file path=ppt/slides/slide13.xml><?xml version="1.0" encoding="utf-8"?>
 <p:sld xmlns:a="http://schemas.openxmlformats.org/drawingml/2006/main" xmlns:r="http://schemas.openxmlformats.org/officeDocument/2006/relationships" xmlns:p="http://schemas.openxmlformats.org/presentationml/2006/main">
   <p:cSld>
     <p:spTree>
@@ -10846,8 +11103,8 @@
           </a:p>
         </p:txBody>
       </p:sp>
-      <mc:AlternateContent xmlns:mc="http://schemas.openxmlformats.org/markup-compatibility/2006">
-        <mc:Choice xmlns:a14="http://schemas.microsoft.com/office/drawing/2010/main" Requires="a14">
+      <mc:AlternateContent xmlns:mc="http://schemas.openxmlformats.org/markup-compatibility/2006" xmlns:a14="http://schemas.microsoft.com/office/drawing/2010/main">
+        <mc:Choice Requires="a14">
           <p:sp>
             <p:nvSpPr>
               <p:cNvPr id="5" name="CasellaDiTesto 4">
@@ -10876,6 +11133,7 @@
               </a:bodyPr>
               <a:lstStyle/>
               <a:p>
+                <a:pPr/>
                 <a14:m>
                   <m:oMathPara xmlns:m="http://schemas.openxmlformats.org/officeDocument/2006/math">
                     <m:oMath>
@@ -11184,7 +11442,7 @@
                       <m:f>
                         <m:fPr>
                           <m:ctrlPr>
-                            <a:rPr lang="it-IT" i="1">
+                            <a:rPr lang="it-IT" b="0" i="1" smtClean="0">
                               <a:latin typeface="Cambria Math" panose="02040503050406030204" pitchFamily="18" charset="0"/>
                             </a:rPr>
                           </m:ctrlPr>
@@ -11314,7 +11572,7 @@
             </p:txBody>
           </p:sp>
         </mc:Choice>
-        <mc:Fallback>
+        <mc:Fallback xmlns="">
           <p:sp>
             <p:nvSpPr>
               <p:cNvPr id="5" name="CasellaDiTesto 4">
@@ -11359,8 +11617,8 @@
           </p:sp>
         </mc:Fallback>
       </mc:AlternateContent>
-      <mc:AlternateContent xmlns:mc="http://schemas.openxmlformats.org/markup-compatibility/2006">
-        <mc:Choice xmlns:a14="http://schemas.microsoft.com/office/drawing/2010/main" Requires="a14">
+      <mc:AlternateContent xmlns:mc="http://schemas.openxmlformats.org/markup-compatibility/2006" xmlns:a14="http://schemas.microsoft.com/office/drawing/2010/main">
+        <mc:Choice Requires="a14">
           <p:sp>
             <p:nvSpPr>
               <p:cNvPr id="7" name="CasellaDiTesto 6">
@@ -11389,7 +11647,6 @@
               </a:bodyPr>
               <a:lstStyle/>
               <a:p>
-                <a:pPr/>
                 <a14:m>
                   <m:oMath xmlns:m="http://schemas.openxmlformats.org/officeDocument/2006/math">
                     <m:sSubSup>
@@ -11434,7 +11691,7 @@
                     <m:f>
                       <m:fPr>
                         <m:ctrlPr>
-                          <a:rPr lang="it-IT" i="1" smtClean="0">
+                          <a:rPr lang="it-IT" i="1">
                             <a:latin typeface="Cambria Math" panose="02040503050406030204" pitchFamily="18" charset="0"/>
                           </a:rPr>
                         </m:ctrlPr>
@@ -11651,7 +11908,7 @@
                     <m:f>
                       <m:fPr>
                         <m:ctrlPr>
-                          <a:rPr lang="it-IT" i="1" smtClean="0">
+                          <a:rPr lang="it-IT" i="1">
                             <a:latin typeface="Cambria Math" panose="02040503050406030204" pitchFamily="18" charset="0"/>
                           </a:rPr>
                         </m:ctrlPr>
@@ -11793,7 +12050,7 @@
                     <m:f>
                       <m:fPr>
                         <m:ctrlPr>
-                          <a:rPr lang="it-IT" i="1">
+                          <a:rPr lang="it-IT" i="1" smtClean="0">
                             <a:latin typeface="Cambria Math" panose="02040503050406030204" pitchFamily="18" charset="0"/>
                           </a:rPr>
                         </m:ctrlPr>
@@ -11802,7 +12059,7 @@
                         <m:d>
                           <m:dPr>
                             <m:ctrlPr>
-                              <a:rPr lang="it-IT" i="1" smtClean="0">
+                              <a:rPr lang="it-IT" b="0" i="1" smtClean="0">
                                 <a:latin typeface="Cambria Math" panose="02040503050406030204" pitchFamily="18" charset="0"/>
                               </a:rPr>
                             </m:ctrlPr>
@@ -12106,7 +12363,7 @@
             </p:txBody>
           </p:sp>
         </mc:Choice>
-        <mc:Fallback>
+        <mc:Fallback xmlns="">
           <p:sp>
             <p:nvSpPr>
               <p:cNvPr id="7" name="CasellaDiTesto 6">
@@ -12151,8 +12408,8 @@
           </p:sp>
         </mc:Fallback>
       </mc:AlternateContent>
-      <mc:AlternateContent xmlns:mc="http://schemas.openxmlformats.org/markup-compatibility/2006">
-        <mc:Choice xmlns:a14="http://schemas.microsoft.com/office/drawing/2010/main" Requires="a14">
+      <mc:AlternateContent xmlns:mc="http://schemas.openxmlformats.org/markup-compatibility/2006" xmlns:a14="http://schemas.microsoft.com/office/drawing/2010/main">
+        <mc:Choice Requires="a14">
           <p:sp>
             <p:nvSpPr>
               <p:cNvPr id="9" name="CasellaDiTesto 8">
@@ -12181,7 +12438,6 @@
               </a:bodyPr>
               <a:lstStyle/>
               <a:p>
-                <a:pPr/>
                 <a14:m>
                   <m:oMath xmlns:m="http://schemas.openxmlformats.org/officeDocument/2006/math">
                     <m:sSub>
@@ -12401,7 +12657,7 @@
             </p:txBody>
           </p:sp>
         </mc:Choice>
-        <mc:Fallback>
+        <mc:Fallback xmlns="">
           <p:sp>
             <p:nvSpPr>
               <p:cNvPr id="9" name="CasellaDiTesto 8">
@@ -12446,8 +12702,8 @@
           </p:sp>
         </mc:Fallback>
       </mc:AlternateContent>
-      <mc:AlternateContent xmlns:mc="http://schemas.openxmlformats.org/markup-compatibility/2006">
-        <mc:Choice xmlns:a14="http://schemas.microsoft.com/office/drawing/2010/main" Requires="a14">
+      <mc:AlternateContent xmlns:mc="http://schemas.openxmlformats.org/markup-compatibility/2006" xmlns:a14="http://schemas.microsoft.com/office/drawing/2010/main">
+        <mc:Choice Requires="a14">
           <p:sp>
             <p:nvSpPr>
               <p:cNvPr id="11" name="CasellaDiTesto 10">
@@ -12572,7 +12828,7 @@
                           <m:sSup>
                             <m:sSupPr>
                               <m:ctrlPr>
-                                <a:rPr lang="it-IT" i="1" smtClean="0">
+                                <a:rPr lang="it-IT" i="1">
                                   <a:latin typeface="Cambria Math" panose="02040503050406030204" pitchFamily="18" charset="0"/>
                                 </a:rPr>
                               </m:ctrlPr>
@@ -12724,7 +12980,7 @@
             </p:txBody>
           </p:sp>
         </mc:Choice>
-        <mc:Fallback>
+        <mc:Fallback xmlns="">
           <p:sp>
             <p:nvSpPr>
               <p:cNvPr id="11" name="CasellaDiTesto 10">
@@ -12769,8 +13025,8 @@
           </p:sp>
         </mc:Fallback>
       </mc:AlternateContent>
-      <mc:AlternateContent xmlns:mc="http://schemas.openxmlformats.org/markup-compatibility/2006">
-        <mc:Choice xmlns:a14="http://schemas.microsoft.com/office/drawing/2010/main" Requires="a14">
+      <mc:AlternateContent xmlns:mc="http://schemas.openxmlformats.org/markup-compatibility/2006" xmlns:a14="http://schemas.microsoft.com/office/drawing/2010/main">
+        <mc:Choice Requires="a14">
           <p:sp>
             <p:nvSpPr>
               <p:cNvPr id="13" name="CasellaDiTesto 12">
@@ -13047,7 +13303,7 @@
             </p:txBody>
           </p:sp>
         </mc:Choice>
-        <mc:Fallback>
+        <mc:Fallback xmlns="">
           <p:sp>
             <p:nvSpPr>
               <p:cNvPr id="13" name="CasellaDiTesto 12">
@@ -13112,8 +13368,8 @@
             <a:chExt cx="2558649" cy="852926"/>
           </a:xfrm>
         </p:grpSpPr>
-        <mc:AlternateContent xmlns:mc="http://schemas.openxmlformats.org/markup-compatibility/2006">
-          <mc:Choice xmlns:a14="http://schemas.microsoft.com/office/drawing/2010/main" Requires="a14">
+        <mc:AlternateContent xmlns:mc="http://schemas.openxmlformats.org/markup-compatibility/2006" xmlns:a14="http://schemas.microsoft.com/office/drawing/2010/main">
+          <mc:Choice Requires="a14">
             <p:sp>
               <p:nvSpPr>
                 <p:cNvPr id="4" name="CasellaDiTesto 3">
@@ -13453,7 +13709,7 @@
               </p:txBody>
             </p:sp>
           </mc:Choice>
-          <mc:Fallback>
+          <mc:Fallback xmlns="">
             <p:sp>
               <p:nvSpPr>
                 <p:cNvPr id="4" name="CasellaDiTesto 3">
@@ -13498,8 +13754,8 @@
             </p:sp>
           </mc:Fallback>
         </mc:AlternateContent>
-        <mc:AlternateContent xmlns:mc="http://schemas.openxmlformats.org/markup-compatibility/2006">
-          <mc:Choice xmlns:a14="http://schemas.microsoft.com/office/drawing/2010/main" Requires="a14">
+        <mc:AlternateContent xmlns:mc="http://schemas.openxmlformats.org/markup-compatibility/2006" xmlns:a14="http://schemas.microsoft.com/office/drawing/2010/main">
+          <mc:Choice Requires="a14">
             <p:sp>
               <p:nvSpPr>
                 <p:cNvPr id="19" name="CasellaDiTesto 18">
@@ -13528,6 +13784,7 @@
                 </a:bodyPr>
                 <a:lstStyle/>
                 <a:p>
+                  <a:pPr/>
                   <a14:m>
                     <m:oMathPara xmlns:m="http://schemas.openxmlformats.org/officeDocument/2006/math">
                       <m:oMath>
@@ -13546,7 +13803,7 @@
               </p:txBody>
             </p:sp>
           </mc:Choice>
-          <mc:Fallback>
+          <mc:Fallback xmlns="">
             <p:sp>
               <p:nvSpPr>
                 <p:cNvPr id="19" name="CasellaDiTesto 18">
@@ -13591,8 +13848,8 @@
             </p:sp>
           </mc:Fallback>
         </mc:AlternateContent>
-        <mc:AlternateContent xmlns:mc="http://schemas.openxmlformats.org/markup-compatibility/2006">
-          <mc:Choice xmlns:a14="http://schemas.microsoft.com/office/drawing/2010/main" Requires="a14">
+        <mc:AlternateContent xmlns:mc="http://schemas.openxmlformats.org/markup-compatibility/2006" xmlns:a14="http://schemas.microsoft.com/office/drawing/2010/main">
+          <mc:Choice Requires="a14">
             <p:sp>
               <p:nvSpPr>
                 <p:cNvPr id="21" name="CasellaDiTesto 20">
@@ -13640,7 +13897,7 @@
               </p:txBody>
             </p:sp>
           </mc:Choice>
-          <mc:Fallback>
+          <mc:Fallback xmlns="">
             <p:sp>
               <p:nvSpPr>
                 <p:cNvPr id="21" name="CasellaDiTesto 20">
@@ -13686,8 +13943,8 @@
           </mc:Fallback>
         </mc:AlternateContent>
       </p:grpSp>
-      <mc:AlternateContent xmlns:mc="http://schemas.openxmlformats.org/markup-compatibility/2006">
-        <mc:Choice xmlns:a14="http://schemas.microsoft.com/office/drawing/2010/main" Requires="a14">
+      <mc:AlternateContent xmlns:mc="http://schemas.openxmlformats.org/markup-compatibility/2006" xmlns:a14="http://schemas.microsoft.com/office/drawing/2010/main">
+        <mc:Choice Requires="a14">
           <p:sp>
             <p:nvSpPr>
               <p:cNvPr id="25" name="CasellaDiTesto 24">
@@ -13735,7 +13992,7 @@
             </p:txBody>
           </p:sp>
         </mc:Choice>
-        <mc:Fallback>
+        <mc:Fallback xmlns="">
           <p:sp>
             <p:nvSpPr>
               <p:cNvPr id="25" name="CasellaDiTesto 24">
@@ -13780,8 +14037,8 @@
           </p:sp>
         </mc:Fallback>
       </mc:AlternateContent>
-      <mc:AlternateContent xmlns:mc="http://schemas.openxmlformats.org/markup-compatibility/2006">
-        <mc:Choice xmlns:a14="http://schemas.microsoft.com/office/drawing/2010/main" Requires="a14">
+      <mc:AlternateContent xmlns:mc="http://schemas.openxmlformats.org/markup-compatibility/2006" xmlns:a14="http://schemas.microsoft.com/office/drawing/2010/main">
+        <mc:Choice Requires="a14">
           <p:sp>
             <p:nvSpPr>
               <p:cNvPr id="27" name="CasellaDiTesto 26">
@@ -13829,7 +14086,7 @@
             </p:txBody>
           </p:sp>
         </mc:Choice>
-        <mc:Fallback>
+        <mc:Fallback xmlns="">
           <p:sp>
             <p:nvSpPr>
               <p:cNvPr id="27" name="CasellaDiTesto 26">
@@ -13874,8 +14131,8 @@
           </p:sp>
         </mc:Fallback>
       </mc:AlternateContent>
-      <mc:AlternateContent xmlns:mc="http://schemas.openxmlformats.org/markup-compatibility/2006">
-        <mc:Choice xmlns:a14="http://schemas.microsoft.com/office/drawing/2010/main" Requires="a14">
+      <mc:AlternateContent xmlns:mc="http://schemas.openxmlformats.org/markup-compatibility/2006" xmlns:a14="http://schemas.microsoft.com/office/drawing/2010/main">
+        <mc:Choice Requires="a14">
           <p:sp>
             <p:nvSpPr>
               <p:cNvPr id="29" name="CasellaDiTesto 28">
@@ -13923,7 +14180,7 @@
             </p:txBody>
           </p:sp>
         </mc:Choice>
-        <mc:Fallback>
+        <mc:Fallback xmlns="">
           <p:sp>
             <p:nvSpPr>
               <p:cNvPr id="29" name="CasellaDiTesto 28">
@@ -13981,7 +14238,7 @@
 </p:sld>
 </file>
 
-<file path=ppt/slides/slide12.xml><?xml version="1.0" encoding="utf-8"?>
+<file path=ppt/slides/slide14.xml><?xml version="1.0" encoding="utf-8"?>
 <p:sld xmlns:a="http://schemas.openxmlformats.org/drawingml/2006/main" xmlns:r="http://schemas.openxmlformats.org/officeDocument/2006/relationships" xmlns:p="http://schemas.openxmlformats.org/presentationml/2006/main">
   <p:cSld>
     <p:spTree>
@@ -14113,7 +14370,7 @@
 </p:sld>
 </file>
 
-<file path=ppt/slides/slide13.xml><?xml version="1.0" encoding="utf-8"?>
+<file path=ppt/slides/slide15.xml><?xml version="1.0" encoding="utf-8"?>
 <p:sld xmlns:a="http://schemas.openxmlformats.org/drawingml/2006/main" xmlns:r="http://schemas.openxmlformats.org/officeDocument/2006/relationships" xmlns:p="http://schemas.openxmlformats.org/presentationml/2006/main">
   <p:cSld>
     <p:spTree>
@@ -14202,96 +14459,7 @@
 </p:sld>
 </file>
 
-<file path=ppt/slides/slide14.xml><?xml version="1.0" encoding="utf-8"?>
-<p:sld xmlns:a="http://schemas.openxmlformats.org/drawingml/2006/main" xmlns:r="http://schemas.openxmlformats.org/officeDocument/2006/relationships" xmlns:p="http://schemas.openxmlformats.org/presentationml/2006/main">
-  <p:cSld>
-    <p:spTree>
-      <p:nvGrpSpPr>
-        <p:cNvPr id="1" name="">
-          <a:extLst>
-            <a:ext uri="{FF2B5EF4-FFF2-40B4-BE49-F238E27FC236}">
-              <a16:creationId xmlns:a16="http://schemas.microsoft.com/office/drawing/2014/main" id="{F8FE4182-0EEF-E864-FC16-FAEC19745B17}"/>
-            </a:ext>
-          </a:extLst>
-        </p:cNvPr>
-        <p:cNvGrpSpPr/>
-        <p:nvPr/>
-      </p:nvGrpSpPr>
-      <p:grpSpPr>
-        <a:xfrm>
-          <a:off x="0" y="0"/>
-          <a:ext cx="0" cy="0"/>
-          <a:chOff x="0" y="0"/>
-          <a:chExt cx="0" cy="0"/>
-        </a:xfrm>
-      </p:grpSpPr>
-      <p:sp>
-        <p:nvSpPr>
-          <p:cNvPr id="2" name="Titolo 1">
-            <a:extLst>
-              <a:ext uri="{FF2B5EF4-FFF2-40B4-BE49-F238E27FC236}">
-                <a16:creationId xmlns:a16="http://schemas.microsoft.com/office/drawing/2014/main" id="{36C11B2A-6AB3-B7F3-ED5B-A5716EA2BE8D}"/>
-              </a:ext>
-            </a:extLst>
-          </p:cNvPr>
-          <p:cNvSpPr>
-            <a:spLocks noGrp="1"/>
-          </p:cNvSpPr>
-          <p:nvPr>
-            <p:ph type="title"/>
-          </p:nvPr>
-        </p:nvSpPr>
-        <p:spPr/>
-        <p:txBody>
-          <a:bodyPr/>
-          <a:lstStyle/>
-          <a:p>
-            <a:r>
-              <a:rPr lang="en-GB" noProof="0" dirty="0"/>
-              <a:t>Aliasing</a:t>
-            </a:r>
-          </a:p>
-        </p:txBody>
-      </p:sp>
-      <p:sp>
-        <p:nvSpPr>
-          <p:cNvPr id="3" name="Segnaposto contenuto 2">
-            <a:extLst>
-              <a:ext uri="{FF2B5EF4-FFF2-40B4-BE49-F238E27FC236}">
-                <a16:creationId xmlns:a16="http://schemas.microsoft.com/office/drawing/2014/main" id="{463C23D7-7EF9-4210-07E7-7D45B950BEB0}"/>
-              </a:ext>
-            </a:extLst>
-          </p:cNvPr>
-          <p:cNvSpPr>
-            <a:spLocks noGrp="1"/>
-          </p:cNvSpPr>
-          <p:nvPr>
-            <p:ph idx="1"/>
-          </p:nvPr>
-        </p:nvSpPr>
-        <p:spPr/>
-        <p:txBody>
-          <a:bodyPr/>
-          <a:lstStyle/>
-          <a:p>
-            <a:endParaRPr lang="en-GB" noProof="0" dirty="0"/>
-          </a:p>
-        </p:txBody>
-      </p:sp>
-    </p:spTree>
-    <p:extLst>
-      <p:ext uri="{BB962C8B-B14F-4D97-AF65-F5344CB8AC3E}">
-        <p14:creationId xmlns:p14="http://schemas.microsoft.com/office/powerpoint/2010/main" val="1252674806"/>
-      </p:ext>
-    </p:extLst>
-  </p:cSld>
-  <p:clrMapOvr>
-    <a:masterClrMapping/>
-  </p:clrMapOvr>
-</p:sld>
-</file>
-
-<file path=ppt/slides/slide15.xml><?xml version="1.0" encoding="utf-8"?>
+<file path=ppt/slides/slide16.xml><?xml version="1.0" encoding="utf-8"?>
 <p:sld xmlns:a="http://schemas.openxmlformats.org/drawingml/2006/main" xmlns:r="http://schemas.openxmlformats.org/officeDocument/2006/relationships" xmlns:p="http://schemas.openxmlformats.org/presentationml/2006/main">
   <p:cSld>
     <p:spTree>
@@ -14337,7 +14505,10 @@
               <a:rPr lang="en-GB" noProof="0" dirty="0" err="1"/>
               <a:t>urbana</a:t>
             </a:r>
-            <a:endParaRPr lang="en-GB" noProof="0" dirty="0"/>
+            <a:r>
+              <a:rPr lang="en-GB" noProof="0" dirty="0"/>
+              <a:t> 24 h</a:t>
+            </a:r>
           </a:p>
         </p:txBody>
       </p:sp>
@@ -14354,338 +14525,7 @@
 </p:sld>
 </file>
 
-<file path=ppt/slides/slide16.xml><?xml version="1.0" encoding="utf-8"?>
-<p:sld xmlns:a="http://schemas.openxmlformats.org/drawingml/2006/main" xmlns:r="http://schemas.openxmlformats.org/officeDocument/2006/relationships" xmlns:p="http://schemas.openxmlformats.org/presentationml/2006/main">
-  <p:cSld>
-    <p:spTree>
-      <p:nvGrpSpPr>
-        <p:cNvPr id="1" name=""/>
-        <p:cNvGrpSpPr/>
-        <p:nvPr/>
-      </p:nvGrpSpPr>
-      <p:grpSpPr>
-        <a:xfrm>
-          <a:off x="0" y="0"/>
-          <a:ext cx="0" cy="0"/>
-          <a:chOff x="0" y="0"/>
-          <a:chExt cx="0" cy="0"/>
-        </a:xfrm>
-      </p:grpSpPr>
-      <p:sp>
-        <p:nvSpPr>
-          <p:cNvPr id="2" name="Titolo 1">
-            <a:extLst>
-              <a:ext uri="{FF2B5EF4-FFF2-40B4-BE49-F238E27FC236}">
-                <a16:creationId xmlns:a16="http://schemas.microsoft.com/office/drawing/2014/main" id="{2937A81E-F205-E586-B44C-211579A5C77D}"/>
-              </a:ext>
-            </a:extLst>
-          </p:cNvPr>
-          <p:cNvSpPr>
-            <a:spLocks noGrp="1"/>
-          </p:cNvSpPr>
-          <p:nvPr>
-            <p:ph type="title"/>
-          </p:nvPr>
-        </p:nvSpPr>
-        <p:spPr/>
-        <p:txBody>
-          <a:bodyPr/>
-          <a:lstStyle/>
-          <a:p>
-            <a:r>
-              <a:rPr lang="en-GB" noProof="0" dirty="0"/>
-              <a:t>Sensing </a:t>
-            </a:r>
-            <a:r>
-              <a:rPr lang="en-GB" noProof="0" dirty="0" err="1"/>
-              <a:t>Edificio</a:t>
-            </a:r>
-            <a:endParaRPr lang="en-GB" noProof="0" dirty="0"/>
-          </a:p>
-        </p:txBody>
-      </p:sp>
-      <p:pic>
-        <p:nvPicPr>
-          <p:cNvPr id="5" name="Immagine 4">
-            <a:extLst>
-              <a:ext uri="{FF2B5EF4-FFF2-40B4-BE49-F238E27FC236}">
-                <a16:creationId xmlns:a16="http://schemas.microsoft.com/office/drawing/2014/main" id="{AE0B6007-0ED1-6A0D-3DDE-33004FE25C60}"/>
-              </a:ext>
-            </a:extLst>
-          </p:cNvPr>
-          <p:cNvPicPr>
-            <a:picLocks noChangeAspect="1"/>
-          </p:cNvPicPr>
-          <p:nvPr/>
-        </p:nvPicPr>
-        <p:blipFill>
-          <a:blip r:embed="rId2">
-            <a:clrChange>
-              <a:clrFrom>
-                <a:srgbClr val="FFFFFF"/>
-              </a:clrFrom>
-              <a:clrTo>
-                <a:srgbClr val="FFFFFF">
-                  <a:alpha val="0"/>
-                </a:srgbClr>
-              </a:clrTo>
-            </a:clrChange>
-            <a:extLst>
-              <a:ext uri="{28A0092B-C50C-407E-A947-70E740481C1C}">
-                <a14:useLocalDpi xmlns:a14="http://schemas.microsoft.com/office/drawing/2010/main" val="0"/>
-              </a:ext>
-            </a:extLst>
-          </a:blip>
-          <a:srcRect l="2355" t="4125" b="1"/>
-          <a:stretch>
-            <a:fillRect/>
-          </a:stretch>
-        </p:blipFill>
-        <p:spPr>
-          <a:xfrm>
-            <a:off x="514952" y="720000"/>
-            <a:ext cx="11324923" cy="5553947"/>
-          </a:xfrm>
-          <a:prstGeom prst="rect">
-            <a:avLst/>
-          </a:prstGeom>
-        </p:spPr>
-      </p:pic>
-    </p:spTree>
-    <p:extLst>
-      <p:ext uri="{BB962C8B-B14F-4D97-AF65-F5344CB8AC3E}">
-        <p14:creationId xmlns:p14="http://schemas.microsoft.com/office/powerpoint/2010/main" val="2635465820"/>
-      </p:ext>
-    </p:extLst>
-  </p:cSld>
-  <p:clrMapOvr>
-    <a:masterClrMapping/>
-  </p:clrMapOvr>
-</p:sld>
-</file>
-
 <file path=ppt/slides/slide17.xml><?xml version="1.0" encoding="utf-8"?>
-<p:sld xmlns:a="http://schemas.openxmlformats.org/drawingml/2006/main" xmlns:r="http://schemas.openxmlformats.org/officeDocument/2006/relationships" xmlns:p="http://schemas.openxmlformats.org/presentationml/2006/main">
-  <p:cSld>
-    <p:spTree>
-      <p:nvGrpSpPr>
-        <p:cNvPr id="1" name="">
-          <a:extLst>
-            <a:ext uri="{FF2B5EF4-FFF2-40B4-BE49-F238E27FC236}">
-              <a16:creationId xmlns:a16="http://schemas.microsoft.com/office/drawing/2014/main" id="{9C1608F2-7B4D-52AA-CAFD-3AC1F27B6D49}"/>
-            </a:ext>
-          </a:extLst>
-        </p:cNvPr>
-        <p:cNvGrpSpPr/>
-        <p:nvPr/>
-      </p:nvGrpSpPr>
-      <p:grpSpPr>
-        <a:xfrm>
-          <a:off x="0" y="0"/>
-          <a:ext cx="0" cy="0"/>
-          <a:chOff x="0" y="0"/>
-          <a:chExt cx="0" cy="0"/>
-        </a:xfrm>
-      </p:grpSpPr>
-      <p:sp>
-        <p:nvSpPr>
-          <p:cNvPr id="2" name="Titolo 1">
-            <a:extLst>
-              <a:ext uri="{FF2B5EF4-FFF2-40B4-BE49-F238E27FC236}">
-                <a16:creationId xmlns:a16="http://schemas.microsoft.com/office/drawing/2014/main" id="{95C423A1-9135-08FD-2E62-F513EEB7BCBF}"/>
-              </a:ext>
-            </a:extLst>
-          </p:cNvPr>
-          <p:cNvSpPr>
-            <a:spLocks noGrp="1"/>
-          </p:cNvSpPr>
-          <p:nvPr>
-            <p:ph type="title"/>
-          </p:nvPr>
-        </p:nvSpPr>
-        <p:spPr/>
-        <p:txBody>
-          <a:bodyPr/>
-          <a:lstStyle/>
-          <a:p>
-            <a:r>
-              <a:rPr lang="en-GB" noProof="0" dirty="0"/>
-              <a:t>Sensing </a:t>
-            </a:r>
-            <a:r>
-              <a:rPr lang="en-GB" noProof="0" dirty="0" err="1"/>
-              <a:t>Edificio</a:t>
-            </a:r>
-            <a:endParaRPr lang="en-GB" noProof="0" dirty="0"/>
-          </a:p>
-        </p:txBody>
-      </p:sp>
-      <p:pic>
-        <p:nvPicPr>
-          <p:cNvPr id="4" name="Immagine 3">
-            <a:extLst>
-              <a:ext uri="{FF2B5EF4-FFF2-40B4-BE49-F238E27FC236}">
-                <a16:creationId xmlns:a16="http://schemas.microsoft.com/office/drawing/2014/main" id="{9D0022E5-3E02-2379-81AA-8278E682C85E}"/>
-              </a:ext>
-            </a:extLst>
-          </p:cNvPr>
-          <p:cNvPicPr>
-            <a:picLocks noChangeAspect="1"/>
-          </p:cNvPicPr>
-          <p:nvPr/>
-        </p:nvPicPr>
-        <p:blipFill>
-          <a:blip r:embed="rId2">
-            <a:clrChange>
-              <a:clrFrom>
-                <a:srgbClr val="FFFFFF"/>
-              </a:clrFrom>
-              <a:clrTo>
-                <a:srgbClr val="FFFFFF">
-                  <a:alpha val="0"/>
-                </a:srgbClr>
-              </a:clrTo>
-            </a:clrChange>
-            <a:extLst>
-              <a:ext uri="{28A0092B-C50C-407E-A947-70E740481C1C}">
-                <a14:useLocalDpi xmlns:a14="http://schemas.microsoft.com/office/drawing/2010/main" val="0"/>
-              </a:ext>
-            </a:extLst>
-          </a:blip>
-          <a:srcRect l="3047" t="4171"/>
-          <a:stretch>
-            <a:fillRect/>
-          </a:stretch>
-        </p:blipFill>
-        <p:spPr>
-          <a:xfrm>
-            <a:off x="420987" y="733930"/>
-            <a:ext cx="11350025" cy="5603369"/>
-          </a:xfrm>
-          <a:prstGeom prst="rect">
-            <a:avLst/>
-          </a:prstGeom>
-        </p:spPr>
-      </p:pic>
-    </p:spTree>
-    <p:extLst>
-      <p:ext uri="{BB962C8B-B14F-4D97-AF65-F5344CB8AC3E}">
-        <p14:creationId xmlns:p14="http://schemas.microsoft.com/office/powerpoint/2010/main" val="798856854"/>
-      </p:ext>
-    </p:extLst>
-  </p:cSld>
-  <p:clrMapOvr>
-    <a:masterClrMapping/>
-  </p:clrMapOvr>
-</p:sld>
-</file>
-
-<file path=ppt/slides/slide18.xml><?xml version="1.0" encoding="utf-8"?>
-<p:sld xmlns:a="http://schemas.openxmlformats.org/drawingml/2006/main" xmlns:r="http://schemas.openxmlformats.org/officeDocument/2006/relationships" xmlns:p="http://schemas.openxmlformats.org/presentationml/2006/main">
-  <p:cSld>
-    <p:spTree>
-      <p:nvGrpSpPr>
-        <p:cNvPr id="1" name="">
-          <a:extLst>
-            <a:ext uri="{FF2B5EF4-FFF2-40B4-BE49-F238E27FC236}">
-              <a16:creationId xmlns:a16="http://schemas.microsoft.com/office/drawing/2014/main" id="{14258EB7-F680-37DF-6C2B-32CC660F1DF2}"/>
-            </a:ext>
-          </a:extLst>
-        </p:cNvPr>
-        <p:cNvGrpSpPr/>
-        <p:nvPr/>
-      </p:nvGrpSpPr>
-      <p:grpSpPr>
-        <a:xfrm>
-          <a:off x="0" y="0"/>
-          <a:ext cx="0" cy="0"/>
-          <a:chOff x="0" y="0"/>
-          <a:chExt cx="0" cy="0"/>
-        </a:xfrm>
-      </p:grpSpPr>
-      <p:sp>
-        <p:nvSpPr>
-          <p:cNvPr id="2" name="Titolo 1">
-            <a:extLst>
-              <a:ext uri="{FF2B5EF4-FFF2-40B4-BE49-F238E27FC236}">
-                <a16:creationId xmlns:a16="http://schemas.microsoft.com/office/drawing/2014/main" id="{951D32A5-F7C9-B69B-5CA8-FC1B1F774E3C}"/>
-              </a:ext>
-            </a:extLst>
-          </p:cNvPr>
-          <p:cNvSpPr>
-            <a:spLocks noGrp="1"/>
-          </p:cNvSpPr>
-          <p:nvPr>
-            <p:ph type="title"/>
-          </p:nvPr>
-        </p:nvSpPr>
-        <p:spPr/>
-        <p:txBody>
-          <a:bodyPr/>
-          <a:lstStyle/>
-          <a:p>
-            <a:r>
-              <a:rPr lang="en-GB" noProof="0" dirty="0"/>
-              <a:t>Sensing </a:t>
-            </a:r>
-            <a:r>
-              <a:rPr lang="en-GB" noProof="0" dirty="0" err="1"/>
-              <a:t>Edificio</a:t>
-            </a:r>
-            <a:endParaRPr lang="en-GB" noProof="0" dirty="0"/>
-          </a:p>
-        </p:txBody>
-      </p:sp>
-      <p:pic>
-        <p:nvPicPr>
-          <p:cNvPr id="5" name="Immagine 4">
-            <a:extLst>
-              <a:ext uri="{FF2B5EF4-FFF2-40B4-BE49-F238E27FC236}">
-                <a16:creationId xmlns:a16="http://schemas.microsoft.com/office/drawing/2014/main" id="{78525BEE-AB56-A307-677F-D3850A0D4FCB}"/>
-              </a:ext>
-            </a:extLst>
-          </p:cNvPr>
-          <p:cNvPicPr>
-            <a:picLocks noChangeAspect="1"/>
-          </p:cNvPicPr>
-          <p:nvPr/>
-        </p:nvPicPr>
-        <p:blipFill>
-          <a:blip r:embed="rId2">
-            <a:extLst>
-              <a:ext uri="{28A0092B-C50C-407E-A947-70E740481C1C}">
-                <a14:useLocalDpi xmlns:a14="http://schemas.microsoft.com/office/drawing/2010/main" val="0"/>
-              </a:ext>
-            </a:extLst>
-          </a:blip>
-          <a:stretch>
-            <a:fillRect/>
-          </a:stretch>
-        </p:blipFill>
-        <p:spPr>
-          <a:xfrm>
-            <a:off x="260650" y="684101"/>
-            <a:ext cx="10991044" cy="5489798"/>
-          </a:xfrm>
-          <a:prstGeom prst="rect">
-            <a:avLst/>
-          </a:prstGeom>
-        </p:spPr>
-      </p:pic>
-    </p:spTree>
-    <p:extLst>
-      <p:ext uri="{BB962C8B-B14F-4D97-AF65-F5344CB8AC3E}">
-        <p14:creationId xmlns:p14="http://schemas.microsoft.com/office/powerpoint/2010/main" val="3435514505"/>
-      </p:ext>
-    </p:extLst>
-  </p:cSld>
-  <p:clrMapOvr>
-    <a:masterClrMapping/>
-  </p:clrMapOvr>
-</p:sld>
-</file>
-
-<file path=ppt/slides/slide19.xml><?xml version="1.0" encoding="utf-8"?>
 <p:sld xmlns:a="http://schemas.openxmlformats.org/drawingml/2006/main" xmlns:r="http://schemas.openxmlformats.org/officeDocument/2006/relationships" xmlns:p="http://schemas.openxmlformats.org/presentationml/2006/main">
   <p:cSld>
     <p:spTree>
@@ -14792,6 +14632,232 @@
     <p:extLst>
       <p:ext uri="{BB962C8B-B14F-4D97-AF65-F5344CB8AC3E}">
         <p14:creationId xmlns:p14="http://schemas.microsoft.com/office/powerpoint/2010/main" val="469411484"/>
+      </p:ext>
+    </p:extLst>
+  </p:cSld>
+  <p:clrMapOvr>
+    <a:masterClrMapping/>
+  </p:clrMapOvr>
+</p:sld>
+</file>
+
+<file path=ppt/slides/slide18.xml><?xml version="1.0" encoding="utf-8"?>
+<p:sld xmlns:a="http://schemas.openxmlformats.org/drawingml/2006/main" xmlns:r="http://schemas.openxmlformats.org/officeDocument/2006/relationships" xmlns:p="http://schemas.openxmlformats.org/presentationml/2006/main">
+  <p:cSld>
+    <p:spTree>
+      <p:nvGrpSpPr>
+        <p:cNvPr id="1" name="">
+          <a:extLst>
+            <a:ext uri="{FF2B5EF4-FFF2-40B4-BE49-F238E27FC236}">
+              <a16:creationId xmlns:a16="http://schemas.microsoft.com/office/drawing/2014/main" id="{14258EB7-F680-37DF-6C2B-32CC660F1DF2}"/>
+            </a:ext>
+          </a:extLst>
+        </p:cNvPr>
+        <p:cNvGrpSpPr/>
+        <p:nvPr/>
+      </p:nvGrpSpPr>
+      <p:grpSpPr>
+        <a:xfrm>
+          <a:off x="0" y="0"/>
+          <a:ext cx="0" cy="0"/>
+          <a:chOff x="0" y="0"/>
+          <a:chExt cx="0" cy="0"/>
+        </a:xfrm>
+      </p:grpSpPr>
+      <p:sp>
+        <p:nvSpPr>
+          <p:cNvPr id="2" name="Titolo 1">
+            <a:extLst>
+              <a:ext uri="{FF2B5EF4-FFF2-40B4-BE49-F238E27FC236}">
+                <a16:creationId xmlns:a16="http://schemas.microsoft.com/office/drawing/2014/main" id="{951D32A5-F7C9-B69B-5CA8-FC1B1F774E3C}"/>
+              </a:ext>
+            </a:extLst>
+          </p:cNvPr>
+          <p:cNvSpPr>
+            <a:spLocks noGrp="1"/>
+          </p:cNvSpPr>
+          <p:nvPr>
+            <p:ph type="title"/>
+          </p:nvPr>
+        </p:nvSpPr>
+        <p:spPr/>
+        <p:txBody>
+          <a:bodyPr/>
+          <a:lstStyle/>
+          <a:p>
+            <a:r>
+              <a:rPr lang="en-GB" noProof="0" dirty="0"/>
+              <a:t>Sensing </a:t>
+            </a:r>
+            <a:r>
+              <a:rPr lang="en-GB" noProof="0" dirty="0" err="1"/>
+              <a:t>Edificio</a:t>
+            </a:r>
+            <a:endParaRPr lang="en-GB" noProof="0" dirty="0"/>
+          </a:p>
+        </p:txBody>
+      </p:sp>
+      <p:pic>
+        <p:nvPicPr>
+          <p:cNvPr id="4" name="Immagine 3">
+            <a:extLst>
+              <a:ext uri="{FF2B5EF4-FFF2-40B4-BE49-F238E27FC236}">
+                <a16:creationId xmlns:a16="http://schemas.microsoft.com/office/drawing/2014/main" id="{4EFB8C75-0990-BDD1-68E9-F69D22F02BA0}"/>
+              </a:ext>
+            </a:extLst>
+          </p:cNvPr>
+          <p:cNvPicPr>
+            <a:picLocks noChangeAspect="1"/>
+          </p:cNvPicPr>
+          <p:nvPr/>
+        </p:nvPicPr>
+        <p:blipFill>
+          <a:blip r:embed="rId2">
+            <a:clrChange>
+              <a:clrFrom>
+                <a:srgbClr val="FFFFFF"/>
+              </a:clrFrom>
+              <a:clrTo>
+                <a:srgbClr val="FFFFFF">
+                  <a:alpha val="0"/>
+                </a:srgbClr>
+              </a:clrTo>
+            </a:clrChange>
+            <a:extLst>
+              <a:ext uri="{28A0092B-C50C-407E-A947-70E740481C1C}">
+                <a14:useLocalDpi xmlns:a14="http://schemas.microsoft.com/office/drawing/2010/main" val="0"/>
+              </a:ext>
+            </a:extLst>
+          </a:blip>
+          <a:srcRect t="4015"/>
+          <a:stretch>
+            <a:fillRect/>
+          </a:stretch>
+        </p:blipFill>
+        <p:spPr>
+          <a:xfrm>
+            <a:off x="314325" y="720000"/>
+            <a:ext cx="11563350" cy="5543783"/>
+          </a:xfrm>
+          <a:prstGeom prst="rect">
+            <a:avLst/>
+          </a:prstGeom>
+        </p:spPr>
+      </p:pic>
+    </p:spTree>
+    <p:extLst>
+      <p:ext uri="{BB962C8B-B14F-4D97-AF65-F5344CB8AC3E}">
+        <p14:creationId xmlns:p14="http://schemas.microsoft.com/office/powerpoint/2010/main" val="3435514505"/>
+      </p:ext>
+    </p:extLst>
+  </p:cSld>
+  <p:clrMapOvr>
+    <a:masterClrMapping/>
+  </p:clrMapOvr>
+</p:sld>
+</file>
+
+<file path=ppt/slides/slide19.xml><?xml version="1.0" encoding="utf-8"?>
+<p:sld xmlns:a="http://schemas.openxmlformats.org/drawingml/2006/main" xmlns:r="http://schemas.openxmlformats.org/officeDocument/2006/relationships" xmlns:p="http://schemas.openxmlformats.org/presentationml/2006/main">
+  <p:cSld>
+    <p:spTree>
+      <p:nvGrpSpPr>
+        <p:cNvPr id="1" name=""/>
+        <p:cNvGrpSpPr/>
+        <p:nvPr/>
+      </p:nvGrpSpPr>
+      <p:grpSpPr>
+        <a:xfrm>
+          <a:off x="0" y="0"/>
+          <a:ext cx="0" cy="0"/>
+          <a:chOff x="0" y="0"/>
+          <a:chExt cx="0" cy="0"/>
+        </a:xfrm>
+      </p:grpSpPr>
+      <p:sp>
+        <p:nvSpPr>
+          <p:cNvPr id="2" name="Titolo 1">
+            <a:extLst>
+              <a:ext uri="{FF2B5EF4-FFF2-40B4-BE49-F238E27FC236}">
+                <a16:creationId xmlns:a16="http://schemas.microsoft.com/office/drawing/2014/main" id="{2937A81E-F205-E586-B44C-211579A5C77D}"/>
+              </a:ext>
+            </a:extLst>
+          </p:cNvPr>
+          <p:cNvSpPr>
+            <a:spLocks noGrp="1"/>
+          </p:cNvSpPr>
+          <p:nvPr>
+            <p:ph type="title"/>
+          </p:nvPr>
+        </p:nvSpPr>
+        <p:spPr/>
+        <p:txBody>
+          <a:bodyPr/>
+          <a:lstStyle/>
+          <a:p>
+            <a:r>
+              <a:rPr lang="en-GB" noProof="0" dirty="0"/>
+              <a:t>Sensing </a:t>
+            </a:r>
+            <a:r>
+              <a:rPr lang="en-GB" noProof="0" dirty="0" err="1"/>
+              <a:t>Edificio</a:t>
+            </a:r>
+            <a:endParaRPr lang="en-GB" noProof="0" dirty="0"/>
+          </a:p>
+        </p:txBody>
+      </p:sp>
+      <p:pic>
+        <p:nvPicPr>
+          <p:cNvPr id="9" name="Immagine 8">
+            <a:extLst>
+              <a:ext uri="{FF2B5EF4-FFF2-40B4-BE49-F238E27FC236}">
+                <a16:creationId xmlns:a16="http://schemas.microsoft.com/office/drawing/2014/main" id="{0BB34236-AA07-0D3C-DB13-530FEDA9373F}"/>
+              </a:ext>
+            </a:extLst>
+          </p:cNvPr>
+          <p:cNvPicPr>
+            <a:picLocks noChangeAspect="1"/>
+          </p:cNvPicPr>
+          <p:nvPr/>
+        </p:nvPicPr>
+        <p:blipFill>
+          <a:blip r:embed="rId2">
+            <a:clrChange>
+              <a:clrFrom>
+                <a:srgbClr val="FFFFFF"/>
+              </a:clrFrom>
+              <a:clrTo>
+                <a:srgbClr val="FFFFFF">
+                  <a:alpha val="0"/>
+                </a:srgbClr>
+              </a:clrTo>
+            </a:clrChange>
+            <a:extLst>
+              <a:ext uri="{28A0092B-C50C-407E-A947-70E740481C1C}">
+                <a14:useLocalDpi xmlns:a14="http://schemas.microsoft.com/office/drawing/2010/main" val="0"/>
+              </a:ext>
+            </a:extLst>
+          </a:blip>
+          <a:srcRect t="4171"/>
+          <a:stretch>
+            <a:fillRect/>
+          </a:stretch>
+        </p:blipFill>
+        <p:spPr>
+          <a:xfrm>
+            <a:off x="258698" y="635000"/>
+            <a:ext cx="11674603" cy="5588000"/>
+          </a:xfrm>
+          <a:prstGeom prst="rect">
+            <a:avLst/>
+          </a:prstGeom>
+        </p:spPr>
+      </p:pic>
+    </p:spTree>
+    <p:extLst>
+      <p:ext uri="{BB962C8B-B14F-4D97-AF65-F5344CB8AC3E}">
+        <p14:creationId xmlns:p14="http://schemas.microsoft.com/office/powerpoint/2010/main" val="2635465820"/>
       </p:ext>
     </p:extLst>
   </p:cSld>
@@ -28934,6 +29000,134 @@
   <p:cSld>
     <p:spTree>
       <p:nvGrpSpPr>
+        <p:cNvPr id="1" name="">
+          <a:extLst>
+            <a:ext uri="{FF2B5EF4-FFF2-40B4-BE49-F238E27FC236}">
+              <a16:creationId xmlns:a16="http://schemas.microsoft.com/office/drawing/2014/main" id="{1D3508A3-9AF7-E402-B1A6-6A13590A14B8}"/>
+            </a:ext>
+          </a:extLst>
+        </p:cNvPr>
+        <p:cNvGrpSpPr/>
+        <p:nvPr/>
+      </p:nvGrpSpPr>
+      <p:grpSpPr>
+        <a:xfrm>
+          <a:off x="0" y="0"/>
+          <a:ext cx="0" cy="0"/>
+          <a:chOff x="0" y="0"/>
+          <a:chExt cx="0" cy="0"/>
+        </a:xfrm>
+      </p:grpSpPr>
+      <p:sp>
+        <p:nvSpPr>
+          <p:cNvPr id="2" name="Titolo 1">
+            <a:extLst>
+              <a:ext uri="{FF2B5EF4-FFF2-40B4-BE49-F238E27FC236}">
+                <a16:creationId xmlns:a16="http://schemas.microsoft.com/office/drawing/2014/main" id="{7EE623D1-C04A-3033-23F6-CD038464033D}"/>
+              </a:ext>
+            </a:extLst>
+          </p:cNvPr>
+          <p:cNvSpPr>
+            <a:spLocks noGrp="1"/>
+          </p:cNvSpPr>
+          <p:nvPr>
+            <p:ph type="title"/>
+          </p:nvPr>
+        </p:nvSpPr>
+        <p:spPr/>
+        <p:txBody>
+          <a:bodyPr/>
+          <a:lstStyle/>
+          <a:p>
+            <a:r>
+              <a:rPr lang="en-GB" noProof="0" dirty="0" err="1"/>
+              <a:t>Sincronizzazione</a:t>
+            </a:r>
+            <a:r>
+              <a:rPr lang="en-GB" noProof="0" dirty="0"/>
+              <a:t> FPGA-PM1000: </a:t>
+            </a:r>
+            <a:r>
+              <a:rPr lang="en-GB" noProof="0" dirty="0" err="1"/>
+              <a:t>segnale</a:t>
+            </a:r>
+            <a:r>
+              <a:rPr lang="en-GB" noProof="0" dirty="0"/>
+              <a:t> </a:t>
+            </a:r>
+            <a:r>
+              <a:rPr lang="en-GB" noProof="0" dirty="0" err="1"/>
+              <a:t>ideale</a:t>
+            </a:r>
+            <a:endParaRPr lang="en-GB" noProof="0" dirty="0"/>
+          </a:p>
+        </p:txBody>
+      </p:sp>
+      <p:pic>
+        <p:nvPicPr>
+          <p:cNvPr id="4" name="Immagine 3">
+            <a:extLst>
+              <a:ext uri="{FF2B5EF4-FFF2-40B4-BE49-F238E27FC236}">
+                <a16:creationId xmlns:a16="http://schemas.microsoft.com/office/drawing/2014/main" id="{2FD782DD-5EB7-858D-DE99-C65FC36D4DC7}"/>
+              </a:ext>
+            </a:extLst>
+          </p:cNvPr>
+          <p:cNvPicPr>
+            <a:picLocks noChangeAspect="1"/>
+          </p:cNvPicPr>
+          <p:nvPr/>
+        </p:nvPicPr>
+        <p:blipFill>
+          <a:blip r:embed="rId2">
+            <a:clrChange>
+              <a:clrFrom>
+                <a:srgbClr val="FFFFFF"/>
+              </a:clrFrom>
+              <a:clrTo>
+                <a:srgbClr val="FFFFFF">
+                  <a:alpha val="0"/>
+                </a:srgbClr>
+              </a:clrTo>
+            </a:clrChange>
+            <a:extLst>
+              <a:ext uri="{28A0092B-C50C-407E-A947-70E740481C1C}">
+                <a14:useLocalDpi xmlns:a14="http://schemas.microsoft.com/office/drawing/2010/main" val="0"/>
+              </a:ext>
+            </a:extLst>
+          </a:blip>
+          <a:srcRect t="4484"/>
+          <a:stretch>
+            <a:fillRect/>
+          </a:stretch>
+        </p:blipFill>
+        <p:spPr>
+          <a:xfrm>
+            <a:off x="328612" y="720000"/>
+            <a:ext cx="11534775" cy="5503049"/>
+          </a:xfrm>
+          <a:prstGeom prst="rect">
+            <a:avLst/>
+          </a:prstGeom>
+        </p:spPr>
+      </p:pic>
+    </p:spTree>
+    <p:extLst>
+      <p:ext uri="{BB962C8B-B14F-4D97-AF65-F5344CB8AC3E}">
+        <p14:creationId xmlns:p14="http://schemas.microsoft.com/office/powerpoint/2010/main" val="3035573037"/>
+      </p:ext>
+    </p:extLst>
+  </p:cSld>
+  <p:clrMapOvr>
+    <a:masterClrMapping/>
+  </p:clrMapOvr>
+</p:sld>
+</file>
+
+<file path=ppt/slides/slide9.xml><?xml version="1.0" encoding="utf-8"?>
+<p:sld xmlns:a="http://schemas.openxmlformats.org/drawingml/2006/main" xmlns:r="http://schemas.openxmlformats.org/officeDocument/2006/relationships" xmlns:p="http://schemas.openxmlformats.org/presentationml/2006/main">
+  <p:cSld>
+    <p:spTree>
+      <p:nvGrpSpPr>
         <p:cNvPr id="1" name=""/>
         <p:cNvGrpSpPr/>
         <p:nvPr/>
@@ -29041,131 +29235,6 @@
     <p:extLst>
       <p:ext uri="{BB962C8B-B14F-4D97-AF65-F5344CB8AC3E}">
         <p14:creationId xmlns:p14="http://schemas.microsoft.com/office/powerpoint/2010/main" val="1009496160"/>
-      </p:ext>
-    </p:extLst>
-  </p:cSld>
-  <p:clrMapOvr>
-    <a:masterClrMapping/>
-  </p:clrMapOvr>
-</p:sld>
-</file>
-
-<file path=ppt/slides/slide9.xml><?xml version="1.0" encoding="utf-8"?>
-<p:sld xmlns:a="http://schemas.openxmlformats.org/drawingml/2006/main" xmlns:r="http://schemas.openxmlformats.org/officeDocument/2006/relationships" xmlns:p="http://schemas.openxmlformats.org/presentationml/2006/main">
-  <p:cSld>
-    <p:spTree>
-      <p:nvGrpSpPr>
-        <p:cNvPr id="1" name=""/>
-        <p:cNvGrpSpPr/>
-        <p:nvPr/>
-      </p:nvGrpSpPr>
-      <p:grpSpPr>
-        <a:xfrm>
-          <a:off x="0" y="0"/>
-          <a:ext cx="0" cy="0"/>
-          <a:chOff x="0" y="0"/>
-          <a:chExt cx="0" cy="0"/>
-        </a:xfrm>
-      </p:grpSpPr>
-      <p:sp>
-        <p:nvSpPr>
-          <p:cNvPr id="2" name="Titolo 1">
-            <a:extLst>
-              <a:ext uri="{FF2B5EF4-FFF2-40B4-BE49-F238E27FC236}">
-                <a16:creationId xmlns:a16="http://schemas.microsoft.com/office/drawing/2014/main" id="{450B4821-3306-2825-F659-BCD540293CBF}"/>
-              </a:ext>
-            </a:extLst>
-          </p:cNvPr>
-          <p:cNvSpPr>
-            <a:spLocks noGrp="1"/>
-          </p:cNvSpPr>
-          <p:nvPr>
-            <p:ph type="title"/>
-          </p:nvPr>
-        </p:nvSpPr>
-        <p:spPr/>
-        <p:txBody>
-          <a:bodyPr/>
-          <a:lstStyle/>
-          <a:p>
-            <a:r>
-              <a:rPr lang="en-GB" noProof="0" dirty="0"/>
-              <a:t>PSD SOP </a:t>
-            </a:r>
-            <a:r>
-              <a:rPr lang="en-GB" noProof="0" dirty="0" err="1"/>
-              <a:t>diversi</a:t>
-            </a:r>
-            <a:r>
-              <a:rPr lang="en-GB" noProof="0" dirty="0"/>
-              <a:t> </a:t>
-            </a:r>
-            <a:r>
-              <a:rPr lang="en-GB" noProof="0" dirty="0" err="1"/>
-              <a:t>valori</a:t>
-            </a:r>
-            <a:r>
-              <a:rPr lang="en-GB" noProof="0" dirty="0"/>
-              <a:t> di ATE</a:t>
-            </a:r>
-          </a:p>
-        </p:txBody>
-      </p:sp>
-      <p:sp>
-        <p:nvSpPr>
-          <p:cNvPr id="3" name="Segnaposto contenuto 2">
-            <a:extLst>
-              <a:ext uri="{FF2B5EF4-FFF2-40B4-BE49-F238E27FC236}">
-                <a16:creationId xmlns:a16="http://schemas.microsoft.com/office/drawing/2014/main" id="{8A523D95-9A85-051C-4B65-64C702150715}"/>
-              </a:ext>
-            </a:extLst>
-          </p:cNvPr>
-          <p:cNvSpPr>
-            <a:spLocks noGrp="1"/>
-          </p:cNvSpPr>
-          <p:nvPr>
-            <p:ph idx="1"/>
-          </p:nvPr>
-        </p:nvSpPr>
-        <p:spPr/>
-        <p:txBody>
-          <a:bodyPr/>
-          <a:lstStyle/>
-          <a:p>
-            <a:r>
-              <a:rPr lang="en-GB" noProof="0" dirty="0" err="1"/>
-              <a:t>Aspetto</a:t>
-            </a:r>
-            <a:r>
-              <a:rPr lang="en-GB" noProof="0" dirty="0"/>
-              <a:t> </a:t>
-            </a:r>
-            <a:r>
-              <a:rPr lang="en-GB" dirty="0"/>
-              <a:t>B</a:t>
-            </a:r>
-            <a:r>
-              <a:rPr lang="en-GB" noProof="0" dirty="0" err="1"/>
-              <a:t>en</a:t>
-            </a:r>
-            <a:r>
-              <a:rPr lang="en-GB" noProof="0" dirty="0"/>
-              <a:t> </a:t>
-            </a:r>
-            <a:r>
-              <a:rPr lang="en-GB" noProof="0" dirty="0">
-                <a:sym typeface="Wingdings" panose="05000000000000000000" pitchFamily="2" charset="2"/>
-              </a:rPr>
-              <a:t> </a:t>
-            </a:r>
-            <a:endParaRPr lang="en-GB" noProof="0" dirty="0"/>
-          </a:p>
-        </p:txBody>
-      </p:sp>
-    </p:spTree>
-    <p:extLst>
-      <p:ext uri="{BB962C8B-B14F-4D97-AF65-F5344CB8AC3E}">
-        <p14:creationId xmlns:p14="http://schemas.microsoft.com/office/powerpoint/2010/main" val="3775798004"/>
       </p:ext>
     </p:extLst>
   </p:cSld>
@@ -30382,20 +30451,20 @@
 </file>
 
 <file path=customXml/item1.xml><?xml version="1.0" encoding="utf-8"?>
-<p:properties xmlns:p="http://schemas.microsoft.com/office/2006/metadata/properties" xmlns:xsi="http://www.w3.org/2001/XMLSchema-instance" xmlns:pc="http://schemas.microsoft.com/office/infopath/2007/PartnerControls">
-  <documentManagement>
-    <_activity xmlns="e1991b7f-6b7d-449b-b767-f5f786c869d3" xsi:nil="true"/>
-  </documentManagement>
-</p:properties>
-</file>
-
-<file path=customXml/item2.xml><?xml version="1.0" encoding="utf-8"?>
 <?mso-contentType ?>
 <FormTemplates xmlns="http://schemas.microsoft.com/sharepoint/v3/contenttype/forms">
   <Display>DocumentLibraryForm</Display>
   <Edit>DocumentLibraryForm</Edit>
   <New>DocumentLibraryForm</New>
 </FormTemplates>
+</file>
+
+<file path=customXml/item2.xml><?xml version="1.0" encoding="utf-8"?>
+<p:properties xmlns:p="http://schemas.microsoft.com/office/2006/metadata/properties" xmlns:xsi="http://www.w3.org/2001/XMLSchema-instance" xmlns:pc="http://schemas.microsoft.com/office/infopath/2007/PartnerControls">
+  <documentManagement>
+    <_activity xmlns="e1991b7f-6b7d-449b-b767-f5f786c869d3" xsi:nil="true"/>
+  </documentManagement>
+</p:properties>
 </file>
 
 <file path=customXml/item3.xml><?xml version="1.0" encoding="utf-8"?>
@@ -30593,6 +30662,14 @@
 </file>
 
 <file path=customXml/itemProps1.xml><?xml version="1.0" encoding="utf-8"?>
+<ds:datastoreItem xmlns:ds="http://schemas.openxmlformats.org/officeDocument/2006/customXml" ds:itemID="{C49F161D-94DE-4FB8-B032-342C52D425B3}">
+  <ds:schemaRefs>
+    <ds:schemaRef ds:uri="http://schemas.microsoft.com/sharepoint/v3/contenttype/forms"/>
+  </ds:schemaRefs>
+</ds:datastoreItem>
+</file>
+
+<file path=customXml/itemProps2.xml><?xml version="1.0" encoding="utf-8"?>
 <ds:datastoreItem xmlns:ds="http://schemas.openxmlformats.org/officeDocument/2006/customXml" ds:itemID="{2CABA873-0994-4738-95F5-BEAE2390D7EB}">
   <ds:schemaRefs>
     <ds:schemaRef ds:uri="http://purl.org/dc/elements/1.1/"/>
@@ -30604,14 +30681,6 @@
     <ds:schemaRef ds:uri="http://schemas.openxmlformats.org/package/2006/metadata/core-properties"/>
     <ds:schemaRef ds:uri="http://schemas.microsoft.com/office/infopath/2007/PartnerControls"/>
     <ds:schemaRef ds:uri="http://purl.org/dc/terms/"/>
-  </ds:schemaRefs>
-</ds:datastoreItem>
-</file>
-
-<file path=customXml/itemProps2.xml><?xml version="1.0" encoding="utf-8"?>
-<ds:datastoreItem xmlns:ds="http://schemas.openxmlformats.org/officeDocument/2006/customXml" ds:itemID="{C49F161D-94DE-4FB8-B032-342C52D425B3}">
-  <ds:schemaRefs>
-    <ds:schemaRef ds:uri="http://schemas.microsoft.com/sharepoint/v3/contenttype/forms"/>
   </ds:schemaRefs>
 </ds:datastoreItem>
 </file>
